--- a/slides/11-ml-problem_and_validation.pptx
+++ b/slides/11-ml-problem_and_validation.pptx
@@ -2,52 +2,52 @@
 <file path=ppt/presentation.xml><?xml version="1.0" encoding="utf-8"?>
 <p:presentation xmlns:p="http://schemas.openxmlformats.org/presentationml/2006/main">
   <p:sldMasterIdLst>
-    <p:sldMasterId xmlns:r="http://schemas.openxmlformats.org/officeDocument/2006/relationships" id="2147483648" r:id="R939102aa09c4487e"/>
+    <p:sldMasterId xmlns:r="http://schemas.openxmlformats.org/officeDocument/2006/relationships" id="2147483648" r:id="R109a4c3787f44b1c"/>
   </p:sldMasterIdLst>
   <p:notesMasterIdLst>
-    <p:notesMasterId xmlns:r="http://schemas.openxmlformats.org/officeDocument/2006/relationships" r:id="R0ca12910706042e9"/>
+    <p:notesMasterId xmlns:r="http://schemas.openxmlformats.org/officeDocument/2006/relationships" r:id="R3c4aeca61def4818"/>
   </p:notesMasterIdLst>
   <p:sldIdLst>
-    <p:sldId xmlns:r="http://schemas.openxmlformats.org/officeDocument/2006/relationships" id="256" r:id="Rd6327c67c2d34d7b"/>
-    <p:sldId xmlns:r="http://schemas.openxmlformats.org/officeDocument/2006/relationships" id="257" r:id="R6af5b43063c74acb"/>
-    <p:sldId xmlns:r="http://schemas.openxmlformats.org/officeDocument/2006/relationships" id="258" r:id="Re276e17e3f4248c1"/>
-    <p:sldId xmlns:r="http://schemas.openxmlformats.org/officeDocument/2006/relationships" id="259" r:id="Rf3054b31d50742b5"/>
-    <p:sldId xmlns:r="http://schemas.openxmlformats.org/officeDocument/2006/relationships" id="260" r:id="Rcec6c6565ee247d8"/>
-    <p:sldId xmlns:r="http://schemas.openxmlformats.org/officeDocument/2006/relationships" id="261" r:id="R6f8d9319f7a84c39"/>
-    <p:sldId xmlns:r="http://schemas.openxmlformats.org/officeDocument/2006/relationships" id="262" r:id="Rd4e26eeb70e54b25"/>
-    <p:sldId xmlns:r="http://schemas.openxmlformats.org/officeDocument/2006/relationships" id="263" r:id="R8d27b0215f274372"/>
-    <p:sldId xmlns:r="http://schemas.openxmlformats.org/officeDocument/2006/relationships" id="264" r:id="R80e7f0b139434fd4"/>
-    <p:sldId xmlns:r="http://schemas.openxmlformats.org/officeDocument/2006/relationships" id="265" r:id="Rfb2aea9c588440aa"/>
-    <p:sldId xmlns:r="http://schemas.openxmlformats.org/officeDocument/2006/relationships" id="266" r:id="R3760ae88a6ad45d4"/>
-    <p:sldId xmlns:r="http://schemas.openxmlformats.org/officeDocument/2006/relationships" id="267" r:id="Re482946e56d741d5"/>
-    <p:sldId xmlns:r="http://schemas.openxmlformats.org/officeDocument/2006/relationships" id="268" r:id="R1e2594ed7cee4cb6"/>
-    <p:sldId xmlns:r="http://schemas.openxmlformats.org/officeDocument/2006/relationships" id="269" r:id="R44de0892e5334c10"/>
-    <p:sldId xmlns:r="http://schemas.openxmlformats.org/officeDocument/2006/relationships" id="270" r:id="Rbb2a5ac3fc9a43a7"/>
-    <p:sldId xmlns:r="http://schemas.openxmlformats.org/officeDocument/2006/relationships" id="271" r:id="Rb5705609df9046de"/>
-    <p:sldId xmlns:r="http://schemas.openxmlformats.org/officeDocument/2006/relationships" id="272" r:id="Rb1fa3345b11b4060"/>
-    <p:sldId xmlns:r="http://schemas.openxmlformats.org/officeDocument/2006/relationships" id="273" r:id="R22804db602bd4956"/>
-    <p:sldId xmlns:r="http://schemas.openxmlformats.org/officeDocument/2006/relationships" id="274" r:id="R083b8c065e824b3d"/>
-    <p:sldId xmlns:r="http://schemas.openxmlformats.org/officeDocument/2006/relationships" id="275" r:id="R32ae9900446d4857"/>
-    <p:sldId xmlns:r="http://schemas.openxmlformats.org/officeDocument/2006/relationships" id="276" r:id="Ra62bf581f43b45db"/>
-    <p:sldId xmlns:r="http://schemas.openxmlformats.org/officeDocument/2006/relationships" id="277" r:id="Rae1b138f483a494e"/>
-    <p:sldId xmlns:r="http://schemas.openxmlformats.org/officeDocument/2006/relationships" id="278" r:id="Rad035d6b86d74a4c"/>
-    <p:sldId xmlns:r="http://schemas.openxmlformats.org/officeDocument/2006/relationships" id="279" r:id="R716486477fdb4a04"/>
-    <p:sldId xmlns:r="http://schemas.openxmlformats.org/officeDocument/2006/relationships" id="280" r:id="R6d2f2280299a4313"/>
-    <p:sldId xmlns:r="http://schemas.openxmlformats.org/officeDocument/2006/relationships" id="281" r:id="Rf524e7684b3d45b6"/>
-    <p:sldId xmlns:r="http://schemas.openxmlformats.org/officeDocument/2006/relationships" id="282" r:id="Rdeaded6627884711"/>
-    <p:sldId xmlns:r="http://schemas.openxmlformats.org/officeDocument/2006/relationships" id="283" r:id="R83d0fc91dfdd48a8"/>
-    <p:sldId xmlns:r="http://schemas.openxmlformats.org/officeDocument/2006/relationships" id="284" r:id="R29f7234f947f40a9"/>
-    <p:sldId xmlns:r="http://schemas.openxmlformats.org/officeDocument/2006/relationships" id="285" r:id="R316ee3cdaab24576"/>
-    <p:sldId xmlns:r="http://schemas.openxmlformats.org/officeDocument/2006/relationships" id="286" r:id="Re9630ecd7a3f450d"/>
-    <p:sldId xmlns:r="http://schemas.openxmlformats.org/officeDocument/2006/relationships" id="287" r:id="R54462da4e16d426a"/>
-    <p:sldId xmlns:r="http://schemas.openxmlformats.org/officeDocument/2006/relationships" id="288" r:id="R318a66d6088b49cb"/>
-    <p:sldId xmlns:r="http://schemas.openxmlformats.org/officeDocument/2006/relationships" id="289" r:id="Rc5933a0111df4273"/>
-    <p:sldId xmlns:r="http://schemas.openxmlformats.org/officeDocument/2006/relationships" id="290" r:id="R918d93f1fc7e44af"/>
-    <p:sldId xmlns:r="http://schemas.openxmlformats.org/officeDocument/2006/relationships" id="291" r:id="R4a9d2b4f3b894521"/>
-    <p:sldId xmlns:r="http://schemas.openxmlformats.org/officeDocument/2006/relationships" id="292" r:id="Rf8040cbf784d4596"/>
-    <p:sldId xmlns:r="http://schemas.openxmlformats.org/officeDocument/2006/relationships" id="293" r:id="R3a89a8e4784d4aef"/>
-    <p:sldId xmlns:r="http://schemas.openxmlformats.org/officeDocument/2006/relationships" id="294" r:id="Rf39e96b691c44c26"/>
-    <p:sldId xmlns:r="http://schemas.openxmlformats.org/officeDocument/2006/relationships" id="295" r:id="R66589e952fbf4e10"/>
+    <p:sldId xmlns:r="http://schemas.openxmlformats.org/officeDocument/2006/relationships" id="256" r:id="R1457e7abe97b4247"/>
+    <p:sldId xmlns:r="http://schemas.openxmlformats.org/officeDocument/2006/relationships" id="257" r:id="Rd17a99ef6bb9449b"/>
+    <p:sldId xmlns:r="http://schemas.openxmlformats.org/officeDocument/2006/relationships" id="258" r:id="R52bf098f62e943d2"/>
+    <p:sldId xmlns:r="http://schemas.openxmlformats.org/officeDocument/2006/relationships" id="259" r:id="R9940800bdddd42ec"/>
+    <p:sldId xmlns:r="http://schemas.openxmlformats.org/officeDocument/2006/relationships" id="260" r:id="R3299c752e258402d"/>
+    <p:sldId xmlns:r="http://schemas.openxmlformats.org/officeDocument/2006/relationships" id="261" r:id="Rb2f61b377b794594"/>
+    <p:sldId xmlns:r="http://schemas.openxmlformats.org/officeDocument/2006/relationships" id="262" r:id="R87f7e9d7ee2e4715"/>
+    <p:sldId xmlns:r="http://schemas.openxmlformats.org/officeDocument/2006/relationships" id="263" r:id="Rff380cbf34d840e2"/>
+    <p:sldId xmlns:r="http://schemas.openxmlformats.org/officeDocument/2006/relationships" id="264" r:id="R84e4e514c87c49e1"/>
+    <p:sldId xmlns:r="http://schemas.openxmlformats.org/officeDocument/2006/relationships" id="265" r:id="R1fe45e25aafa424d"/>
+    <p:sldId xmlns:r="http://schemas.openxmlformats.org/officeDocument/2006/relationships" id="266" r:id="R0e5e2638b4464dda"/>
+    <p:sldId xmlns:r="http://schemas.openxmlformats.org/officeDocument/2006/relationships" id="267" r:id="R1d395fc12d494614"/>
+    <p:sldId xmlns:r="http://schemas.openxmlformats.org/officeDocument/2006/relationships" id="268" r:id="R980ffdbbdf154d3e"/>
+    <p:sldId xmlns:r="http://schemas.openxmlformats.org/officeDocument/2006/relationships" id="269" r:id="R3977f7e522f5423c"/>
+    <p:sldId xmlns:r="http://schemas.openxmlformats.org/officeDocument/2006/relationships" id="270" r:id="Rd4acdd17cde841ba"/>
+    <p:sldId xmlns:r="http://schemas.openxmlformats.org/officeDocument/2006/relationships" id="271" r:id="R482d5bb498274a18"/>
+    <p:sldId xmlns:r="http://schemas.openxmlformats.org/officeDocument/2006/relationships" id="272" r:id="Rb6bff566ab3d4d7a"/>
+    <p:sldId xmlns:r="http://schemas.openxmlformats.org/officeDocument/2006/relationships" id="273" r:id="R5bd055d2376b4e8d"/>
+    <p:sldId xmlns:r="http://schemas.openxmlformats.org/officeDocument/2006/relationships" id="274" r:id="R32528b4e74274406"/>
+    <p:sldId xmlns:r="http://schemas.openxmlformats.org/officeDocument/2006/relationships" id="275" r:id="R6f078de731834e82"/>
+    <p:sldId xmlns:r="http://schemas.openxmlformats.org/officeDocument/2006/relationships" id="276" r:id="R49bb57b9a8d04d96"/>
+    <p:sldId xmlns:r="http://schemas.openxmlformats.org/officeDocument/2006/relationships" id="277" r:id="Rd05381b7abcf4940"/>
+    <p:sldId xmlns:r="http://schemas.openxmlformats.org/officeDocument/2006/relationships" id="278" r:id="R61225d7e60694c67"/>
+    <p:sldId xmlns:r="http://schemas.openxmlformats.org/officeDocument/2006/relationships" id="279" r:id="Rb4fc5c8aeed8403b"/>
+    <p:sldId xmlns:r="http://schemas.openxmlformats.org/officeDocument/2006/relationships" id="280" r:id="Rb8eda7d498e5439f"/>
+    <p:sldId xmlns:r="http://schemas.openxmlformats.org/officeDocument/2006/relationships" id="281" r:id="R0026eddd6efa4841"/>
+    <p:sldId xmlns:r="http://schemas.openxmlformats.org/officeDocument/2006/relationships" id="282" r:id="R368267138277424d"/>
+    <p:sldId xmlns:r="http://schemas.openxmlformats.org/officeDocument/2006/relationships" id="283" r:id="R0afb6607bcbe4708"/>
+    <p:sldId xmlns:r="http://schemas.openxmlformats.org/officeDocument/2006/relationships" id="284" r:id="Rde01fd274dc14dd0"/>
+    <p:sldId xmlns:r="http://schemas.openxmlformats.org/officeDocument/2006/relationships" id="285" r:id="R5787034b9a954b3e"/>
+    <p:sldId xmlns:r="http://schemas.openxmlformats.org/officeDocument/2006/relationships" id="286" r:id="R92f39c7bc29c4ff3"/>
+    <p:sldId xmlns:r="http://schemas.openxmlformats.org/officeDocument/2006/relationships" id="287" r:id="Rde466655917b4cde"/>
+    <p:sldId xmlns:r="http://schemas.openxmlformats.org/officeDocument/2006/relationships" id="288" r:id="R3ba0abd60f7544f9"/>
+    <p:sldId xmlns:r="http://schemas.openxmlformats.org/officeDocument/2006/relationships" id="289" r:id="Reeef97944cc94150"/>
+    <p:sldId xmlns:r="http://schemas.openxmlformats.org/officeDocument/2006/relationships" id="290" r:id="R916b03643a2148b8"/>
+    <p:sldId xmlns:r="http://schemas.openxmlformats.org/officeDocument/2006/relationships" id="291" r:id="R379a0dda07184538"/>
+    <p:sldId xmlns:r="http://schemas.openxmlformats.org/officeDocument/2006/relationships" id="292" r:id="R7f1ba871c0e14b23"/>
+    <p:sldId xmlns:r="http://schemas.openxmlformats.org/officeDocument/2006/relationships" id="293" r:id="R25d3a772b1bd45a8"/>
+    <p:sldId xmlns:r="http://schemas.openxmlformats.org/officeDocument/2006/relationships" id="294" r:id="R0ea5596496dc441c"/>
+    <p:sldId xmlns:r="http://schemas.openxmlformats.org/officeDocument/2006/relationships" id="295" r:id="R4b789da87cf1441b"/>
   </p:sldIdLst>
   <p:sldSz cx="12192000" cy="6858000"/>
   <p:notesSz cx="6858000" cy="9144000"/>
@@ -481,7 +481,7 @@
           <a:lstStyle xmlns:a="http://schemas.openxmlformats.org/drawingml/2006/main"/>
           <a:p xmlns:a="http://schemas.openxmlformats.org/drawingml/2006/main">
             <a:r>
-              <a:t>Учебная лекция по машинному обучению в нанонауке. Иллюстрация на титуле схематична; не отображает результаты эксперимента. Подробный конспект: machine_learning/11-ml-problem_and_validation.md</a:t>
+              <a:t>Лекция 11. Определения, вывод формул и воспроизводимый пример: machine_learning/11-ml-problem_and_validation.md. Все числа в примерах учебные. </a:t>
             </a:r>
           </a:p>
         </p:txBody>
@@ -551,52 +551,7 @@
           <a:lstStyle xmlns:a="http://schemas.openxmlformats.org/drawingml/2006/main"/>
           <a:p xmlns:a="http://schemas.openxmlformats.org/drawingml/2006/main">
             <a:r>
-              <a:t>Новый объект задаёт тип разбиения</a:t>
-            </a:r>
-          </a:p>
-          <a:p xmlns:a="http://schemas.openxmlformats.org/drawingml/2006/main">
-            <a:r>
-              <a:t/>
-            </a:r>
-          </a:p>
-          <a:p xmlns:a="http://schemas.openxmlformats.org/drawingml/2006/main">
-            <a:r>
-              <a:t>1. Новая партия → группируем по batch_id</a:t>
-            </a:r>
-          </a:p>
-          <a:p xmlns:a="http://schemas.openxmlformats.org/drawingml/2006/main">
-            <a:r>
-              <a:t>2. Новая поставка сырья → группируем по поставке</a:t>
-            </a:r>
-          </a:p>
-          <a:p xmlns:a="http://schemas.openxmlformats.org/drawingml/2006/main">
-            <a:r>
-              <a:t>3. Новый прибор → тестируем перенос на другом приборе</a:t>
-            </a:r>
-          </a:p>
-          <a:p xmlns:a="http://schemas.openxmlformats.org/drawingml/2006/main">
-            <a:r>
-              <a:t/>
-            </a:r>
-          </a:p>
-          <a:p xmlns:a="http://schemas.openxmlformats.org/drawingml/2006/main">
-            <a:r>
-              <a:t>Вывод: Разбиение должно имитировать реальную задачу</a:t>
-            </a:r>
-          </a:p>
-          <a:p xmlns:a="http://schemas.openxmlformats.org/drawingml/2006/main">
-            <a:r>
-              <a:t/>
-            </a:r>
-          </a:p>
-          <a:p xmlns:a="http://schemas.openxmlformats.org/drawingml/2006/main">
-            <a:r>
-              <a:t>Подробное объяснение, методические ограничения и код: machine_learning/11-ml-problem_and_validation.md</a:t>
-            </a:r>
-          </a:p>
-          <a:p xmlns:a="http://schemas.openxmlformats.org/drawingml/2006/main">
-            <a:r>
-              <a:t>Справка по методам: https://scikit-learn.org/stable/modules/cross_validation.html и https://scikit-learn.org/stable/common_pitfalls.html</a:t>
+              <a:t>Лекция 11. Определения, вывод формул и воспроизводимый пример: machine_learning/11-ml-problem_and_validation.md. Все числа в примерах учебные. </a:t>
             </a:r>
           </a:p>
         </p:txBody>
@@ -666,52 +621,7 @@
           <a:lstStyle xmlns:a="http://schemas.openxmlformats.org/drawingml/2006/main"/>
           <a:p xmlns:a="http://schemas.openxmlformats.org/drawingml/2006/main">
             <a:r>
-              <a:t>Зачем нужен baseline</a:t>
-            </a:r>
-          </a:p>
-          <a:p xmlns:a="http://schemas.openxmlformats.org/drawingml/2006/main">
-            <a:r>
-              <a:t/>
-            </a:r>
-          </a:p>
-          <a:p xmlns:a="http://schemas.openxmlformats.org/drawingml/2006/main">
-            <a:r>
-              <a:t>1. DummyRegressor учит среднее только по train</a:t>
-            </a:r>
-          </a:p>
-          <a:p xmlns:a="http://schemas.openxmlformats.org/drawingml/2006/main">
-            <a:r>
-              <a:t>2. Лабораторное правило иногда сильнее простой ML-модели</a:t>
-            </a:r>
-          </a:p>
-          <a:p xmlns:a="http://schemas.openxmlformats.org/drawingml/2006/main">
-            <a:r>
-              <a:t>3. Сложная модель должна улучшать релевантное решение</a:t>
-            </a:r>
-          </a:p>
-          <a:p xmlns:a="http://schemas.openxmlformats.org/drawingml/2006/main">
-            <a:r>
-              <a:t/>
-            </a:r>
-          </a:p>
-          <a:p xmlns:a="http://schemas.openxmlformats.org/drawingml/2006/main">
-            <a:r>
-              <a:t>Вывод: Сравнивайте все методы на одном и том же тесте</a:t>
-            </a:r>
-          </a:p>
-          <a:p xmlns:a="http://schemas.openxmlformats.org/drawingml/2006/main">
-            <a:r>
-              <a:t/>
-            </a:r>
-          </a:p>
-          <a:p xmlns:a="http://schemas.openxmlformats.org/drawingml/2006/main">
-            <a:r>
-              <a:t>Подробное объяснение, методические ограничения и код: machine_learning/11-ml-problem_and_validation.md</a:t>
-            </a:r>
-          </a:p>
-          <a:p xmlns:a="http://schemas.openxmlformats.org/drawingml/2006/main">
-            <a:r>
-              <a:t>Справка по методам: https://scikit-learn.org/stable/modules/cross_validation.html и https://scikit-learn.org/stable/common_pitfalls.html</a:t>
+              <a:t>Лекция 11. Определения, вывод формул и воспроизводимый пример: machine_learning/11-ml-problem_and_validation.md. Все числа в примерах учебные. Документация: https://scikit-learn.org/stable/modules/cross_validation.html ; https://scikit-learn.org/stable/common_pitfalls.html</a:t>
             </a:r>
           </a:p>
         </p:txBody>
@@ -781,52 +691,7 @@
           <a:lstStyle xmlns:a="http://schemas.openxmlformats.org/drawingml/2006/main"/>
           <a:p xmlns:a="http://schemas.openxmlformats.org/drawingml/2006/main">
             <a:r>
-              <a:t>Сначала отделяем финальный тест</a:t>
-            </a:r>
-          </a:p>
-          <a:p xmlns:a="http://schemas.openxmlformats.org/drawingml/2006/main">
-            <a:r>
-              <a:t/>
-            </a:r>
-          </a:p>
-          <a:p xmlns:a="http://schemas.openxmlformats.org/drawingml/2006/main">
-            <a:r>
-              <a:t>1. Группы делят на разработку и тест до настройки</a:t>
-            </a:r>
-          </a:p>
-          <a:p xmlns:a="http://schemas.openxmlformats.org/drawingml/2006/main">
-            <a:r>
-              <a:t>2. Тестовые партии не участвуют в отборе признаков</a:t>
-            </a:r>
-          </a:p>
-          <a:p xmlns:a="http://schemas.openxmlformats.org/drawingml/2006/main">
-            <a:r>
-              <a:t>3. Один финальный отчёт после фиксации метода</a:t>
-            </a:r>
-          </a:p>
-          <a:p xmlns:a="http://schemas.openxmlformats.org/drawingml/2006/main">
-            <a:r>
-              <a:t/>
-            </a:r>
-          </a:p>
-          <a:p xmlns:a="http://schemas.openxmlformats.org/drawingml/2006/main">
-            <a:r>
-              <a:t>Вывод: Повторная настройка по тесту превращает его в разработку</a:t>
-            </a:r>
-          </a:p>
-          <a:p xmlns:a="http://schemas.openxmlformats.org/drawingml/2006/main">
-            <a:r>
-              <a:t/>
-            </a:r>
-          </a:p>
-          <a:p xmlns:a="http://schemas.openxmlformats.org/drawingml/2006/main">
-            <a:r>
-              <a:t>Подробное объяснение, методические ограничения и код: machine_learning/11-ml-problem_and_validation.md</a:t>
-            </a:r>
-          </a:p>
-          <a:p xmlns:a="http://schemas.openxmlformats.org/drawingml/2006/main">
-            <a:r>
-              <a:t>Справка по методам: https://scikit-learn.org/stable/modules/cross_validation.html и https://scikit-learn.org/stable/common_pitfalls.html</a:t>
+              <a:t>Лекция 11. Определения, вывод формул и воспроизводимый пример: machine_learning/11-ml-problem_and_validation.md. Все числа в примерах учебные. Документация: https://scikit-learn.org/stable/modules/cross_validation.html ; https://scikit-learn.org/stable/common_pitfalls.html</a:t>
             </a:r>
           </a:p>
         </p:txBody>
@@ -896,52 +761,7 @@
           <a:lstStyle xmlns:a="http://schemas.openxmlformats.org/drawingml/2006/main"/>
           <a:p xmlns:a="http://schemas.openxmlformats.org/drawingml/2006/main">
             <a:r>
-              <a:t>Внутренняя групповая проверка</a:t>
-            </a:r>
-          </a:p>
-          <a:p xmlns:a="http://schemas.openxmlformats.org/drawingml/2006/main">
-            <a:r>
-              <a:t/>
-            </a:r>
-          </a:p>
-          <a:p xmlns:a="http://schemas.openxmlformats.org/drawingml/2006/main">
-            <a:r>
-              <a:t>1. GroupKFold оставляет целую партию вне обучения</a:t>
-            </a:r>
-          </a:p>
-          <a:p xmlns:a="http://schemas.openxmlformats.org/drawingml/2006/main">
-            <a:r>
-              <a:t>2. Каждая складка заново обучает весь Pipeline</a:t>
-            </a:r>
-          </a:p>
-          <a:p xmlns:a="http://schemas.openxmlformats.org/drawingml/2006/main">
-            <a:r>
-              <a:t>3. Разброс ошибок между складками показывают, не скрывают</a:t>
-            </a:r>
-          </a:p>
-          <a:p xmlns:a="http://schemas.openxmlformats.org/drawingml/2006/main">
-            <a:r>
-              <a:t/>
-            </a:r>
-          </a:p>
-          <a:p xmlns:a="http://schemas.openxmlformats.org/drawingml/2006/main">
-            <a:r>
-              <a:t>Вывод: Четыре складки требуют хотя бы четыре независимые группы</a:t>
-            </a:r>
-          </a:p>
-          <a:p xmlns:a="http://schemas.openxmlformats.org/drawingml/2006/main">
-            <a:r>
-              <a:t/>
-            </a:r>
-          </a:p>
-          <a:p xmlns:a="http://schemas.openxmlformats.org/drawingml/2006/main">
-            <a:r>
-              <a:t>Подробное объяснение, методические ограничения и код: machine_learning/11-ml-problem_and_validation.md</a:t>
-            </a:r>
-          </a:p>
-          <a:p xmlns:a="http://schemas.openxmlformats.org/drawingml/2006/main">
-            <a:r>
-              <a:t>Справка по методам: https://scikit-learn.org/stable/modules/cross_validation.html и https://scikit-learn.org/stable/common_pitfalls.html</a:t>
+              <a:t>Лекция 11. Определения, вывод формул и воспроизводимый пример: machine_learning/11-ml-problem_and_validation.md. Все числа в примерах учебные. Документация: https://scikit-learn.org/stable/modules/cross_validation.html ; https://scikit-learn.org/stable/common_pitfalls.html</a:t>
             </a:r>
           </a:p>
         </p:txBody>
@@ -1011,52 +831,7 @@
           <a:lstStyle xmlns:a="http://schemas.openxmlformats.org/drawingml/2006/main"/>
           <a:p xmlns:a="http://schemas.openxmlformats.org/drawingml/2006/main">
             <a:r>
-              <a:t>Утечка из технических повторов</a:t>
-            </a:r>
-          </a:p>
-          <a:p xmlns:a="http://schemas.openxmlformats.org/drawingml/2006/main">
-            <a:r>
-              <a:t/>
-            </a:r>
-          </a:p>
-          <a:p xmlns:a="http://schemas.openxmlformats.org/drawingml/2006/main">
-            <a:r>
-              <a:t>1. Изображения одной партии в train и test дают завышение</a:t>
-            </a:r>
-          </a:p>
-          <a:p xmlns:a="http://schemas.openxmlformats.org/drawingml/2006/main">
-            <a:r>
-              <a:t>2. Модель запоминает особенности партии или фона</a:t>
-            </a:r>
-          </a:p>
-          <a:p xmlns:a="http://schemas.openxmlformats.org/drawingml/2006/main">
-            <a:r>
-              <a:t>3. Группировка либо агрегирование решает этот частный случай</a:t>
-            </a:r>
-          </a:p>
-          <a:p xmlns:a="http://schemas.openxmlformats.org/drawingml/2006/main">
-            <a:r>
-              <a:t/>
-            </a:r>
-          </a:p>
-          <a:p xmlns:a="http://schemas.openxmlformats.org/drawingml/2006/main">
-            <a:r>
-              <a:t>Вывод: Проверяйте реальные ID на обеих сторонах разбиения</a:t>
-            </a:r>
-          </a:p>
-          <a:p xmlns:a="http://schemas.openxmlformats.org/drawingml/2006/main">
-            <a:r>
-              <a:t/>
-            </a:r>
-          </a:p>
-          <a:p xmlns:a="http://schemas.openxmlformats.org/drawingml/2006/main">
-            <a:r>
-              <a:t>Подробное объяснение, методические ограничения и код: machine_learning/11-ml-problem_and_validation.md</a:t>
-            </a:r>
-          </a:p>
-          <a:p xmlns:a="http://schemas.openxmlformats.org/drawingml/2006/main">
-            <a:r>
-              <a:t>Справка по методам: https://scikit-learn.org/stable/modules/cross_validation.html и https://scikit-learn.org/stable/common_pitfalls.html</a:t>
+              <a:t>Лекция 11. Определения, вывод формул и воспроизводимый пример: machine_learning/11-ml-problem_and_validation.md. Все числа в примерах учебные. Документация: https://scikit-learn.org/stable/modules/cross_validation.html ; https://scikit-learn.org/stable/common_pitfalls.html</a:t>
             </a:r>
           </a:p>
         </p:txBody>
@@ -1126,52 +901,7 @@
           <a:lstStyle xmlns:a="http://schemas.openxmlformats.org/drawingml/2006/main"/>
           <a:p xmlns:a="http://schemas.openxmlformats.org/drawingml/2006/main">
             <a:r>
-              <a:t>Утечка через предобработку</a:t>
-            </a:r>
-          </a:p>
-          <a:p xmlns:a="http://schemas.openxmlformats.org/drawingml/2006/main">
-            <a:r>
-              <a:t/>
-            </a:r>
-          </a:p>
-          <a:p xmlns:a="http://schemas.openxmlformats.org/drawingml/2006/main">
-            <a:r>
-              <a:t>1. Масштабирование на всей таблице видит тестовую статистику</a:t>
-            </a:r>
-          </a:p>
-          <a:p xmlns:a="http://schemas.openxmlformats.org/drawingml/2006/main">
-            <a:r>
-              <a:t>2. Отбор пиков по всей y использует тестовые метки</a:t>
-            </a:r>
-          </a:p>
-          <a:p xmlns:a="http://schemas.openxmlformats.org/drawingml/2006/main">
-            <a:r>
-              <a:t>3. Параметры предобработки обучают внутри каждой складки</a:t>
-            </a:r>
-          </a:p>
-          <a:p xmlns:a="http://schemas.openxmlformats.org/drawingml/2006/main">
-            <a:r>
-              <a:t/>
-            </a:r>
-          </a:p>
-          <a:p xmlns:a="http://schemas.openxmlformats.org/drawingml/2006/main">
-            <a:r>
-              <a:t>Вывод: Pipeline помогает сохранить правильный порядок</a:t>
-            </a:r>
-          </a:p>
-          <a:p xmlns:a="http://schemas.openxmlformats.org/drawingml/2006/main">
-            <a:r>
-              <a:t/>
-            </a:r>
-          </a:p>
-          <a:p xmlns:a="http://schemas.openxmlformats.org/drawingml/2006/main">
-            <a:r>
-              <a:t>Подробное объяснение, методические ограничения и код: machine_learning/11-ml-problem_and_validation.md</a:t>
-            </a:r>
-          </a:p>
-          <a:p xmlns:a="http://schemas.openxmlformats.org/drawingml/2006/main">
-            <a:r>
-              <a:t>Справка по методам: https://scikit-learn.org/stable/modules/cross_validation.html и https://scikit-learn.org/stable/common_pitfalls.html</a:t>
+              <a:t>Лекция 11. Определения, вывод формул и воспроизводимый пример: machine_learning/11-ml-problem_and_validation.md. Все числа в примерах учебные. Документация: https://scikit-learn.org/stable/modules/cross_validation.html ; https://scikit-learn.org/stable/common_pitfalls.html</a:t>
             </a:r>
           </a:p>
         </p:txBody>
@@ -1241,52 +971,7 @@
           <a:lstStyle xmlns:a="http://schemas.openxmlformats.org/drawingml/2006/main"/>
           <a:p xmlns:a="http://schemas.openxmlformats.org/drawingml/2006/main">
             <a:r>
-              <a:t>Утечка из будущего</a:t>
-            </a:r>
-          </a:p>
-          <a:p xmlns:a="http://schemas.openxmlformats.org/drawingml/2006/main">
-            <a:r>
-              <a:t/>
-            </a:r>
-          </a:p>
-          <a:p xmlns:a="http://schemas.openxmlformats.org/drawingml/2006/main">
-            <a:r>
-              <a:t>1. Прогноз ранней рецептуры не знает поздней морфологии</a:t>
-            </a:r>
-          </a:p>
-          <a:p xmlns:a="http://schemas.openxmlformats.org/drawingml/2006/main">
-            <a:r>
-              <a:t>2. Признак с результатом теста качества сообщает ответ</a:t>
-            </a:r>
-          </a:p>
-          <a:p xmlns:a="http://schemas.openxmlformats.org/drawingml/2006/main">
-            <a:r>
-              <a:t>3. Метаданные о партии могут косвенно кодировать цель</a:t>
-            </a:r>
-          </a:p>
-          <a:p xmlns:a="http://schemas.openxmlformats.org/drawingml/2006/main">
-            <a:r>
-              <a:t/>
-            </a:r>
-          </a:p>
-          <a:p xmlns:a="http://schemas.openxmlformats.org/drawingml/2006/main">
-            <a:r>
-              <a:t>Вывод: Составьте временную схему получения каждого столбца</a:t>
-            </a:r>
-          </a:p>
-          <a:p xmlns:a="http://schemas.openxmlformats.org/drawingml/2006/main">
-            <a:r>
-              <a:t/>
-            </a:r>
-          </a:p>
-          <a:p xmlns:a="http://schemas.openxmlformats.org/drawingml/2006/main">
-            <a:r>
-              <a:t>Подробное объяснение, методические ограничения и код: machine_learning/11-ml-problem_and_validation.md</a:t>
-            </a:r>
-          </a:p>
-          <a:p xmlns:a="http://schemas.openxmlformats.org/drawingml/2006/main">
-            <a:r>
-              <a:t>Справка по методам: https://scikit-learn.org/stable/modules/cross_validation.html и https://scikit-learn.org/stable/common_pitfalls.html</a:t>
+              <a:t>Лекция 11. Определения, вывод формул и воспроизводимый пример: machine_learning/11-ml-problem_and_validation.md. Все числа в примерах учебные. Документация: https://scikit-learn.org/stable/modules/cross_validation.html ; https://scikit-learn.org/stable/common_pitfalls.html</a:t>
             </a:r>
           </a:p>
         </p:txBody>
@@ -1356,52 +1041,7 @@
           <a:lstStyle xmlns:a="http://schemas.openxmlformats.org/drawingml/2006/main"/>
           <a:p xmlns:a="http://schemas.openxmlformats.org/drawingml/2006/main">
             <a:r>
-              <a:t>Полный цикл оценки</a:t>
-            </a:r>
-          </a:p>
-          <a:p xmlns:a="http://schemas.openxmlformats.org/drawingml/2006/main">
-            <a:r>
-              <a:t/>
-            </a:r>
-          </a:p>
-          <a:p xmlns:a="http://schemas.openxmlformats.org/drawingml/2006/main">
-            <a:r>
-              <a:t>1. 1. Отложить группы для финального теста</a:t>
-            </a:r>
-          </a:p>
-          <a:p xmlns:a="http://schemas.openxmlformats.org/drawingml/2006/main">
-            <a:r>
-              <a:t>2. 2. Выбрать метод по CV на остальных группах</a:t>
-            </a:r>
-          </a:p>
-          <a:p xmlns:a="http://schemas.openxmlformats.org/drawingml/2006/main">
-            <a:r>
-              <a:t>3. 3. Обучить на разработке и оценить на тесте</a:t>
-            </a:r>
-          </a:p>
-          <a:p xmlns:a="http://schemas.openxmlformats.org/drawingml/2006/main">
-            <a:r>
-              <a:t/>
-            </a:r>
-          </a:p>
-          <a:p xmlns:a="http://schemas.openxmlformats.org/drawingml/2006/main">
-            <a:r>
-              <a:t>Вывод: Тест не служит источником новых гиперпараметров</a:t>
-            </a:r>
-          </a:p>
-          <a:p xmlns:a="http://schemas.openxmlformats.org/drawingml/2006/main">
-            <a:r>
-              <a:t/>
-            </a:r>
-          </a:p>
-          <a:p xmlns:a="http://schemas.openxmlformats.org/drawingml/2006/main">
-            <a:r>
-              <a:t>Подробное объяснение, методические ограничения и код: machine_learning/11-ml-problem_and_validation.md</a:t>
-            </a:r>
-          </a:p>
-          <a:p xmlns:a="http://schemas.openxmlformats.org/drawingml/2006/main">
-            <a:r>
-              <a:t>Справка по методам: https://scikit-learn.org/stable/modules/cross_validation.html и https://scikit-learn.org/stable/common_pitfalls.html</a:t>
+              <a:t>Лекция 11. Определения, вывод формул и воспроизводимый пример: machine_learning/11-ml-problem_and_validation.md. Все числа в примерах учебные. Документация: https://scikit-learn.org/stable/modules/cross_validation.html ; https://scikit-learn.org/stable/common_pitfalls.html</a:t>
             </a:r>
           </a:p>
         </p:txBody>
@@ -1471,52 +1111,7 @@
           <a:lstStyle xmlns:a="http://schemas.openxmlformats.org/drawingml/2006/main"/>
           <a:p xmlns:a="http://schemas.openxmlformats.org/drawingml/2006/main">
             <a:r>
-              <a:t>Pipeline: масштаб и модель</a:t>
-            </a:r>
-          </a:p>
-          <a:p xmlns:a="http://schemas.openxmlformats.org/drawingml/2006/main">
-            <a:r>
-              <a:t/>
-            </a:r>
-          </a:p>
-          <a:p xmlns:a="http://schemas.openxmlformats.org/drawingml/2006/main">
-            <a:r>
-              <a:t>1. SimpleImputer заменяет пропуски по train</a:t>
-            </a:r>
-          </a:p>
-          <a:p xmlns:a="http://schemas.openxmlformats.org/drawingml/2006/main">
-            <a:r>
-              <a:t>2. StandardScaler оценивает среднее и масштаб по train</a:t>
-            </a:r>
-          </a:p>
-          <a:p xmlns:a="http://schemas.openxmlformats.org/drawingml/2006/main">
-            <a:r>
-              <a:t>3. Ridge обучается на преобразованных признаках</a:t>
-            </a:r>
-          </a:p>
-          <a:p xmlns:a="http://schemas.openxmlformats.org/drawingml/2006/main">
-            <a:r>
-              <a:t/>
-            </a:r>
-          </a:p>
-          <a:p xmlns:a="http://schemas.openxmlformats.org/drawingml/2006/main">
-            <a:r>
-              <a:t>Вывод: На тесте используются сохранённые параметры преобразований</a:t>
-            </a:r>
-          </a:p>
-          <a:p xmlns:a="http://schemas.openxmlformats.org/drawingml/2006/main">
-            <a:r>
-              <a:t/>
-            </a:r>
-          </a:p>
-          <a:p xmlns:a="http://schemas.openxmlformats.org/drawingml/2006/main">
-            <a:r>
-              <a:t>Подробное объяснение, методические ограничения и код: machine_learning/11-ml-problem_and_validation.md</a:t>
-            </a:r>
-          </a:p>
-          <a:p xmlns:a="http://schemas.openxmlformats.org/drawingml/2006/main">
-            <a:r>
-              <a:t>Справка по методам: https://scikit-learn.org/stable/modules/cross_validation.html и https://scikit-learn.org/stable/common_pitfalls.html</a:t>
+              <a:t>Лекция 11. Определения, вывод формул и воспроизводимый пример: machine_learning/11-ml-problem_and_validation.md. Все числа в примерах учебные. Документация: https://scikit-learn.org/stable/modules/cross_validation.html ; https://scikit-learn.org/stable/common_pitfalls.html</a:t>
             </a:r>
           </a:p>
         </p:txBody>
@@ -1586,52 +1181,7 @@
           <a:lstStyle xmlns:a="http://schemas.openxmlformats.org/drawingml/2006/main"/>
           <a:p xmlns:a="http://schemas.openxmlformats.org/drawingml/2006/main">
             <a:r>
-              <a:t>Модель ошибается в физических единицах</a:t>
-            </a:r>
-          </a:p>
-          <a:p xmlns:a="http://schemas.openxmlformats.org/drawingml/2006/main">
-            <a:r>
-              <a:t/>
-            </a:r>
-          </a:p>
-          <a:p xmlns:a="http://schemas.openxmlformats.org/drawingml/2006/main">
-            <a:r>
-              <a:t>1. MAE = средняя абсолютная ошибка, здесь нм</a:t>
-            </a:r>
-          </a:p>
-          <a:p xmlns:a="http://schemas.openxmlformats.org/drawingml/2006/main">
-            <a:r>
-              <a:t>2. RMSE сильнее штрафует большие промахи</a:t>
-            </a:r>
-          </a:p>
-          <a:p xmlns:a="http://schemas.openxmlformats.org/drawingml/2006/main">
-            <a:r>
-              <a:t>3. Порог полезности задают относительно решения и точности измерения</a:t>
-            </a:r>
-          </a:p>
-          <a:p xmlns:a="http://schemas.openxmlformats.org/drawingml/2006/main">
-            <a:r>
-              <a:t/>
-            </a:r>
-          </a:p>
-          <a:p xmlns:a="http://schemas.openxmlformats.org/drawingml/2006/main">
-            <a:r>
-              <a:t>Вывод: MAE 8 нм хорош только в контексте задачи</a:t>
-            </a:r>
-          </a:p>
-          <a:p xmlns:a="http://schemas.openxmlformats.org/drawingml/2006/main">
-            <a:r>
-              <a:t/>
-            </a:r>
-          </a:p>
-          <a:p xmlns:a="http://schemas.openxmlformats.org/drawingml/2006/main">
-            <a:r>
-              <a:t>Подробное объяснение, методические ограничения и код: machine_learning/11-ml-problem_and_validation.md</a:t>
-            </a:r>
-          </a:p>
-          <a:p xmlns:a="http://schemas.openxmlformats.org/drawingml/2006/main">
-            <a:r>
-              <a:t>Справка по методам: https://scikit-learn.org/stable/modules/cross_validation.html и https://scikit-learn.org/stable/common_pitfalls.html</a:t>
+              <a:t>Лекция 11. Определения, вывод формул и воспроизводимый пример: machine_learning/11-ml-problem_and_validation.md. Все числа в примерах учебные. Документация: https://scikit-learn.org/stable/modules/model_evaluation.html</a:t>
             </a:r>
           </a:p>
         </p:txBody>
@@ -1701,52 +1251,7 @@
           <a:lstStyle xmlns:a="http://schemas.openxmlformats.org/drawingml/2006/main"/>
           <a:p xmlns:a="http://schemas.openxmlformats.org/drawingml/2006/main">
             <a:r>
-              <a:t>Задача предшествует алгоритму</a:t>
-            </a:r>
-          </a:p>
-          <a:p xmlns:a="http://schemas.openxmlformats.org/drawingml/2006/main">
-            <a:r>
-              <a:t/>
-            </a:r>
-          </a:p>
-          <a:p xmlns:a="http://schemas.openxmlformats.org/drawingml/2006/main">
-            <a:r>
-              <a:t>1. Решение: выбрать условия следующей партии</a:t>
-            </a:r>
-          </a:p>
-          <a:p xmlns:a="http://schemas.openxmlformats.org/drawingml/2006/main">
-            <a:r>
-              <a:t>2. Цель: размер частиц в нм по заранее заданному методу</a:t>
-            </a:r>
-          </a:p>
-          <a:p xmlns:a="http://schemas.openxmlformats.org/drawingml/2006/main">
-            <a:r>
-              <a:t>3. Входы: рецепт и настройки, известные до синтеза</a:t>
-            </a:r>
-          </a:p>
-          <a:p xmlns:a="http://schemas.openxmlformats.org/drawingml/2006/main">
-            <a:r>
-              <a:t/>
-            </a:r>
-          </a:p>
-          <a:p xmlns:a="http://schemas.openxmlformats.org/drawingml/2006/main">
-            <a:r>
-              <a:t>Вывод: Момент прогноза определяет допустимые признаки</a:t>
-            </a:r>
-          </a:p>
-          <a:p xmlns:a="http://schemas.openxmlformats.org/drawingml/2006/main">
-            <a:r>
-              <a:t/>
-            </a:r>
-          </a:p>
-          <a:p xmlns:a="http://schemas.openxmlformats.org/drawingml/2006/main">
-            <a:r>
-              <a:t>Подробное объяснение, методические ограничения и код: machine_learning/11-ml-problem_and_validation.md</a:t>
-            </a:r>
-          </a:p>
-          <a:p xmlns:a="http://schemas.openxmlformats.org/drawingml/2006/main">
-            <a:r>
-              <a:t>Справка по методам: https://scikit-learn.org/stable/modules/cross_validation.html и https://scikit-learn.org/stable/common_pitfalls.html</a:t>
+              <a:t>Лекция 11. Определения, вывод формул и воспроизводимый пример: machine_learning/11-ml-problem_and_validation.md. Все числа в примерах учебные. </a:t>
             </a:r>
           </a:p>
         </p:txBody>
@@ -1816,52 +1321,7 @@
           <a:lstStyle xmlns:a="http://schemas.openxmlformats.org/drawingml/2006/main"/>
           <a:p xmlns:a="http://schemas.openxmlformats.org/drawingml/2006/main">
             <a:r>
-              <a:t>R² не заменяет анализ ошибок</a:t>
-            </a:r>
-          </a:p>
-          <a:p xmlns:a="http://schemas.openxmlformats.org/drawingml/2006/main">
-            <a:r>
-              <a:t/>
-            </a:r>
-          </a:p>
-          <a:p xmlns:a="http://schemas.openxmlformats.org/drawingml/2006/main">
-            <a:r>
-              <a:t>1. R² сравнивает с константным прогнозом</a:t>
-            </a:r>
-          </a:p>
-          <a:p xmlns:a="http://schemas.openxmlformats.org/drawingml/2006/main">
-            <a:r>
-              <a:t>2. На независимом тесте R² может стать отрицательным</a:t>
-            </a:r>
-          </a:p>
-          <a:p xmlns:a="http://schemas.openxmlformats.org/drawingml/2006/main">
-            <a:r>
-              <a:t>3. Даже высокий R² не исключает опасных промахов</a:t>
-            </a:r>
-          </a:p>
-          <a:p xmlns:a="http://schemas.openxmlformats.org/drawingml/2006/main">
-            <a:r>
-              <a:t/>
-            </a:r>
-          </a:p>
-          <a:p xmlns:a="http://schemas.openxmlformats.org/drawingml/2006/main">
-            <a:r>
-              <a:t>Вывод: Покажите остатки и ошибки по диапазонам</a:t>
-            </a:r>
-          </a:p>
-          <a:p xmlns:a="http://schemas.openxmlformats.org/drawingml/2006/main">
-            <a:r>
-              <a:t/>
-            </a:r>
-          </a:p>
-          <a:p xmlns:a="http://schemas.openxmlformats.org/drawingml/2006/main">
-            <a:r>
-              <a:t>Подробное объяснение, методические ограничения и код: machine_learning/11-ml-problem_and_validation.md</a:t>
-            </a:r>
-          </a:p>
-          <a:p xmlns:a="http://schemas.openxmlformats.org/drawingml/2006/main">
-            <a:r>
-              <a:t>Справка по методам: https://scikit-learn.org/stable/modules/cross_validation.html и https://scikit-learn.org/stable/common_pitfalls.html</a:t>
+              <a:t>Лекция 11. Определения, вывод формул и воспроизводимый пример: machine_learning/11-ml-problem_and_validation.md. Все числа в примерах учебные. Документация: https://scikit-learn.org/stable/modules/model_evaluation.html</a:t>
             </a:r>
           </a:p>
         </p:txBody>
@@ -1931,52 +1391,7 @@
           <a:lstStyle xmlns:a="http://schemas.openxmlformats.org/drawingml/2006/main"/>
           <a:p xmlns:a="http://schemas.openxmlformats.org/drawingml/2006/main">
             <a:r>
-              <a:t>Что рисовать рядом с метрикой</a:t>
-            </a:r>
-          </a:p>
-          <a:p xmlns:a="http://schemas.openxmlformats.org/drawingml/2006/main">
-            <a:r>
-              <a:t/>
-            </a:r>
-          </a:p>
-          <a:p xmlns:a="http://schemas.openxmlformats.org/drawingml/2006/main">
-            <a:r>
-              <a:t>1. Измерено против предсказано с линией равенства</a:t>
-            </a:r>
-          </a:p>
-          <a:p xmlns:a="http://schemas.openxmlformats.org/drawingml/2006/main">
-            <a:r>
-              <a:t>2. Остаток против прогноза и факторов синтеза</a:t>
-            </a:r>
-          </a:p>
-          <a:p xmlns:a="http://schemas.openxmlformats.org/drawingml/2006/main">
-            <a:r>
-              <a:t>3. Ошибки по партиям, прибору и диапазону</a:t>
-            </a:r>
-          </a:p>
-          <a:p xmlns:a="http://schemas.openxmlformats.org/drawingml/2006/main">
-            <a:r>
-              <a:t/>
-            </a:r>
-          </a:p>
-          <a:p xmlns:a="http://schemas.openxmlformats.org/drawingml/2006/main">
-            <a:r>
-              <a:t>Вывод: Систематический сдвиг виден на графике лучше, чем в среднем MAE</a:t>
-            </a:r>
-          </a:p>
-          <a:p xmlns:a="http://schemas.openxmlformats.org/drawingml/2006/main">
-            <a:r>
-              <a:t/>
-            </a:r>
-          </a:p>
-          <a:p xmlns:a="http://schemas.openxmlformats.org/drawingml/2006/main">
-            <a:r>
-              <a:t>Подробное объяснение, методические ограничения и код: machine_learning/11-ml-problem_and_validation.md</a:t>
-            </a:r>
-          </a:p>
-          <a:p xmlns:a="http://schemas.openxmlformats.org/drawingml/2006/main">
-            <a:r>
-              <a:t>Справка по методам: https://scikit-learn.org/stable/modules/cross_validation.html и https://scikit-learn.org/stable/common_pitfalls.html</a:t>
+              <a:t>Лекция 11. Определения, вывод формул и воспроизводимый пример: machine_learning/11-ml-problem_and_validation.md. Все числа в примерах учебные. Документация: https://scikit-learn.org/stable/modules/model_evaluation.html</a:t>
             </a:r>
           </a:p>
         </p:txBody>
@@ -2046,52 +1461,7 @@
           <a:lstStyle xmlns:a="http://schemas.openxmlformats.org/drawingml/2006/main"/>
           <a:p xmlns:a="http://schemas.openxmlformats.org/drawingml/2006/main">
             <a:r>
-              <a:t>Повторы и неопределённость метрики</a:t>
-            </a:r>
-          </a:p>
-          <a:p xmlns:a="http://schemas.openxmlformats.org/drawingml/2006/main">
-            <a:r>
-              <a:t/>
-            </a:r>
-          </a:p>
-          <a:p xmlns:a="http://schemas.openxmlformats.org/drawingml/2006/main">
-            <a:r>
-              <a:t>1. Соседние поля зрения коррелированы</a:t>
-            </a:r>
-          </a:p>
-          <a:p xmlns:a="http://schemas.openxmlformats.org/drawingml/2006/main">
-            <a:r>
-              <a:t>2. Пересэмплировать надо независимые группы</a:t>
-            </a:r>
-          </a:p>
-          <a:p xmlns:a="http://schemas.openxmlformats.org/drawingml/2006/main">
-            <a:r>
-              <a:t>3. Малое число партий даёт широкий разброс качества</a:t>
-            </a:r>
-          </a:p>
-          <a:p xmlns:a="http://schemas.openxmlformats.org/drawingml/2006/main">
-            <a:r>
-              <a:t/>
-            </a:r>
-          </a:p>
-          <a:p xmlns:a="http://schemas.openxmlformats.org/drawingml/2006/main">
-            <a:r>
-              <a:t>Вывод: Укажите n партий рядом с любой оценкой точности</a:t>
-            </a:r>
-          </a:p>
-          <a:p xmlns:a="http://schemas.openxmlformats.org/drawingml/2006/main">
-            <a:r>
-              <a:t/>
-            </a:r>
-          </a:p>
-          <a:p xmlns:a="http://schemas.openxmlformats.org/drawingml/2006/main">
-            <a:r>
-              <a:t>Подробное объяснение, методические ограничения и код: machine_learning/11-ml-problem_and_validation.md</a:t>
-            </a:r>
-          </a:p>
-          <a:p xmlns:a="http://schemas.openxmlformats.org/drawingml/2006/main">
-            <a:r>
-              <a:t>Справка по методам: https://scikit-learn.org/stable/modules/cross_validation.html и https://scikit-learn.org/stable/common_pitfalls.html</a:t>
+              <a:t>Лекция 11. Определения, вывод формул и воспроизводимый пример: machine_learning/11-ml-problem_and_validation.md. Все числа в примерах учебные. Документация: https://scikit-learn.org/stable/modules/model_evaluation.html</a:t>
             </a:r>
           </a:p>
         </p:txBody>
@@ -2161,52 +1531,7 @@
           <a:lstStyle xmlns:a="http://schemas.openxmlformats.org/drawingml/2006/main"/>
           <a:p xmlns:a="http://schemas.openxmlformats.org/drawingml/2006/main">
             <a:r>
-              <a:t>Классификация: что такое положительный класс</a:t>
-            </a:r>
-          </a:p>
-          <a:p xmlns:a="http://schemas.openxmlformats.org/drawingml/2006/main">
-            <a:r>
-              <a:t/>
-            </a:r>
-          </a:p>
-          <a:p xmlns:a="http://schemas.openxmlformats.org/drawingml/2006/main">
-            <a:r>
-              <a:t>1. Категория определяется отдельным эталонным тестом</a:t>
-            </a:r>
-          </a:p>
-          <a:p xmlns:a="http://schemas.openxmlformats.org/drawingml/2006/main">
-            <a:r>
-              <a:t>2. Критерий стабильности фиксируют до обучения</a:t>
-            </a:r>
-          </a:p>
-          <a:p xmlns:a="http://schemas.openxmlformats.org/drawingml/2006/main">
-            <a:r>
-              <a:t>3. Доля положительных партий важна для выбора метрики</a:t>
-            </a:r>
-          </a:p>
-          <a:p xmlns:a="http://schemas.openxmlformats.org/drawingml/2006/main">
-            <a:r>
-              <a:t/>
-            </a:r>
-          </a:p>
-          <a:p xmlns:a="http://schemas.openxmlformats.org/drawingml/2006/main">
-            <a:r>
-              <a:t>Вывод: Порог физического свойства не выбирают по финальному тесту</a:t>
-            </a:r>
-          </a:p>
-          <a:p xmlns:a="http://schemas.openxmlformats.org/drawingml/2006/main">
-            <a:r>
-              <a:t/>
-            </a:r>
-          </a:p>
-          <a:p xmlns:a="http://schemas.openxmlformats.org/drawingml/2006/main">
-            <a:r>
-              <a:t>Подробное объяснение, методические ограничения и код: machine_learning/11-ml-problem_and_validation.md</a:t>
-            </a:r>
-          </a:p>
-          <a:p xmlns:a="http://schemas.openxmlformats.org/drawingml/2006/main">
-            <a:r>
-              <a:t>Справка по методам: https://scikit-learn.org/stable/modules/cross_validation.html и https://scikit-learn.org/stable/common_pitfalls.html</a:t>
+              <a:t>Лекция 11. Определения, вывод формул и воспроизводимый пример: machine_learning/11-ml-problem_and_validation.md. Все числа в примерах учебные. Документация: https://scikit-learn.org/stable/modules/model_evaluation.html</a:t>
             </a:r>
           </a:p>
         </p:txBody>
@@ -2276,52 +1601,7 @@
           <a:lstStyle xmlns:a="http://schemas.openxmlformats.org/drawingml/2006/main"/>
           <a:p xmlns:a="http://schemas.openxmlformats.org/drawingml/2006/main">
             <a:r>
-              <a:t>Матрица ошибок</a:t>
-            </a:r>
-          </a:p>
-          <a:p xmlns:a="http://schemas.openxmlformats.org/drawingml/2006/main">
-            <a:r>
-              <a:t/>
-            </a:r>
-          </a:p>
-          <a:p xmlns:a="http://schemas.openxmlformats.org/drawingml/2006/main">
-            <a:r>
-              <a:t>1. TP и FN описывают положительный класс</a:t>
-            </a:r>
-          </a:p>
-          <a:p xmlns:a="http://schemas.openxmlformats.org/drawingml/2006/main">
-            <a:r>
-              <a:t>2. FP и TN описывают отрицательный класс</a:t>
-            </a:r>
-          </a:p>
-          <a:p xmlns:a="http://schemas.openxmlformats.org/drawingml/2006/main">
-            <a:r>
-              <a:t>3. Цена пропуска брака может отличаться от цены проверки</a:t>
-            </a:r>
-          </a:p>
-          <a:p xmlns:a="http://schemas.openxmlformats.org/drawingml/2006/main">
-            <a:r>
-              <a:t/>
-            </a:r>
-          </a:p>
-          <a:p xmlns:a="http://schemas.openxmlformats.org/drawingml/2006/main">
-            <a:r>
-              <a:t>Вывод: Прежде чем читать precision, укажите смысл положительного класса</a:t>
-            </a:r>
-          </a:p>
-          <a:p xmlns:a="http://schemas.openxmlformats.org/drawingml/2006/main">
-            <a:r>
-              <a:t/>
-            </a:r>
-          </a:p>
-          <a:p xmlns:a="http://schemas.openxmlformats.org/drawingml/2006/main">
-            <a:r>
-              <a:t>Подробное объяснение, методические ограничения и код: machine_learning/11-ml-problem_and_validation.md</a:t>
-            </a:r>
-          </a:p>
-          <a:p xmlns:a="http://schemas.openxmlformats.org/drawingml/2006/main">
-            <a:r>
-              <a:t>Справка по методам: https://scikit-learn.org/stable/modules/cross_validation.html и https://scikit-learn.org/stable/common_pitfalls.html</a:t>
+              <a:t>Лекция 11. Определения, вывод формул и воспроизводимый пример: machine_learning/11-ml-problem_and_validation.md. Все числа в примерах учебные. Документация: https://scikit-learn.org/stable/modules/model_evaluation.html</a:t>
             </a:r>
           </a:p>
         </p:txBody>
@@ -2391,52 +1671,7 @@
           <a:lstStyle xmlns:a="http://schemas.openxmlformats.org/drawingml/2006/main"/>
           <a:p xmlns:a="http://schemas.openxmlformats.org/drawingml/2006/main">
             <a:r>
-              <a:t>Accuracy при дисбалансе обманчива</a:t>
-            </a:r>
-          </a:p>
-          <a:p xmlns:a="http://schemas.openxmlformats.org/drawingml/2006/main">
-            <a:r>
-              <a:t/>
-            </a:r>
-          </a:p>
-          <a:p xmlns:a="http://schemas.openxmlformats.org/drawingml/2006/main">
-            <a:r>
-              <a:t>1. 90% пригодных партий дают 90% accuracy при прогнозе «все пригодны»</a:t>
-            </a:r>
-          </a:p>
-          <a:p xmlns:a="http://schemas.openxmlformats.org/drawingml/2006/main">
-            <a:r>
-              <a:t>2. Recall: доля найденных положительных случаев</a:t>
-            </a:r>
-          </a:p>
-          <a:p xmlns:a="http://schemas.openxmlformats.org/drawingml/2006/main">
-            <a:r>
-              <a:t>3. Precision: доля истинных среди отмеченных положительных</a:t>
-            </a:r>
-          </a:p>
-          <a:p xmlns:a="http://schemas.openxmlformats.org/drawingml/2006/main">
-            <a:r>
-              <a:t/>
-            </a:r>
-          </a:p>
-          <a:p xmlns:a="http://schemas.openxmlformats.org/drawingml/2006/main">
-            <a:r>
-              <a:t>Вывод: Смотрите на матрицу ошибок и стоимость решений</a:t>
-            </a:r>
-          </a:p>
-          <a:p xmlns:a="http://schemas.openxmlformats.org/drawingml/2006/main">
-            <a:r>
-              <a:t/>
-            </a:r>
-          </a:p>
-          <a:p xmlns:a="http://schemas.openxmlformats.org/drawingml/2006/main">
-            <a:r>
-              <a:t>Подробное объяснение, методические ограничения и код: machine_learning/11-ml-problem_and_validation.md</a:t>
-            </a:r>
-          </a:p>
-          <a:p xmlns:a="http://schemas.openxmlformats.org/drawingml/2006/main">
-            <a:r>
-              <a:t>Справка по методам: https://scikit-learn.org/stable/modules/cross_validation.html и https://scikit-learn.org/stable/common_pitfalls.html</a:t>
+              <a:t>Лекция 11. Определения, вывод формул и воспроизводимый пример: machine_learning/11-ml-problem_and_validation.md. Все числа в примерах учебные. Документация: https://scikit-learn.org/stable/modules/model_evaluation.html</a:t>
             </a:r>
           </a:p>
         </p:txBody>
@@ -2506,52 +1741,7 @@
           <a:lstStyle xmlns:a="http://schemas.openxmlformats.org/drawingml/2006/main"/>
           <a:p xmlns:a="http://schemas.openxmlformats.org/drawingml/2006/main">
             <a:r>
-              <a:t>Вероятность требует калибровки</a:t>
-            </a:r>
-          </a:p>
-          <a:p xmlns:a="http://schemas.openxmlformats.org/drawingml/2006/main">
-            <a:r>
-              <a:t/>
-            </a:r>
-          </a:p>
-          <a:p xmlns:a="http://schemas.openxmlformats.org/drawingml/2006/main">
-            <a:r>
-              <a:t>1. Оценка 0,8 должна соответствовать частоте события при похожих прогнозах</a:t>
-            </a:r>
-          </a:p>
-          <a:p xmlns:a="http://schemas.openxmlformats.org/drawingml/2006/main">
-            <a:r>
-              <a:t>2. Сырой predict_proba не гарантирует этого свойства</a:t>
-            </a:r>
-          </a:p>
-          <a:p xmlns:a="http://schemas.openxmlformats.org/drawingml/2006/main">
-            <a:r>
-              <a:t>3. Калибровку обучают без доступа к финальному тесту</a:t>
-            </a:r>
-          </a:p>
-          <a:p xmlns:a="http://schemas.openxmlformats.org/drawingml/2006/main">
-            <a:r>
-              <a:t/>
-            </a:r>
-          </a:p>
-          <a:p xmlns:a="http://schemas.openxmlformats.org/drawingml/2006/main">
-            <a:r>
-              <a:t>Вывод: На малом числе положительных партий проверка нестабильна</a:t>
-            </a:r>
-          </a:p>
-          <a:p xmlns:a="http://schemas.openxmlformats.org/drawingml/2006/main">
-            <a:r>
-              <a:t/>
-            </a:r>
-          </a:p>
-          <a:p xmlns:a="http://schemas.openxmlformats.org/drawingml/2006/main">
-            <a:r>
-              <a:t>Подробное объяснение, методические ограничения и код: machine_learning/11-ml-problem_and_validation.md</a:t>
-            </a:r>
-          </a:p>
-          <a:p xmlns:a="http://schemas.openxmlformats.org/drawingml/2006/main">
-            <a:r>
-              <a:t>Справка по методам: https://scikit-learn.org/stable/modules/cross_validation.html и https://scikit-learn.org/stable/common_pitfalls.html</a:t>
+              <a:t>Лекция 11. Определения, вывод формул и воспроизводимый пример: machine_learning/11-ml-problem_and_validation.md. Все числа в примерах учебные. Документация: https://scikit-learn.org/stable/modules/calibration.html</a:t>
             </a:r>
           </a:p>
         </p:txBody>
@@ -2621,52 +1811,7 @@
           <a:lstStyle xmlns:a="http://schemas.openxmlformats.org/drawingml/2006/main"/>
           <a:p xmlns:a="http://schemas.openxmlformats.org/drawingml/2006/main">
             <a:r>
-              <a:t>Порог зависит от решения</a:t>
-            </a:r>
-          </a:p>
-          <a:p xmlns:a="http://schemas.openxmlformats.org/drawingml/2006/main">
-            <a:r>
-              <a:t/>
-            </a:r>
-          </a:p>
-          <a:p xmlns:a="http://schemas.openxmlformats.org/drawingml/2006/main">
-            <a:r>
-              <a:t>1. Порог 0,5 не всегда оптимален</a:t>
-            </a:r>
-          </a:p>
-          <a:p xmlns:a="http://schemas.openxmlformats.org/drawingml/2006/main">
-            <a:r>
-              <a:t>2. Стоимость ложного пропуска и ложной тревоги различается</a:t>
-            </a:r>
-          </a:p>
-          <a:p xmlns:a="http://schemas.openxmlformats.org/drawingml/2006/main">
-            <a:r>
-              <a:t>3. Порог выбирают на разработке и фиксируют</a:t>
-            </a:r>
-          </a:p>
-          <a:p xmlns:a="http://schemas.openxmlformats.org/drawingml/2006/main">
-            <a:r>
-              <a:t/>
-            </a:r>
-          </a:p>
-          <a:p xmlns:a="http://schemas.openxmlformats.org/drawingml/2006/main">
-            <a:r>
-              <a:t>Вывод: Не подстраивайте порог под тестовые партии</a:t>
-            </a:r>
-          </a:p>
-          <a:p xmlns:a="http://schemas.openxmlformats.org/drawingml/2006/main">
-            <a:r>
-              <a:t/>
-            </a:r>
-          </a:p>
-          <a:p xmlns:a="http://schemas.openxmlformats.org/drawingml/2006/main">
-            <a:r>
-              <a:t>Подробное объяснение, методические ограничения и код: machine_learning/11-ml-problem_and_validation.md</a:t>
-            </a:r>
-          </a:p>
-          <a:p xmlns:a="http://schemas.openxmlformats.org/drawingml/2006/main">
-            <a:r>
-              <a:t>Справка по методам: https://scikit-learn.org/stable/modules/cross_validation.html и https://scikit-learn.org/stable/common_pitfalls.html</a:t>
+              <a:t>Лекция 11. Определения, вывод формул и воспроизводимый пример: machine_learning/11-ml-problem_and_validation.md. Все числа в примерах учебные. Документация: https://scikit-learn.org/stable/modules/calibration.html</a:t>
             </a:r>
           </a:p>
         </p:txBody>
@@ -2736,52 +1881,7 @@
           <a:lstStyle xmlns:a="http://schemas.openxmlformats.org/drawingml/2006/main"/>
           <a:p xmlns:a="http://schemas.openxmlformats.org/drawingml/2006/main">
             <a:r>
-              <a:t>Смена области применения</a:t>
-            </a:r>
-          </a:p>
-          <a:p xmlns:a="http://schemas.openxmlformats.org/drawingml/2006/main">
-            <a:r>
-              <a:t/>
-            </a:r>
-          </a:p>
-          <a:p xmlns:a="http://schemas.openxmlformats.org/drawingml/2006/main">
-            <a:r>
-              <a:t>1. Новая поставка меняет химические свойства сырья</a:t>
-            </a:r>
-          </a:p>
-          <a:p xmlns:a="http://schemas.openxmlformats.org/drawingml/2006/main">
-            <a:r>
-              <a:t>2. Новый прибор меняет распределение спектров</a:t>
-            </a:r>
-          </a:p>
-          <a:p xmlns:a="http://schemas.openxmlformats.org/drawingml/2006/main">
-            <a:r>
-              <a:t>3. Новый диапазон рецептур требует отдельной проверки</a:t>
-            </a:r>
-          </a:p>
-          <a:p xmlns:a="http://schemas.openxmlformats.org/drawingml/2006/main">
-            <a:r>
-              <a:t/>
-            </a:r>
-          </a:p>
-          <a:p xmlns:a="http://schemas.openxmlformats.org/drawingml/2006/main">
-            <a:r>
-              <a:t>Вывод: GroupKFold по партиям не доказывает перенос на новый прибор</a:t>
-            </a:r>
-          </a:p>
-          <a:p xmlns:a="http://schemas.openxmlformats.org/drawingml/2006/main">
-            <a:r>
-              <a:t/>
-            </a:r>
-          </a:p>
-          <a:p xmlns:a="http://schemas.openxmlformats.org/drawingml/2006/main">
-            <a:r>
-              <a:t>Подробное объяснение, методические ограничения и код: machine_learning/11-ml-problem_and_validation.md</a:t>
-            </a:r>
-          </a:p>
-          <a:p xmlns:a="http://schemas.openxmlformats.org/drawingml/2006/main">
-            <a:r>
-              <a:t>Справка по методам: https://scikit-learn.org/stable/modules/cross_validation.html и https://scikit-learn.org/stable/common_pitfalls.html</a:t>
+              <a:t>Лекция 11. Определения, вывод формул и воспроизводимый пример: machine_learning/11-ml-problem_and_validation.md. Все числа в примерах учебные. Документация: https://scikit-learn.org/stable/modules/calibration.html</a:t>
             </a:r>
           </a:p>
         </p:txBody>
@@ -2851,52 +1951,7 @@
           <a:lstStyle xmlns:a="http://schemas.openxmlformats.org/drawingml/2006/main"/>
           <a:p xmlns:a="http://schemas.openxmlformats.org/drawingml/2006/main">
             <a:r>
-              <a:t>Внутренняя и внешняя проверка</a:t>
-            </a:r>
-          </a:p>
-          <a:p xmlns:a="http://schemas.openxmlformats.org/drawingml/2006/main">
-            <a:r>
-              <a:t/>
-            </a:r>
-          </a:p>
-          <a:p xmlns:a="http://schemas.openxmlformats.org/drawingml/2006/main">
-            <a:r>
-              <a:t>1. Внутренняя CV оценивает сценарий в данных разработки</a:t>
-            </a:r>
-          </a:p>
-          <a:p xmlns:a="http://schemas.openxmlformats.org/drawingml/2006/main">
-            <a:r>
-              <a:t>2. Финальный тест новых партий проверяет выбранный протокол</a:t>
-            </a:r>
-          </a:p>
-          <a:p xmlns:a="http://schemas.openxmlformats.org/drawingml/2006/main">
-            <a:r>
-              <a:t>3. Внешний тест оценивает иной прибор, сырьё или масштаб</a:t>
-            </a:r>
-          </a:p>
-          <a:p xmlns:a="http://schemas.openxmlformats.org/drawingml/2006/main">
-            <a:r>
-              <a:t/>
-            </a:r>
-          </a:p>
-          <a:p xmlns:a="http://schemas.openxmlformats.org/drawingml/2006/main">
-            <a:r>
-              <a:t>Вывод: Формулируйте вывод на том уровне, который реально проверен</a:t>
-            </a:r>
-          </a:p>
-          <a:p xmlns:a="http://schemas.openxmlformats.org/drawingml/2006/main">
-            <a:r>
-              <a:t/>
-            </a:r>
-          </a:p>
-          <a:p xmlns:a="http://schemas.openxmlformats.org/drawingml/2006/main">
-            <a:r>
-              <a:t>Подробное объяснение, методические ограничения и код: machine_learning/11-ml-problem_and_validation.md</a:t>
-            </a:r>
-          </a:p>
-          <a:p xmlns:a="http://schemas.openxmlformats.org/drawingml/2006/main">
-            <a:r>
-              <a:t>Справка по методам: https://scikit-learn.org/stable/modules/cross_validation.html и https://scikit-learn.org/stable/common_pitfalls.html</a:t>
+              <a:t>Лекция 11. Определения, вывод формул и воспроизводимый пример: machine_learning/11-ml-problem_and_validation.md. Все числа в примерах учебные. Документация: https://scikit-learn.org/stable/modules/cross_validation.html</a:t>
             </a:r>
           </a:p>
         </p:txBody>
@@ -2966,52 +2021,7 @@
           <a:lstStyle xmlns:a="http://schemas.openxmlformats.org/drawingml/2006/main"/>
           <a:p xmlns:a="http://schemas.openxmlformats.org/drawingml/2006/main">
             <a:r>
-              <a:t>Вопросы для паспорта прогноза</a:t>
-            </a:r>
-          </a:p>
-          <a:p xmlns:a="http://schemas.openxmlformats.org/drawingml/2006/main">
-            <a:r>
-              <a:t/>
-            </a:r>
-          </a:p>
-          <a:p xmlns:a="http://schemas.openxmlformats.org/drawingml/2006/main">
-            <a:r>
-              <a:t>1. Что предсказываем и для какого объекта?</a:t>
-            </a:r>
-          </a:p>
-          <a:p xmlns:a="http://schemas.openxmlformats.org/drawingml/2006/main">
-            <a:r>
-              <a:t>2. Какие входы доступны к моменту решения?</a:t>
-            </a:r>
-          </a:p>
-          <a:p xmlns:a="http://schemas.openxmlformats.org/drawingml/2006/main">
-            <a:r>
-              <a:t>3. На каких будущих партиях будет применяться модель?</a:t>
-            </a:r>
-          </a:p>
-          <a:p xmlns:a="http://schemas.openxmlformats.org/drawingml/2006/main">
-            <a:r>
-              <a:t/>
-            </a:r>
-          </a:p>
-          <a:p xmlns:a="http://schemas.openxmlformats.org/drawingml/2006/main">
-            <a:r>
-              <a:t>Вывод: Без этих ответов метрика мало что значит</a:t>
-            </a:r>
-          </a:p>
-          <a:p xmlns:a="http://schemas.openxmlformats.org/drawingml/2006/main">
-            <a:r>
-              <a:t/>
-            </a:r>
-          </a:p>
-          <a:p xmlns:a="http://schemas.openxmlformats.org/drawingml/2006/main">
-            <a:r>
-              <a:t>Подробное объяснение, методические ограничения и код: machine_learning/11-ml-problem_and_validation.md</a:t>
-            </a:r>
-          </a:p>
-          <a:p xmlns:a="http://schemas.openxmlformats.org/drawingml/2006/main">
-            <a:r>
-              <a:t>Справка по методам: https://scikit-learn.org/stable/modules/cross_validation.html и https://scikit-learn.org/stable/common_pitfalls.html</a:t>
+              <a:t>Лекция 11. Определения, вывод формул и воспроизводимый пример: machine_learning/11-ml-problem_and_validation.md. Все числа в примерах учебные. </a:t>
             </a:r>
           </a:p>
         </p:txBody>
@@ -3081,52 +2091,7 @@
           <a:lstStyle xmlns:a="http://schemas.openxmlformats.org/drawingml/2006/main"/>
           <a:p xmlns:a="http://schemas.openxmlformats.org/drawingml/2006/main">
             <a:r>
-              <a:t>Пример: наноэмульсия</a:t>
-            </a:r>
-          </a:p>
-          <a:p xmlns:a="http://schemas.openxmlformats.org/drawingml/2006/main">
-            <a:r>
-              <a:t/>
-            </a:r>
-          </a:p>
-          <a:p xmlns:a="http://schemas.openxmlformats.org/drawingml/2006/main">
-            <a:r>
-              <a:t>1. Рецептура: масло, ПАВ, температура</a:t>
-            </a:r>
-          </a:p>
-          <a:p xmlns:a="http://schemas.openxmlformats.org/drawingml/2006/main">
-            <a:r>
-              <a:t>2. Цель: диаметр частиц в нм</a:t>
-            </a:r>
-          </a:p>
-          <a:p xmlns:a="http://schemas.openxmlformats.org/drawingml/2006/main">
-            <a:r>
-              <a:t>3. Группы: независимо приготовленные партии</a:t>
-            </a:r>
-          </a:p>
-          <a:p xmlns:a="http://schemas.openxmlformats.org/drawingml/2006/main">
-            <a:r>
-              <a:t/>
-            </a:r>
-          </a:p>
-          <a:p xmlns:a="http://schemas.openxmlformats.org/drawingml/2006/main">
-            <a:r>
-              <a:t>Вывод: Искусственные данные демонстрируют метод, а не закономерность материала</a:t>
-            </a:r>
-          </a:p>
-          <a:p xmlns:a="http://schemas.openxmlformats.org/drawingml/2006/main">
-            <a:r>
-              <a:t/>
-            </a:r>
-          </a:p>
-          <a:p xmlns:a="http://schemas.openxmlformats.org/drawingml/2006/main">
-            <a:r>
-              <a:t>Подробное объяснение, методические ограничения и код: machine_learning/11-ml-problem_and_validation.md</a:t>
-            </a:r>
-          </a:p>
-          <a:p xmlns:a="http://schemas.openxmlformats.org/drawingml/2006/main">
-            <a:r>
-              <a:t>Справка по методам: https://scikit-learn.org/stable/modules/cross_validation.html и https://scikit-learn.org/stable/common_pitfalls.html</a:t>
+              <a:t>Лекция 11. Определения, вывод формул и воспроизводимый пример: machine_learning/11-ml-problem_and_validation.md. Все числа в примерах учебные. Документация: https://scikit-learn.org/stable/modules/cross_validation.html</a:t>
             </a:r>
           </a:p>
         </p:txBody>
@@ -3196,52 +2161,7 @@
           <a:lstStyle xmlns:a="http://schemas.openxmlformats.org/drawingml/2006/main"/>
           <a:p xmlns:a="http://schemas.openxmlformats.org/drawingml/2006/main">
             <a:r>
-              <a:t>Как выглядит групповой код</a:t>
-            </a:r>
-          </a:p>
-          <a:p xmlns:a="http://schemas.openxmlformats.org/drawingml/2006/main">
-            <a:r>
-              <a:t/>
-            </a:r>
-          </a:p>
-          <a:p xmlns:a="http://schemas.openxmlformats.org/drawingml/2006/main">
-            <a:r>
-              <a:t>1. GroupShuffleSplit отделяет новые партии</a:t>
-            </a:r>
-          </a:p>
-          <a:p xmlns:a="http://schemas.openxmlformats.org/drawingml/2006/main">
-            <a:r>
-              <a:t>2. GroupKFold перебирает группы внутри разработки</a:t>
-            </a:r>
-          </a:p>
-          <a:p xmlns:a="http://schemas.openxmlformats.org/drawingml/2006/main">
-            <a:r>
-              <a:t>3. assert проверяет непересечение ID</a:t>
-            </a:r>
-          </a:p>
-          <a:p xmlns:a="http://schemas.openxmlformats.org/drawingml/2006/main">
-            <a:r>
-              <a:t/>
-            </a:r>
-          </a:p>
-          <a:p xmlns:a="http://schemas.openxmlformats.org/drawingml/2006/main">
-            <a:r>
-              <a:t>Вывод: Проверка ID ловит ошибку до обсуждения качества модели</a:t>
-            </a:r>
-          </a:p>
-          <a:p xmlns:a="http://schemas.openxmlformats.org/drawingml/2006/main">
-            <a:r>
-              <a:t/>
-            </a:r>
-          </a:p>
-          <a:p xmlns:a="http://schemas.openxmlformats.org/drawingml/2006/main">
-            <a:r>
-              <a:t>Подробное объяснение, методические ограничения и код: machine_learning/11-ml-problem_and_validation.md</a:t>
-            </a:r>
-          </a:p>
-          <a:p xmlns:a="http://schemas.openxmlformats.org/drawingml/2006/main">
-            <a:r>
-              <a:t>Справка по методам: https://scikit-learn.org/stable/modules/cross_validation.html и https://scikit-learn.org/stable/common_pitfalls.html</a:t>
+              <a:t>Лекция 11. Определения, вывод формул и воспроизводимый пример: machine_learning/11-ml-problem_and_validation.md. Все числа в примерах учебные. Документация: https://scikit-learn.org/stable/modules/cross_validation.html</a:t>
             </a:r>
           </a:p>
         </p:txBody>
@@ -3311,52 +2231,7 @@
           <a:lstStyle xmlns:a="http://schemas.openxmlformats.org/drawingml/2006/main"/>
           <a:p xmlns:a="http://schemas.openxmlformats.org/drawingml/2006/main">
             <a:r>
-              <a:t>Как выбрать признак спектра</a:t>
-            </a:r>
-          </a:p>
-          <a:p xmlns:a="http://schemas.openxmlformats.org/drawingml/2006/main">
-            <a:r>
-              <a:t/>
-            </a:r>
-          </a:p>
-          <a:p xmlns:a="http://schemas.openxmlformats.org/drawingml/2006/main">
-            <a:r>
-              <a:t>1. Физический пик и его единицы фиксируются в протоколе</a:t>
-            </a:r>
-          </a:p>
-          <a:p xmlns:a="http://schemas.openxmlformats.org/drawingml/2006/main">
-            <a:r>
-              <a:t>2. Подбор каналов по всей y запрещён</a:t>
-            </a:r>
-          </a:p>
-          <a:p xmlns:a="http://schemas.openxmlformats.org/drawingml/2006/main">
-            <a:r>
-              <a:t>3. Изменяемый отбор длины волны переносится в CV</a:t>
-            </a:r>
-          </a:p>
-          <a:p xmlns:a="http://schemas.openxmlformats.org/drawingml/2006/main">
-            <a:r>
-              <a:t/>
-            </a:r>
-          </a:p>
-          <a:p xmlns:a="http://schemas.openxmlformats.org/drawingml/2006/main">
-            <a:r>
-              <a:t>Вывод: Сначала решите, доступен ли спектр к моменту прогноза</a:t>
-            </a:r>
-          </a:p>
-          <a:p xmlns:a="http://schemas.openxmlformats.org/drawingml/2006/main">
-            <a:r>
-              <a:t/>
-            </a:r>
-          </a:p>
-          <a:p xmlns:a="http://schemas.openxmlformats.org/drawingml/2006/main">
-            <a:r>
-              <a:t>Подробное объяснение, методические ограничения и код: machine_learning/11-ml-problem_and_validation.md</a:t>
-            </a:r>
-          </a:p>
-          <a:p xmlns:a="http://schemas.openxmlformats.org/drawingml/2006/main">
-            <a:r>
-              <a:t>Справка по методам: https://scikit-learn.org/stable/modules/cross_validation.html и https://scikit-learn.org/stable/common_pitfalls.html</a:t>
+              <a:t>Лекция 11. Определения, вывод формул и воспроизводимый пример: machine_learning/11-ml-problem_and_validation.md. Все числа в примерах учебные. Документация: https://scikit-learn.org/stable/modules/cross_validation.html</a:t>
             </a:r>
           </a:p>
         </p:txBody>
@@ -3426,52 +2301,7 @@
           <a:lstStyle xmlns:a="http://schemas.openxmlformats.org/drawingml/2006/main"/>
           <a:p xmlns:a="http://schemas.openxmlformats.org/drawingml/2006/main">
             <a:r>
-              <a:t>Когда данных мало</a:t>
-            </a:r>
-          </a:p>
-          <a:p xmlns:a="http://schemas.openxmlformats.org/drawingml/2006/main">
-            <a:r>
-              <a:t/>
-            </a:r>
-          </a:p>
-          <a:p xmlns:a="http://schemas.openxmlformats.org/drawingml/2006/main">
-            <a:r>
-              <a:t>1. Не сокращайте требования к независимости</a:t>
-            </a:r>
-          </a:p>
-          <a:p xmlns:a="http://schemas.openxmlformats.org/drawingml/2006/main">
-            <a:r>
-              <a:t>2. Покажите ошибки по отдельным партиям</a:t>
-            </a:r>
-          </a:p>
-          <a:p xmlns:a="http://schemas.openxmlformats.org/drawingml/2006/main">
-            <a:r>
-              <a:t>3. Спланируйте новые партии для проверки и обучения</a:t>
-            </a:r>
-          </a:p>
-          <a:p xmlns:a="http://schemas.openxmlformats.org/drawingml/2006/main">
-            <a:r>
-              <a:t/>
-            </a:r>
-          </a:p>
-          <a:p xmlns:a="http://schemas.openxmlformats.org/drawingml/2006/main">
-            <a:r>
-              <a:t>Вывод: Дополнительные технические повторы не заменяют независимый синтез</a:t>
-            </a:r>
-          </a:p>
-          <a:p xmlns:a="http://schemas.openxmlformats.org/drawingml/2006/main">
-            <a:r>
-              <a:t/>
-            </a:r>
-          </a:p>
-          <a:p xmlns:a="http://schemas.openxmlformats.org/drawingml/2006/main">
-            <a:r>
-              <a:t>Подробное объяснение, методические ограничения и код: machine_learning/11-ml-problem_and_validation.md</a:t>
-            </a:r>
-          </a:p>
-          <a:p xmlns:a="http://schemas.openxmlformats.org/drawingml/2006/main">
-            <a:r>
-              <a:t>Справка по методам: https://scikit-learn.org/stable/modules/cross_validation.html и https://scikit-learn.org/stable/common_pitfalls.html</a:t>
+              <a:t>Лекция 11. Определения, вывод формул и воспроизводимый пример: machine_learning/11-ml-problem_and_validation.md. Все числа в примерах учебные. Документация: https://scikit-learn.org/stable/modules/cross_validation.html</a:t>
             </a:r>
           </a:p>
         </p:txBody>
@@ -3541,52 +2371,7 @@
           <a:lstStyle xmlns:a="http://schemas.openxmlformats.org/drawingml/2006/main"/>
           <a:p xmlns:a="http://schemas.openxmlformats.org/drawingml/2006/main">
             <a:r>
-              <a:t>Где нужен план эксперимента</a:t>
-            </a:r>
-          </a:p>
-          <a:p xmlns:a="http://schemas.openxmlformats.org/drawingml/2006/main">
-            <a:r>
-              <a:t/>
-            </a:r>
-          </a:p>
-          <a:p xmlns:a="http://schemas.openxmlformats.org/drawingml/2006/main">
-            <a:r>
-              <a:t>1. Если факторы жёстко коррелированы, модель не разделит их эффекты</a:t>
-            </a:r>
-          </a:p>
-          <a:p xmlns:a="http://schemas.openxmlformats.org/drawingml/2006/main">
-            <a:r>
-              <a:t>2. Факторный план исследует разрешённые комбинации</a:t>
-            </a:r>
-          </a:p>
-          <a:p xmlns:a="http://schemas.openxmlformats.org/drawingml/2006/main">
-            <a:r>
-              <a:t>3. Рандомизация и блоки помогают интерпретации</a:t>
-            </a:r>
-          </a:p>
-          <a:p xmlns:a="http://schemas.openxmlformats.org/drawingml/2006/main">
-            <a:r>
-              <a:t/>
-            </a:r>
-          </a:p>
-          <a:p xmlns:a="http://schemas.openxmlformats.org/drawingml/2006/main">
-            <a:r>
-              <a:t>Вывод: Прогнозная связь не устанавливает причинность</a:t>
-            </a:r>
-          </a:p>
-          <a:p xmlns:a="http://schemas.openxmlformats.org/drawingml/2006/main">
-            <a:r>
-              <a:t/>
-            </a:r>
-          </a:p>
-          <a:p xmlns:a="http://schemas.openxmlformats.org/drawingml/2006/main">
-            <a:r>
-              <a:t>Подробное объяснение, методические ограничения и код: machine_learning/11-ml-problem_and_validation.md</a:t>
-            </a:r>
-          </a:p>
-          <a:p xmlns:a="http://schemas.openxmlformats.org/drawingml/2006/main">
-            <a:r>
-              <a:t>Справка по методам: https://scikit-learn.org/stable/modules/cross_validation.html и https://scikit-learn.org/stable/common_pitfalls.html</a:t>
+              <a:t>Лекция 11. Определения, вывод формул и воспроизводимый пример: machine_learning/11-ml-problem_and_validation.md. Все числа в примерах учебные. Документация: https://scikit-learn.org/stable/modules/cross_validation.html</a:t>
             </a:r>
           </a:p>
         </p:txBody>
@@ -3656,52 +2441,7 @@
           <a:lstStyle xmlns:a="http://schemas.openxmlformats.org/drawingml/2006/main"/>
           <a:p xmlns:a="http://schemas.openxmlformats.org/drawingml/2006/main">
             <a:r>
-              <a:t>Паспорт модели для передачи</a:t>
-            </a:r>
-          </a:p>
-          <a:p xmlns:a="http://schemas.openxmlformats.org/drawingml/2006/main">
-            <a:r>
-              <a:t/>
-            </a:r>
-          </a:p>
-          <a:p xmlns:a="http://schemas.openxmlformats.org/drawingml/2006/main">
-            <a:r>
-              <a:t>1. Цель, единицы, момент и входные поля</a:t>
-            </a:r>
-          </a:p>
-          <a:p xmlns:a="http://schemas.openxmlformats.org/drawingml/2006/main">
-            <a:r>
-              <a:t>2. Число групп, способ разбиения и baseline</a:t>
-            </a:r>
-          </a:p>
-          <a:p xmlns:a="http://schemas.openxmlformats.org/drawingml/2006/main">
-            <a:r>
-              <a:t>3. Ошибка по подгруппам и границы применимости</a:t>
-            </a:r>
-          </a:p>
-          <a:p xmlns:a="http://schemas.openxmlformats.org/drawingml/2006/main">
-            <a:r>
-              <a:t/>
-            </a:r>
-          </a:p>
-          <a:p xmlns:a="http://schemas.openxmlformats.org/drawingml/2006/main">
-            <a:r>
-              <a:t>Вывод: Только такая запись позволяет повторить проверку</a:t>
-            </a:r>
-          </a:p>
-          <a:p xmlns:a="http://schemas.openxmlformats.org/drawingml/2006/main">
-            <a:r>
-              <a:t/>
-            </a:r>
-          </a:p>
-          <a:p xmlns:a="http://schemas.openxmlformats.org/drawingml/2006/main">
-            <a:r>
-              <a:t>Подробное объяснение, методические ограничения и код: machine_learning/11-ml-problem_and_validation.md</a:t>
-            </a:r>
-          </a:p>
-          <a:p xmlns:a="http://schemas.openxmlformats.org/drawingml/2006/main">
-            <a:r>
-              <a:t>Справка по методам: https://scikit-learn.org/stable/modules/cross_validation.html и https://scikit-learn.org/stable/common_pitfalls.html</a:t>
+              <a:t>Лекция 11. Определения, вывод формул и воспроизводимый пример: machine_learning/11-ml-problem_and_validation.md. Все числа в примерах учебные. Документация: https://scikit-learn.org/stable/modules/cross_validation.html</a:t>
             </a:r>
           </a:p>
         </p:txBody>
@@ -3771,52 +2511,7 @@
           <a:lstStyle xmlns:a="http://schemas.openxmlformats.org/drawingml/2006/main"/>
           <a:p xmlns:a="http://schemas.openxmlformats.org/drawingml/2006/main">
             <a:r>
-              <a:t>Мини-проект: постановка</a:t>
-            </a:r>
-          </a:p>
-          <a:p xmlns:a="http://schemas.openxmlformats.org/drawingml/2006/main">
-            <a:r>
-              <a:t/>
-            </a:r>
-          </a:p>
-          <a:p xmlns:a="http://schemas.openxmlformats.org/drawingml/2006/main">
-            <a:r>
-              <a:t>1. Сформулируйте лабораторное решение и целевую величину</a:t>
-            </a:r>
-          </a:p>
-          <a:p xmlns:a="http://schemas.openxmlformats.org/drawingml/2006/main">
-            <a:r>
-              <a:t>2. Перечислите ID, единицы и время доступности признаков</a:t>
-            </a:r>
-          </a:p>
-          <a:p xmlns:a="http://schemas.openxmlformats.org/drawingml/2006/main">
-            <a:r>
-              <a:t>3. Посчитайте независимые группы</a:t>
-            </a:r>
-          </a:p>
-          <a:p xmlns:a="http://schemas.openxmlformats.org/drawingml/2006/main">
-            <a:r>
-              <a:t/>
-            </a:r>
-          </a:p>
-          <a:p xmlns:a="http://schemas.openxmlformats.org/drawingml/2006/main">
-            <a:r>
-              <a:t>Вывод: Если групп слишком мало, проектом станет план их получения</a:t>
-            </a:r>
-          </a:p>
-          <a:p xmlns:a="http://schemas.openxmlformats.org/drawingml/2006/main">
-            <a:r>
-              <a:t/>
-            </a:r>
-          </a:p>
-          <a:p xmlns:a="http://schemas.openxmlformats.org/drawingml/2006/main">
-            <a:r>
-              <a:t>Подробное объяснение, методические ограничения и код: machine_learning/11-ml-problem_and_validation.md</a:t>
-            </a:r>
-          </a:p>
-          <a:p xmlns:a="http://schemas.openxmlformats.org/drawingml/2006/main">
-            <a:r>
-              <a:t>Справка по методам: https://scikit-learn.org/stable/modules/cross_validation.html и https://scikit-learn.org/stable/common_pitfalls.html</a:t>
+              <a:t>Лекция 11. Определения, вывод формул и воспроизводимый пример: machine_learning/11-ml-problem_and_validation.md. Все числа в примерах учебные. Документация: https://scikit-learn.org/stable/modules/cross_validation.html</a:t>
             </a:r>
           </a:p>
         </p:txBody>
@@ -3886,52 +2581,7 @@
           <a:lstStyle xmlns:a="http://schemas.openxmlformats.org/drawingml/2006/main"/>
           <a:p xmlns:a="http://schemas.openxmlformats.org/drawingml/2006/main">
             <a:r>
-              <a:t>Мини-проект: проверка</a:t>
-            </a:r>
-          </a:p>
-          <a:p xmlns:a="http://schemas.openxmlformats.org/drawingml/2006/main">
-            <a:r>
-              <a:t/>
-            </a:r>
-          </a:p>
-          <a:p xmlns:a="http://schemas.openxmlformats.org/drawingml/2006/main">
-            <a:r>
-              <a:t>1. Сравните baseline и один Pipeline на общих группах</a:t>
-            </a:r>
-          </a:p>
-          <a:p xmlns:a="http://schemas.openxmlformats.org/drawingml/2006/main">
-            <a:r>
-              <a:t>2. Отчёт: MAE либо матрица ошибок и число партий</a:t>
-            </a:r>
-          </a:p>
-          <a:p xmlns:a="http://schemas.openxmlformats.org/drawingml/2006/main">
-            <a:r>
-              <a:t>3. Покажите один график ошибки по подгруппам</a:t>
-            </a:r>
-          </a:p>
-          <a:p xmlns:a="http://schemas.openxmlformats.org/drawingml/2006/main">
-            <a:r>
-              <a:t/>
-            </a:r>
-          </a:p>
-          <a:p xmlns:a="http://schemas.openxmlformats.org/drawingml/2006/main">
-            <a:r>
-              <a:t>Вывод: Запишите предел полезности до просмотра результата</a:t>
-            </a:r>
-          </a:p>
-          <a:p xmlns:a="http://schemas.openxmlformats.org/drawingml/2006/main">
-            <a:r>
-              <a:t/>
-            </a:r>
-          </a:p>
-          <a:p xmlns:a="http://schemas.openxmlformats.org/drawingml/2006/main">
-            <a:r>
-              <a:t>Подробное объяснение, методические ограничения и код: machine_learning/11-ml-problem_and_validation.md</a:t>
-            </a:r>
-          </a:p>
-          <a:p xmlns:a="http://schemas.openxmlformats.org/drawingml/2006/main">
-            <a:r>
-              <a:t>Справка по методам: https://scikit-learn.org/stable/modules/cross_validation.html и https://scikit-learn.org/stable/common_pitfalls.html</a:t>
+              <a:t>Лекция 11. Определения, вывод формул и воспроизводимый пример: machine_learning/11-ml-problem_and_validation.md. Все числа в примерах учебные. Документация: https://scikit-learn.org/stable/modules/cross_validation.html</a:t>
             </a:r>
           </a:p>
         </p:txBody>
@@ -4001,52 +2651,7 @@
           <a:lstStyle xmlns:a="http://schemas.openxmlformats.org/drawingml/2006/main"/>
           <a:p xmlns:a="http://schemas.openxmlformats.org/drawingml/2006/main">
             <a:r>
-              <a:t>Контрольные вопросы</a:t>
-            </a:r>
-          </a:p>
-          <a:p xmlns:a="http://schemas.openxmlformats.org/drawingml/2006/main">
-            <a:r>
-              <a:t/>
-            </a:r>
-          </a:p>
-          <a:p xmlns:a="http://schemas.openxmlformats.org/drawingml/2006/main">
-            <a:r>
-              <a:t>1. Что изменится при новой поставке сырья?</a:t>
-            </a:r>
-          </a:p>
-          <a:p xmlns:a="http://schemas.openxmlformats.org/drawingml/2006/main">
-            <a:r>
-              <a:t>2. Почему scaler.fit на всех данных нарушает тест?</a:t>
-            </a:r>
-          </a:p>
-          <a:p xmlns:a="http://schemas.openxmlformats.org/drawingml/2006/main">
-            <a:r>
-              <a:t>3. Когда изображение можно включить в прогноз?</a:t>
-            </a:r>
-          </a:p>
-          <a:p xmlns:a="http://schemas.openxmlformats.org/drawingml/2006/main">
-            <a:r>
-              <a:t/>
-            </a:r>
-          </a:p>
-          <a:p xmlns:a="http://schemas.openxmlformats.org/drawingml/2006/main">
-            <a:r>
-              <a:t>Вывод: Ответ должен упоминать будущее применение и единицу наблюдения</a:t>
-            </a:r>
-          </a:p>
-          <a:p xmlns:a="http://schemas.openxmlformats.org/drawingml/2006/main">
-            <a:r>
-              <a:t/>
-            </a:r>
-          </a:p>
-          <a:p xmlns:a="http://schemas.openxmlformats.org/drawingml/2006/main">
-            <a:r>
-              <a:t>Подробное объяснение, методические ограничения и код: machine_learning/11-ml-problem_and_validation.md</a:t>
-            </a:r>
-          </a:p>
-          <a:p xmlns:a="http://schemas.openxmlformats.org/drawingml/2006/main">
-            <a:r>
-              <a:t>Справка по методам: https://scikit-learn.org/stable/modules/cross_validation.html и https://scikit-learn.org/stable/common_pitfalls.html</a:t>
+              <a:t>Лекция 11. Определения, вывод формул и воспроизводимый пример: machine_learning/11-ml-problem_and_validation.md. Все числа в примерах учебные. Документация: https://scikit-learn.org/stable/modules/cross_validation.html</a:t>
             </a:r>
           </a:p>
         </p:txBody>
@@ -4116,52 +2721,7 @@
           <a:lstStyle xmlns:a="http://schemas.openxmlformats.org/drawingml/2006/main"/>
           <a:p xmlns:a="http://schemas.openxmlformats.org/drawingml/2006/main">
             <a:r>
-              <a:t>Главный вывод</a:t>
-            </a:r>
-          </a:p>
-          <a:p xmlns:a="http://schemas.openxmlformats.org/drawingml/2006/main">
-            <a:r>
-              <a:t/>
-            </a:r>
-          </a:p>
-          <a:p xmlns:a="http://schemas.openxmlformats.org/drawingml/2006/main">
-            <a:r>
-              <a:t>1. Формулируйте момент и объект прогноза</a:t>
-            </a:r>
-          </a:p>
-          <a:p xmlns:a="http://schemas.openxmlformats.org/drawingml/2006/main">
-            <a:r>
-              <a:t>2. Сохраняйте независимость партий в каждой проверке</a:t>
-            </a:r>
-          </a:p>
-          <a:p xmlns:a="http://schemas.openxmlformats.org/drawingml/2006/main">
-            <a:r>
-              <a:t>3. Сравнивайте ошибку с baseline и стоимостью решения</a:t>
-            </a:r>
-          </a:p>
-          <a:p xmlns:a="http://schemas.openxmlformats.org/drawingml/2006/main">
-            <a:r>
-              <a:t/>
-            </a:r>
-          </a:p>
-          <a:p xmlns:a="http://schemas.openxmlformats.org/drawingml/2006/main">
-            <a:r>
-              <a:t>Вывод: Следующая лекция: методы, многомерная структура и новый опыт</a:t>
-            </a:r>
-          </a:p>
-          <a:p xmlns:a="http://schemas.openxmlformats.org/drawingml/2006/main">
-            <a:r>
-              <a:t/>
-            </a:r>
-          </a:p>
-          <a:p xmlns:a="http://schemas.openxmlformats.org/drawingml/2006/main">
-            <a:r>
-              <a:t>Подробное объяснение, методические ограничения и код: machine_learning/11-ml-problem_and_validation.md</a:t>
-            </a:r>
-          </a:p>
-          <a:p xmlns:a="http://schemas.openxmlformats.org/drawingml/2006/main">
-            <a:r>
-              <a:t>Справка по методам: https://scikit-learn.org/stable/modules/cross_validation.html и https://scikit-learn.org/stable/common_pitfalls.html</a:t>
+              <a:t>Лекция 11. Определения, вывод формул и воспроизводимый пример: machine_learning/11-ml-problem_and_validation.md. Все числа в примерах учебные. Документация: https://scikit-learn.org/stable/modules/cross_validation.html</a:t>
             </a:r>
           </a:p>
         </p:txBody>
@@ -4231,52 +2791,7 @@
           <a:lstStyle xmlns:a="http://schemas.openxmlformats.org/drawingml/2006/main"/>
           <a:p xmlns:a="http://schemas.openxmlformats.org/drawingml/2006/main">
             <a:r>
-              <a:t>Регрессия или классификация</a:t>
-            </a:r>
-          </a:p>
-          <a:p xmlns:a="http://schemas.openxmlformats.org/drawingml/2006/main">
-            <a:r>
-              <a:t/>
-            </a:r>
-          </a:p>
-          <a:p xmlns:a="http://schemas.openxmlformats.org/drawingml/2006/main">
-            <a:r>
-              <a:t>1. Регрессия: диаметр, сорбция, толщина покрытия</a:t>
-            </a:r>
-          </a:p>
-          <a:p xmlns:a="http://schemas.openxmlformats.org/drawingml/2006/main">
-            <a:r>
-              <a:t>2. Классификация: прохождение заранее заданного порога</a:t>
-            </a:r>
-          </a:p>
-          <a:p xmlns:a="http://schemas.openxmlformats.org/drawingml/2006/main">
-            <a:r>
-              <a:t>3. Произвольная бинаризация теряет часть информации</a:t>
-            </a:r>
-          </a:p>
-          <a:p xmlns:a="http://schemas.openxmlformats.org/drawingml/2006/main">
-            <a:r>
-              <a:t/>
-            </a:r>
-          </a:p>
-          <a:p xmlns:a="http://schemas.openxmlformats.org/drawingml/2006/main">
-            <a:r>
-              <a:t>Вывод: Сохраняйте исходное измеренное свойство</a:t>
-            </a:r>
-          </a:p>
-          <a:p xmlns:a="http://schemas.openxmlformats.org/drawingml/2006/main">
-            <a:r>
-              <a:t/>
-            </a:r>
-          </a:p>
-          <a:p xmlns:a="http://schemas.openxmlformats.org/drawingml/2006/main">
-            <a:r>
-              <a:t>Подробное объяснение, методические ограничения и код: machine_learning/11-ml-problem_and_validation.md</a:t>
-            </a:r>
-          </a:p>
-          <a:p xmlns:a="http://schemas.openxmlformats.org/drawingml/2006/main">
-            <a:r>
-              <a:t>Справка по методам: https://scikit-learn.org/stable/modules/cross_validation.html и https://scikit-learn.org/stable/common_pitfalls.html</a:t>
+              <a:t>Лекция 11. Определения, вывод формул и воспроизводимый пример: machine_learning/11-ml-problem_and_validation.md. Все числа в примерах учебные. </a:t>
             </a:r>
           </a:p>
         </p:txBody>
@@ -4346,52 +2861,7 @@
           <a:lstStyle xmlns:a="http://schemas.openxmlformats.org/drawingml/2006/main"/>
           <a:p xmlns:a="http://schemas.openxmlformats.org/drawingml/2006/main">
             <a:r>
-              <a:t>Источники и дальнейшее чтение</a:t>
-            </a:r>
-          </a:p>
-          <a:p xmlns:a="http://schemas.openxmlformats.org/drawingml/2006/main">
-            <a:r>
-              <a:t/>
-            </a:r>
-          </a:p>
-          <a:p xmlns:a="http://schemas.openxmlformats.org/drawingml/2006/main">
-            <a:r>
-              <a:t>1. scikit-learn: common pitfalls и Pipeline</a:t>
-            </a:r>
-          </a:p>
-          <a:p xmlns:a="http://schemas.openxmlformats.org/drawingml/2006/main">
-            <a:r>
-              <a:t>2. scikit-learn: cross-validation и model evaluation</a:t>
-            </a:r>
-          </a:p>
-          <a:p xmlns:a="http://schemas.openxmlformats.org/drawingml/2006/main">
-            <a:r>
-              <a:t>3. Конспект 11: определения, код и предметные ограничения</a:t>
-            </a:r>
-          </a:p>
-          <a:p xmlns:a="http://schemas.openxmlformats.org/drawingml/2006/main">
-            <a:r>
-              <a:t/>
-            </a:r>
-          </a:p>
-          <a:p xmlns:a="http://schemas.openxmlformats.org/drawingml/2006/main">
-            <a:r>
-              <a:t>Вывод: Ссылки и воспроизводимый пример — в Markdown-конспекте</a:t>
-            </a:r>
-          </a:p>
-          <a:p xmlns:a="http://schemas.openxmlformats.org/drawingml/2006/main">
-            <a:r>
-              <a:t/>
-            </a:r>
-          </a:p>
-          <a:p xmlns:a="http://schemas.openxmlformats.org/drawingml/2006/main">
-            <a:r>
-              <a:t>Подробное объяснение, методические ограничения и код: machine_learning/11-ml-problem_and_validation.md</a:t>
-            </a:r>
-          </a:p>
-          <a:p xmlns:a="http://schemas.openxmlformats.org/drawingml/2006/main">
-            <a:r>
-              <a:t>Справка по методам: https://scikit-learn.org/stable/modules/cross_validation.html и https://scikit-learn.org/stable/common_pitfalls.html</a:t>
+              <a:t>Лекция 11. Определения, вывод формул и воспроизводимый пример: machine_learning/11-ml-problem_and_validation.md. Все числа в примерах учебные. Документация: https://scikit-learn.org/stable/modules/cross_validation.html</a:t>
             </a:r>
           </a:p>
         </p:txBody>
@@ -4461,52 +2931,7 @@
           <a:lstStyle xmlns:a="http://schemas.openxmlformats.org/drawingml/2006/main"/>
           <a:p xmlns:a="http://schemas.openxmlformats.org/drawingml/2006/main">
             <a:r>
-              <a:t>Состав, структура, режим</a:t>
-            </a:r>
-          </a:p>
-          <a:p xmlns:a="http://schemas.openxmlformats.org/drawingml/2006/main">
-            <a:r>
-              <a:t/>
-            </a:r>
-          </a:p>
-          <a:p xmlns:a="http://schemas.openxmlformats.org/drawingml/2006/main">
-            <a:r>
-              <a:t>1. Состав: доли компонентов и свойства сырья</a:t>
-            </a:r>
-          </a:p>
-          <a:p xmlns:a="http://schemas.openxmlformats.org/drawingml/2006/main">
-            <a:r>
-              <a:t>2. Структура: спектральные и морфологические признаки</a:t>
-            </a:r>
-          </a:p>
-          <a:p xmlns:a="http://schemas.openxmlformats.org/drawingml/2006/main">
-            <a:r>
-              <a:t>3. Режим: температура, время, расход, перемешивание</a:t>
-            </a:r>
-          </a:p>
-          <a:p xmlns:a="http://schemas.openxmlformats.org/drawingml/2006/main">
-            <a:r>
-              <a:t/>
-            </a:r>
-          </a:p>
-          <a:p xmlns:a="http://schemas.openxmlformats.org/drawingml/2006/main">
-            <a:r>
-              <a:t>Вывод: Признак должен иметь физический смысл и единицу</a:t>
-            </a:r>
-          </a:p>
-          <a:p xmlns:a="http://schemas.openxmlformats.org/drawingml/2006/main">
-            <a:r>
-              <a:t/>
-            </a:r>
-          </a:p>
-          <a:p xmlns:a="http://schemas.openxmlformats.org/drawingml/2006/main">
-            <a:r>
-              <a:t>Подробное объяснение, методические ограничения и код: machine_learning/11-ml-problem_and_validation.md</a:t>
-            </a:r>
-          </a:p>
-          <a:p xmlns:a="http://schemas.openxmlformats.org/drawingml/2006/main">
-            <a:r>
-              <a:t>Справка по методам: https://scikit-learn.org/stable/modules/cross_validation.html и https://scikit-learn.org/stable/common_pitfalls.html</a:t>
+              <a:t>Лекция 11. Определения, вывод формул и воспроизводимый пример: machine_learning/11-ml-problem_and_validation.md. Все числа в примерах учебные. </a:t>
             </a:r>
           </a:p>
         </p:txBody>
@@ -4576,52 +3001,7 @@
           <a:lstStyle xmlns:a="http://schemas.openxmlformats.org/drawingml/2006/main"/>
           <a:p xmlns:a="http://schemas.openxmlformats.org/drawingml/2006/main">
             <a:r>
-              <a:t>Время доступности признака</a:t>
-            </a:r>
-          </a:p>
-          <a:p xmlns:a="http://schemas.openxmlformats.org/drawingml/2006/main">
-            <a:r>
-              <a:t/>
-            </a:r>
-          </a:p>
-          <a:p xmlns:a="http://schemas.openxmlformats.org/drawingml/2006/main">
-            <a:r>
-              <a:t>1. Рецептура доступна перед синтезом</a:t>
-            </a:r>
-          </a:p>
-          <a:p xmlns:a="http://schemas.openxmlformats.org/drawingml/2006/main">
-            <a:r>
-              <a:t>2. Морфология доступна после изготовления образца</a:t>
-            </a:r>
-          </a:p>
-          <a:p xmlns:a="http://schemas.openxmlformats.org/drawingml/2006/main">
-            <a:r>
-              <a:t>3. Результат финального теста нельзя включать в ранний прогноз</a:t>
-            </a:r>
-          </a:p>
-          <a:p xmlns:a="http://schemas.openxmlformats.org/drawingml/2006/main">
-            <a:r>
-              <a:t/>
-            </a:r>
-          </a:p>
-          <a:p xmlns:a="http://schemas.openxmlformats.org/drawingml/2006/main">
-            <a:r>
-              <a:t>Вывод: Одна колонка может быть допустимой для позднего решения и утечкой для раннего</a:t>
-            </a:r>
-          </a:p>
-          <a:p xmlns:a="http://schemas.openxmlformats.org/drawingml/2006/main">
-            <a:r>
-              <a:t/>
-            </a:r>
-          </a:p>
-          <a:p xmlns:a="http://schemas.openxmlformats.org/drawingml/2006/main">
-            <a:r>
-              <a:t>Подробное объяснение, методические ограничения и код: machine_learning/11-ml-problem_and_validation.md</a:t>
-            </a:r>
-          </a:p>
-          <a:p xmlns:a="http://schemas.openxmlformats.org/drawingml/2006/main">
-            <a:r>
-              <a:t>Справка по методам: https://scikit-learn.org/stable/modules/cross_validation.html и https://scikit-learn.org/stable/common_pitfalls.html</a:t>
+              <a:t>Лекция 11. Определения, вывод формул и воспроизводимый пример: machine_learning/11-ml-problem_and_validation.md. Все числа в примерах учебные. </a:t>
             </a:r>
           </a:p>
         </p:txBody>
@@ -4691,52 +3071,7 @@
           <a:lstStyle xmlns:a="http://schemas.openxmlformats.org/drawingml/2006/main"/>
           <a:p xmlns:a="http://schemas.openxmlformats.org/drawingml/2006/main">
             <a:r>
-              <a:t>Объект измерения не равен строке данных</a:t>
-            </a:r>
-          </a:p>
-          <a:p xmlns:a="http://schemas.openxmlformats.org/drawingml/2006/main">
-            <a:r>
-              <a:t/>
-            </a:r>
-          </a:p>
-          <a:p xmlns:a="http://schemas.openxmlformats.org/drawingml/2006/main">
-            <a:r>
-              <a:t>1. Партия → образец → поле зрения → объект</a:t>
-            </a:r>
-          </a:p>
-          <a:p xmlns:a="http://schemas.openxmlformats.org/drawingml/2006/main">
-            <a:r>
-              <a:t>2. Много измерений одной партии сохраняют общие условия</a:t>
-            </a:r>
-          </a:p>
-          <a:p xmlns:a="http://schemas.openxmlformats.org/drawingml/2006/main">
-            <a:r>
-              <a:t>3. Независимых синтезов столько, сколько независимых партий</a:t>
-            </a:r>
-          </a:p>
-          <a:p xmlns:a="http://schemas.openxmlformats.org/drawingml/2006/main">
-            <a:r>
-              <a:t/>
-            </a:r>
-          </a:p>
-          <a:p xmlns:a="http://schemas.openxmlformats.org/drawingml/2006/main">
-            <a:r>
-              <a:t>Вывод: Размер выборки для переноса задают партии, а не пиксели</a:t>
-            </a:r>
-          </a:p>
-          <a:p xmlns:a="http://schemas.openxmlformats.org/drawingml/2006/main">
-            <a:r>
-              <a:t/>
-            </a:r>
-          </a:p>
-          <a:p xmlns:a="http://schemas.openxmlformats.org/drawingml/2006/main">
-            <a:r>
-              <a:t>Подробное объяснение, методические ограничения и код: machine_learning/11-ml-problem_and_validation.md</a:t>
-            </a:r>
-          </a:p>
-          <a:p xmlns:a="http://schemas.openxmlformats.org/drawingml/2006/main">
-            <a:r>
-              <a:t>Справка по методам: https://scikit-learn.org/stable/modules/cross_validation.html и https://scikit-learn.org/stable/common_pitfalls.html</a:t>
+              <a:t>Лекция 11. Определения, вывод формул и воспроизводимый пример: machine_learning/11-ml-problem_and_validation.md. Все числа в примерах учебные. </a:t>
             </a:r>
           </a:p>
         </p:txBody>
@@ -4806,52 +3141,7 @@
           <a:lstStyle xmlns:a="http://schemas.openxmlformats.org/drawingml/2006/main"/>
           <a:p xmlns:a="http://schemas.openxmlformats.org/drawingml/2006/main">
             <a:r>
-              <a:t>Как подготовить таблицу</a:t>
-            </a:r>
-          </a:p>
-          <a:p xmlns:a="http://schemas.openxmlformats.org/drawingml/2006/main">
-            <a:r>
-              <a:t/>
-            </a:r>
-          </a:p>
-          <a:p xmlns:a="http://schemas.openxmlformats.org/drawingml/2006/main">
-            <a:r>
-              <a:t>1. Один ID партии связывает рецепт, измерение и метаданные</a:t>
-            </a:r>
-          </a:p>
-          <a:p xmlns:a="http://schemas.openxmlformats.org/drawingml/2006/main">
-            <a:r>
-              <a:t>2. Единицы, пропуски и пределы измерения записаны явно</a:t>
-            </a:r>
-          </a:p>
-          <a:p xmlns:a="http://schemas.openxmlformats.org/drawingml/2006/main">
-            <a:r>
-              <a:t>3. Правило агрегации повторов фиксируется до анализа</a:t>
-            </a:r>
-          </a:p>
-          <a:p xmlns:a="http://schemas.openxmlformats.org/drawingml/2006/main">
-            <a:r>
-              <a:t/>
-            </a:r>
-          </a:p>
-          <a:p xmlns:a="http://schemas.openxmlformats.org/drawingml/2006/main">
-            <a:r>
-              <a:t>Вывод: Сохраняйте исходные измерения отдельно от признаков модели</a:t>
-            </a:r>
-          </a:p>
-          <a:p xmlns:a="http://schemas.openxmlformats.org/drawingml/2006/main">
-            <a:r>
-              <a:t/>
-            </a:r>
-          </a:p>
-          <a:p xmlns:a="http://schemas.openxmlformats.org/drawingml/2006/main">
-            <a:r>
-              <a:t>Подробное объяснение, методические ограничения и код: machine_learning/11-ml-problem_and_validation.md</a:t>
-            </a:r>
-          </a:p>
-          <a:p xmlns:a="http://schemas.openxmlformats.org/drawingml/2006/main">
-            <a:r>
-              <a:t>Справка по методам: https://scikit-learn.org/stable/modules/cross_validation.html и https://scikit-learn.org/stable/common_pitfalls.html</a:t>
+              <a:t>Лекция 11. Определения, вывод формул и воспроизводимый пример: machine_learning/11-ml-problem_and_validation.md. Все числа в примерах учебные. </a:t>
             </a:r>
           </a:p>
         </p:txBody>
@@ -4921,52 +3211,7 @@
           <a:lstStyle xmlns:a="http://schemas.openxmlformats.org/drawingml/2006/main"/>
           <a:p xmlns:a="http://schemas.openxmlformats.org/drawingml/2006/main">
             <a:r>
-              <a:t>Минимальный словарь данных</a:t>
-            </a:r>
-          </a:p>
-          <a:p xmlns:a="http://schemas.openxmlformats.org/drawingml/2006/main">
-            <a:r>
-              <a:t/>
-            </a:r>
-          </a:p>
-          <a:p xmlns:a="http://schemas.openxmlformats.org/drawingml/2006/main">
-            <a:r>
-              <a:t>1. oil_fraction: %, вход до синтеза</a:t>
-            </a:r>
-          </a:p>
-          <a:p xmlns:a="http://schemas.openxmlformats.org/drawingml/2006/main">
-            <a:r>
-              <a:t>2. diameter_nm: нм, измеренная цель</a:t>
-            </a:r>
-          </a:p>
-          <a:p xmlns:a="http://schemas.openxmlformats.org/drawingml/2006/main">
-            <a:r>
-              <a:t>3. batch_id: ID независимой партии, группа проверки</a:t>
-            </a:r>
-          </a:p>
-          <a:p xmlns:a="http://schemas.openxmlformats.org/drawingml/2006/main">
-            <a:r>
-              <a:t/>
-            </a:r>
-          </a:p>
-          <a:p xmlns:a="http://schemas.openxmlformats.org/drawingml/2006/main">
-            <a:r>
-              <a:t>Вывод: ID не должен случайно стать числовым предиктором</a:t>
-            </a:r>
-          </a:p>
-          <a:p xmlns:a="http://schemas.openxmlformats.org/drawingml/2006/main">
-            <a:r>
-              <a:t/>
-            </a:r>
-          </a:p>
-          <a:p xmlns:a="http://schemas.openxmlformats.org/drawingml/2006/main">
-            <a:r>
-              <a:t>Подробное объяснение, методические ограничения и код: machine_learning/11-ml-problem_and_validation.md</a:t>
-            </a:r>
-          </a:p>
-          <a:p xmlns:a="http://schemas.openxmlformats.org/drawingml/2006/main">
-            <a:r>
-              <a:t>Справка по методам: https://scikit-learn.org/stable/modules/cross_validation.html и https://scikit-learn.org/stable/common_pitfalls.html</a:t>
+              <a:t>Лекция 11. Определения, вывод формул и воспроизводимый пример: machine_learning/11-ml-problem_and_validation.md. Все числа в примерах учебные. </a:t>
             </a:r>
           </a:p>
         </p:txBody>
@@ -5034,7 +3279,7 @@
   </p:cSld>
   <p:clrMap bg1="lt1" tx1="dk1" bg2="lt2" tx2="dk2" accent1="accent1" accent2="accent2" accent3="accent3" accent4="accent4" accent5="accent5" accent6="accent6" hlink="hlink" folHlink="folHlink"/>
   <p:sldLayoutIdLst>
-    <p:sldLayoutId xmlns:r="http://schemas.openxmlformats.org/officeDocument/2006/relationships" id="2147483649" r:id="Rd2cab55d7f354a5f"/>
+    <p:sldLayoutId xmlns:r="http://schemas.openxmlformats.org/officeDocument/2006/relationships" id="2147483649" r:id="Ra14bf905eb6a4382"/>
   </p:sldLayoutIdLst>
   <p:txStyles>
     <p:titleStyle>
@@ -5697,6 +3942,7 @@
           <a:lstStyle xmlns:a="http://schemas.openxmlformats.org/drawingml/2006/main"/>
           <a:p xmlns:a="http://schemas.openxmlformats.org/drawingml/2006/main">
             <a:pPr algn="l">
+              <a:buNone/>
               <a:defRPr sz="1350" b="1">
                 <a:solidFill>
                   <a:srgbClr val="48CAE4"/>
@@ -5754,6 +4000,7 @@
           <a:lstStyle xmlns:a="http://schemas.openxmlformats.org/drawingml/2006/main"/>
           <a:p xmlns:a="http://schemas.openxmlformats.org/drawingml/2006/main">
             <a:pPr algn="l">
+              <a:buNone/>
               <a:defRPr sz="3225" b="1">
                 <a:solidFill>
                   <a:srgbClr val="F4F7FB"/>
@@ -5777,6 +4024,7 @@
           </a:p>
           <a:p xmlns:a="http://schemas.openxmlformats.org/drawingml/2006/main">
             <a:pPr algn="l">
+              <a:buNone/>
               <a:defRPr sz="3225" b="1">
                 <a:solidFill>
                   <a:srgbClr val="F4F7FB"/>
@@ -5795,7 +4043,7 @@
                 <a:ea typeface="DejaVu Sans"/>
                 <a:cs typeface="DejaVu Sans"/>
               </a:rPr>
-              <a:t>постановка задачи и проверка</a:t>
+              <a:t>задача, данные и проверка прогноза</a:t>
             </a:r>
           </a:p>
         </p:txBody>
@@ -5834,6 +4082,7 @@
           <a:lstStyle xmlns:a="http://schemas.openxmlformats.org/drawingml/2006/main"/>
           <a:p xmlns:a="http://schemas.openxmlformats.org/drawingml/2006/main">
             <a:pPr algn="l">
+              <a:buNone/>
               <a:defRPr sz="1725" b="0">
                 <a:solidFill>
                   <a:srgbClr val="48CAE4"/>
@@ -5852,7 +4101,7 @@
                 <a:ea typeface="DejaVu Sans"/>
                 <a:cs typeface="DejaVu Sans"/>
               </a:rPr>
-              <a:t>От лабораторной таблицы к прогнозу на новой партии</a:t>
+              <a:t>Новые партии наноэмульсии: от решения до честной ошибки</a:t>
             </a:r>
           </a:p>
         </p:txBody>
@@ -5891,6 +4140,7 @@
           <a:lstStyle xmlns:a="http://schemas.openxmlformats.org/drawingml/2006/main"/>
           <a:p xmlns:a="http://schemas.openxmlformats.org/drawingml/2006/main">
             <a:pPr algn="l">
+              <a:buNone/>
               <a:defRPr sz="1275" b="0">
                 <a:solidFill>
                   <a:srgbClr val="A6B7C9"/>
@@ -6730,6 +4980,7 @@
           <a:lstStyle xmlns:a="http://schemas.openxmlformats.org/drawingml/2006/main"/>
           <a:p xmlns:a="http://schemas.openxmlformats.org/drawingml/2006/main">
             <a:pPr algn="l">
+              <a:buNone/>
               <a:defRPr sz="975" b="0">
                 <a:solidFill>
                   <a:srgbClr val="A6B7C9"/>
@@ -6748,7 +4999,7 @@
                 <a:ea typeface="DejaVu Sans"/>
                 <a:cs typeface="DejaVu Sans"/>
               </a:rPr>
-              <a:t>СХЕМА • больше данных / лучше проверка</a:t>
+              <a:t>ПРОГНОЗ • НОВЫЕ КАМПАНИИ</a:t>
             </a:r>
           </a:p>
         </p:txBody>
@@ -6787,6 +5038,7 @@
           <a:lstStyle xmlns:a="http://schemas.openxmlformats.org/drawingml/2006/main"/>
           <a:p xmlns:a="http://schemas.openxmlformats.org/drawingml/2006/main">
             <a:pPr algn="l">
+              <a:buNone/>
               <a:defRPr sz="825" b="1">
                 <a:solidFill>
                   <a:srgbClr val="A6B7C9"/>
@@ -6844,6 +5096,7 @@
           <a:lstStyle xmlns:a="http://schemas.openxmlformats.org/drawingml/2006/main"/>
           <a:p xmlns:a="http://schemas.openxmlformats.org/drawingml/2006/main">
             <a:pPr algn="r">
+              <a:buNone/>
               <a:defRPr sz="900" b="0">
                 <a:solidFill>
                   <a:srgbClr val="A6B7C9"/>
@@ -6983,6 +5236,7 @@
           <a:lstStyle xmlns:a="http://schemas.openxmlformats.org/drawingml/2006/main"/>
           <a:p xmlns:a="http://schemas.openxmlformats.org/drawingml/2006/main">
             <a:pPr algn="l">
+              <a:buNone/>
               <a:defRPr sz="1050" b="1">
                 <a:solidFill>
                   <a:srgbClr val="48CAE4"/>
@@ -7001,7 +5255,7 @@
                 <a:ea typeface="DejaVu Sans"/>
                 <a:cs typeface="DejaVu Sans"/>
               </a:rPr>
-              <a:t>ПРИМЕР И ПРИМЕНЕНИЕ</a:t>
+              <a:t>ДАННЫЕ И НЕЗАВИСИМОСТЬ</a:t>
             </a:r>
           </a:p>
         </p:txBody>
@@ -7040,6 +5294,7 @@
           <a:lstStyle xmlns:a="http://schemas.openxmlformats.org/drawingml/2006/main"/>
           <a:p xmlns:a="http://schemas.openxmlformats.org/drawingml/2006/main">
             <a:pPr algn="l">
+              <a:buNone/>
               <a:defRPr sz="2925" b="1">
                 <a:solidFill>
                   <a:srgbClr val="F4F7FB"/>
@@ -7058,7 +5313,7 @@
                 <a:ea typeface="DejaVu Sans"/>
                 <a:cs typeface="DejaVu Sans"/>
               </a:rPr>
-              <a:t>Новый объект задаёт тип разбиения</a:t>
+              <a:t>Разбиение следует за применением</a:t>
             </a:r>
           </a:p>
         </p:txBody>
@@ -7127,6 +5382,7 @@
           <a:lstStyle xmlns:a="http://schemas.openxmlformats.org/drawingml/2006/main"/>
           <a:p xmlns:a="http://schemas.openxmlformats.org/drawingml/2006/main">
             <a:pPr algn="l">
+              <a:buNone/>
               <a:defRPr sz="825" b="1">
                 <a:solidFill>
                   <a:srgbClr val="A6B7C9"/>
@@ -7184,6 +5440,7 @@
           <a:lstStyle xmlns:a="http://schemas.openxmlformats.org/drawingml/2006/main"/>
           <a:p xmlns:a="http://schemas.openxmlformats.org/drawingml/2006/main">
             <a:pPr algn="r">
+              <a:buNone/>
               <a:defRPr sz="900" b="0">
                 <a:solidFill>
                   <a:srgbClr val="A6B7C9"/>
@@ -7303,6 +5560,7 @@
           <a:lstStyle xmlns:a="http://schemas.openxmlformats.org/drawingml/2006/main"/>
           <a:p xmlns:a="http://schemas.openxmlformats.org/drawingml/2006/main">
             <a:pPr algn="l">
+              <a:buNone/>
               <a:defRPr sz="2025" b="1">
                 <a:solidFill>
                   <a:srgbClr val="F4F7FB"/>
@@ -7321,7 +5579,7 @@
                 <a:ea typeface="DejaVu Sans"/>
                 <a:cs typeface="DejaVu Sans"/>
               </a:rPr>
-              <a:t>Новая партия → группируем по batch_id</a:t>
+              <a:t>Новая партия знакомого дня: группа batch_id</a:t>
             </a:r>
           </a:p>
         </p:txBody>
@@ -7422,6 +5680,7 @@
           <a:lstStyle xmlns:a="http://schemas.openxmlformats.org/drawingml/2006/main"/>
           <a:p xmlns:a="http://schemas.openxmlformats.org/drawingml/2006/main">
             <a:pPr algn="l">
+              <a:buNone/>
               <a:defRPr sz="2025" b="0">
                 <a:solidFill>
                   <a:srgbClr val="F4F7FB"/>
@@ -7440,7 +5699,7 @@
                 <a:ea typeface="DejaVu Sans"/>
                 <a:cs typeface="DejaVu Sans"/>
               </a:rPr>
-              <a:t>Новая поставка сырья → группируем по поставке</a:t>
+              <a:t>Новый день: группа campaign_id</a:t>
             </a:r>
           </a:p>
         </p:txBody>
@@ -7541,6 +5800,7 @@
           <a:lstStyle xmlns:a="http://schemas.openxmlformats.org/drawingml/2006/main"/>
           <a:p xmlns:a="http://schemas.openxmlformats.org/drawingml/2006/main">
             <a:pPr algn="l">
+              <a:buNone/>
               <a:defRPr sz="2025" b="0">
                 <a:solidFill>
                   <a:srgbClr val="F4F7FB"/>
@@ -7559,7 +5819,7 @@
                 <a:ea typeface="DejaVu Sans"/>
                 <a:cs typeface="DejaVu Sans"/>
               </a:rPr>
-              <a:t>Новый прибор → тестируем перенос на другом приборе</a:t>
+              <a:t>Новая поставка: группа supply_id</a:t>
             </a:r>
           </a:p>
         </p:txBody>
@@ -7630,6 +5890,7 @@
           <a:lstStyle xmlns:a="http://schemas.openxmlformats.org/drawingml/2006/main"/>
           <a:p xmlns:a="http://schemas.openxmlformats.org/drawingml/2006/main">
             <a:pPr algn="ctr">
+              <a:buNone/>
               <a:defRPr sz="1500" b="1">
                 <a:solidFill>
                   <a:srgbClr val="48CAE4"/>
@@ -7648,7 +5909,7 @@
                 <a:ea typeface="DejaVu Sans"/>
                 <a:cs typeface="DejaVu Sans"/>
               </a:rPr>
-              <a:t>Разбиение должно имитировать реальную задачу</a:t>
+              <a:t>Перенос на другой прибор проверяют отдельно</a:t>
             </a:r>
           </a:p>
         </p:txBody>
@@ -7769,6 +6030,7 @@
           <a:lstStyle xmlns:a="http://schemas.openxmlformats.org/drawingml/2006/main"/>
           <a:p xmlns:a="http://schemas.openxmlformats.org/drawingml/2006/main">
             <a:pPr algn="l">
+              <a:buNone/>
               <a:defRPr sz="1050" b="1">
                 <a:solidFill>
                   <a:srgbClr val="48CAE4"/>
@@ -7787,7 +6049,7 @@
                 <a:ea typeface="DejaVu Sans"/>
                 <a:cs typeface="DejaVu Sans"/>
               </a:rPr>
-              <a:t>ПРАКТИЧЕСКИЙ ВЫВОД</a:t>
+              <a:t>СХЕМА ПРОВЕРКИ</a:t>
             </a:r>
           </a:p>
         </p:txBody>
@@ -7826,6 +6088,7 @@
           <a:lstStyle xmlns:a="http://schemas.openxmlformats.org/drawingml/2006/main"/>
           <a:p xmlns:a="http://schemas.openxmlformats.org/drawingml/2006/main">
             <a:pPr algn="l">
+              <a:buNone/>
               <a:defRPr sz="2925" b="1">
                 <a:solidFill>
                   <a:srgbClr val="F4F7FB"/>
@@ -7844,7 +6107,7 @@
                 <a:ea typeface="DejaVu Sans"/>
                 <a:cs typeface="DejaVu Sans"/>
               </a:rPr>
-              <a:t>Зачем нужен baseline</a:t>
+              <a:t>Baseline должен быть доступен в работе</a:t>
             </a:r>
           </a:p>
         </p:txBody>
@@ -7913,6 +6176,7 @@
           <a:lstStyle xmlns:a="http://schemas.openxmlformats.org/drawingml/2006/main"/>
           <a:p xmlns:a="http://schemas.openxmlformats.org/drawingml/2006/main">
             <a:pPr algn="l">
+              <a:buNone/>
               <a:defRPr sz="825" b="1">
                 <a:solidFill>
                   <a:srgbClr val="A6B7C9"/>
@@ -7970,6 +6234,7 @@
           <a:lstStyle xmlns:a="http://schemas.openxmlformats.org/drawingml/2006/main"/>
           <a:p xmlns:a="http://schemas.openxmlformats.org/drawingml/2006/main">
             <a:pPr algn="r">
+              <a:buNone/>
               <a:defRPr sz="900" b="0">
                 <a:solidFill>
                   <a:srgbClr val="A6B7C9"/>
@@ -8027,6 +6292,7 @@
           <a:lstStyle xmlns:a="http://schemas.openxmlformats.org/drawingml/2006/main"/>
           <a:p xmlns:a="http://schemas.openxmlformats.org/drawingml/2006/main">
             <a:pPr algn="l">
+              <a:buNone/>
               <a:defRPr sz="3825" b="1">
                 <a:solidFill>
                   <a:srgbClr val="48CAE4"/>
@@ -8114,6 +6380,7 @@
           <a:lstStyle xmlns:a="http://schemas.openxmlformats.org/drawingml/2006/main"/>
           <a:p xmlns:a="http://schemas.openxmlformats.org/drawingml/2006/main">
             <a:pPr algn="l">
+              <a:buNone/>
               <a:defRPr sz="1875" b="1">
                 <a:solidFill>
                   <a:srgbClr val="F4F7FB"/>
@@ -8132,7 +6399,7 @@
                 <a:ea typeface="DejaVu Sans"/>
                 <a:cs typeface="DejaVu Sans"/>
               </a:rPr>
-              <a:t>DummyRegressor учит среднее только по train</a:t>
+              <a:t>Константа: средний диаметр только train</a:t>
             </a:r>
           </a:p>
         </p:txBody>
@@ -8171,6 +6438,7 @@
           <a:lstStyle xmlns:a="http://schemas.openxmlformats.org/drawingml/2006/main"/>
           <a:p xmlns:a="http://schemas.openxmlformats.org/drawingml/2006/main">
             <a:pPr algn="l">
+              <a:buNone/>
               <a:defRPr sz="3825" b="1">
                 <a:solidFill>
                   <a:srgbClr val="80ED99"/>
@@ -8258,6 +6526,7 @@
           <a:lstStyle xmlns:a="http://schemas.openxmlformats.org/drawingml/2006/main"/>
           <a:p xmlns:a="http://schemas.openxmlformats.org/drawingml/2006/main">
             <a:pPr algn="l">
+              <a:buNone/>
               <a:defRPr sz="1875" b="0">
                 <a:solidFill>
                   <a:srgbClr val="F4F7FB"/>
@@ -8276,7 +6545,7 @@
                 <a:ea typeface="DejaVu Sans"/>
                 <a:cs typeface="DejaVu Sans"/>
               </a:rPr>
-              <a:t>Лабораторное правило иногда сильнее простой ML-модели</a:t>
+              <a:t>Лабораторное правило допустимо, если известно до синтеза</a:t>
             </a:r>
           </a:p>
         </p:txBody>
@@ -8315,6 +6584,7 @@
           <a:lstStyle xmlns:a="http://schemas.openxmlformats.org/drawingml/2006/main"/>
           <a:p xmlns:a="http://schemas.openxmlformats.org/drawingml/2006/main">
             <a:pPr algn="l">
+              <a:buNone/>
               <a:defRPr sz="3825" b="1">
                 <a:solidFill>
                   <a:srgbClr val="C4A7FF"/>
@@ -8402,6 +6672,7 @@
           <a:lstStyle xmlns:a="http://schemas.openxmlformats.org/drawingml/2006/main"/>
           <a:p xmlns:a="http://schemas.openxmlformats.org/drawingml/2006/main">
             <a:pPr algn="l">
+              <a:buNone/>
               <a:defRPr sz="1875" b="0">
                 <a:solidFill>
                   <a:srgbClr val="F4F7FB"/>
@@ -8420,7 +6691,7 @@
                 <a:ea typeface="DejaVu Sans"/>
                 <a:cs typeface="DejaVu Sans"/>
               </a:rPr>
-              <a:t>Сложная модель должна улучшать релевантное решение</a:t>
+              <a:t>Сравнение — на одних и тех же тестовых партиях</a:t>
             </a:r>
           </a:p>
         </p:txBody>
@@ -8491,6 +6762,7 @@
           <a:lstStyle xmlns:a="http://schemas.openxmlformats.org/drawingml/2006/main"/>
           <a:p xmlns:a="http://schemas.openxmlformats.org/drawingml/2006/main">
             <a:pPr algn="ctr">
+              <a:buNone/>
               <a:defRPr sz="1500" b="1">
                 <a:solidFill>
                   <a:srgbClr val="48CAE4"/>
@@ -8509,7 +6781,7 @@
                 <a:ea typeface="DejaVu Sans"/>
                 <a:cs typeface="DejaVu Sans"/>
               </a:rPr>
-              <a:t>Сравнивайте все методы на одном и том же тесте</a:t>
+              <a:t>Выигрыш в MAE ещё не устанавливает причинность</a:t>
             </a:r>
           </a:p>
         </p:txBody>
@@ -8630,6 +6902,7 @@
           <a:lstStyle xmlns:a="http://schemas.openxmlformats.org/drawingml/2006/main"/>
           <a:p xmlns:a="http://schemas.openxmlformats.org/drawingml/2006/main">
             <a:pPr algn="l">
+              <a:buNone/>
               <a:defRPr sz="1050" b="1">
                 <a:solidFill>
                   <a:srgbClr val="48CAE4"/>
@@ -8648,7 +6921,7 @@
                 <a:ea typeface="DejaVu Sans"/>
                 <a:cs typeface="DejaVu Sans"/>
               </a:rPr>
-              <a:t>ПОСТАНОВКА И МЕТОД</a:t>
+              <a:t>СХЕМА ПРОВЕРКИ</a:t>
             </a:r>
           </a:p>
         </p:txBody>
@@ -8687,6 +6960,7 @@
           <a:lstStyle xmlns:a="http://schemas.openxmlformats.org/drawingml/2006/main"/>
           <a:p xmlns:a="http://schemas.openxmlformats.org/drawingml/2006/main">
             <a:pPr algn="l">
+              <a:buNone/>
               <a:defRPr sz="2925" b="1">
                 <a:solidFill>
                   <a:srgbClr val="F4F7FB"/>
@@ -8705,7 +6979,7 @@
                 <a:ea typeface="DejaVu Sans"/>
                 <a:cs typeface="DejaVu Sans"/>
               </a:rPr>
-              <a:t>Сначала отделяем финальный тест</a:t>
+              <a:t>Внешний тест будущих дней</a:t>
             </a:r>
           </a:p>
         </p:txBody>
@@ -8774,6 +7048,7 @@
           <a:lstStyle xmlns:a="http://schemas.openxmlformats.org/drawingml/2006/main"/>
           <a:p xmlns:a="http://schemas.openxmlformats.org/drawingml/2006/main">
             <a:pPr algn="l">
+              <a:buNone/>
               <a:defRPr sz="825" b="1">
                 <a:solidFill>
                   <a:srgbClr val="A6B7C9"/>
@@ -8831,6 +7106,7 @@
           <a:lstStyle xmlns:a="http://schemas.openxmlformats.org/drawingml/2006/main"/>
           <a:p xmlns:a="http://schemas.openxmlformats.org/drawingml/2006/main">
             <a:pPr algn="r">
+              <a:buNone/>
               <a:defRPr sz="900" b="0">
                 <a:solidFill>
                   <a:srgbClr val="A6B7C9"/>
@@ -8918,6 +7194,7 @@
           <a:lstStyle xmlns:a="http://schemas.openxmlformats.org/drawingml/2006/main"/>
           <a:p xmlns:a="http://schemas.openxmlformats.org/drawingml/2006/main">
             <a:pPr algn="l">
+              <a:buNone/>
               <a:defRPr sz="1800" b="1">
                 <a:solidFill>
                   <a:srgbClr val="F4F7FB"/>
@@ -8936,7 +7213,7 @@
                 <a:ea typeface="DejaVu Sans"/>
                 <a:cs typeface="DejaVu Sans"/>
               </a:rPr>
-              <a:t>Группы делят на разработку и тест до настройки</a:t>
+              <a:t>Кампании 10 и 11 откладываем до настройки</a:t>
             </a:r>
           </a:p>
         </p:txBody>
@@ -9005,6 +7282,7 @@
           <a:lstStyle xmlns:a="http://schemas.openxmlformats.org/drawingml/2006/main"/>
           <a:p xmlns:a="http://schemas.openxmlformats.org/drawingml/2006/main">
             <a:pPr algn="l">
+              <a:buNone/>
               <a:defRPr sz="1800" b="0">
                 <a:solidFill>
                   <a:srgbClr val="F4F7FB"/>
@@ -9023,7 +7301,7 @@
                 <a:ea typeface="DejaVu Sans"/>
                 <a:cs typeface="DejaVu Sans"/>
               </a:rPr>
-              <a:t>Тестовые партии не участвуют в отборе признаков</a:t>
+              <a:t>Признаки, метрику и порог пользы задаём раньше</a:t>
             </a:r>
           </a:p>
         </p:txBody>
@@ -9092,6 +7370,7 @@
           <a:lstStyle xmlns:a="http://schemas.openxmlformats.org/drawingml/2006/main"/>
           <a:p xmlns:a="http://schemas.openxmlformats.org/drawingml/2006/main">
             <a:pPr algn="l">
+              <a:buNone/>
               <a:defRPr sz="1800" b="0">
                 <a:solidFill>
                   <a:srgbClr val="F4F7FB"/>
@@ -9110,7 +7389,7 @@
                 <a:ea typeface="DejaVu Sans"/>
                 <a:cs typeface="DejaVu Sans"/>
               </a:rPr>
-              <a:t>Один финальный отчёт после фиксации метода</a:t>
+              <a:t>После выбора метода считаем один финальный отчёт</a:t>
             </a:r>
           </a:p>
         </p:txBody>
@@ -9181,6 +7460,7 @@
           <a:lstStyle xmlns:a="http://schemas.openxmlformats.org/drawingml/2006/main"/>
           <a:p xmlns:a="http://schemas.openxmlformats.org/drawingml/2006/main">
             <a:pPr algn="ctr">
+              <a:buNone/>
               <a:defRPr sz="1275" b="1">
                 <a:solidFill>
                   <a:srgbClr val="48CAE4"/>
@@ -9199,7 +7479,7 @@
                 <a:ea typeface="DejaVu Sans"/>
                 <a:cs typeface="DejaVu Sans"/>
               </a:rPr>
-              <a:t>РАЗБИЕНИЕ ПО ПАРТИЯМ</a:t>
+              <a:t>ХРОНОЛОГИЧЕСКИЙ ТЕСТ</a:t>
             </a:r>
           </a:p>
         </p:txBody>
@@ -9233,11 +7513,12 @@
         </p:spPr>
         <p:txBody>
           <a:bodyPr xmlns:a="http://schemas.openxmlformats.org/drawingml/2006/main">
-            <a:normAutofit fontScale="90256"/>
+            <a:normAutofit fontScale="100000"/>
           </a:bodyPr>
           <a:lstStyle xmlns:a="http://schemas.openxmlformats.org/drawingml/2006/main"/>
           <a:p xmlns:a="http://schemas.openxmlformats.org/drawingml/2006/main">
             <a:pPr algn="ctr">
+              <a:buNone/>
               <a:defRPr sz="1275" b="1">
                 <a:solidFill>
                   <a:srgbClr val="A6B7C9"/>
@@ -9256,7 +7537,7 @@
                 <a:ea typeface="DejaVu Sans"/>
                 <a:cs typeface="DejaVu Sans"/>
               </a:rPr>
-              <a:t>Партия A</a:t>
+              <a:t>День 01</a:t>
             </a:r>
           </a:p>
         </p:txBody>
@@ -9320,11 +7601,12 @@
         </p:spPr>
         <p:txBody>
           <a:bodyPr xmlns:a="http://schemas.openxmlformats.org/drawingml/2006/main">
-            <a:normAutofit fontScale="90532"/>
+            <a:normAutofit fontScale="100000"/>
           </a:bodyPr>
           <a:lstStyle xmlns:a="http://schemas.openxmlformats.org/drawingml/2006/main"/>
           <a:p xmlns:a="http://schemas.openxmlformats.org/drawingml/2006/main">
             <a:pPr algn="ctr">
+              <a:buNone/>
               <a:defRPr sz="1275" b="1">
                 <a:solidFill>
                   <a:srgbClr val="A6B7C9"/>
@@ -9343,7 +7625,7 @@
                 <a:ea typeface="DejaVu Sans"/>
                 <a:cs typeface="DejaVu Sans"/>
               </a:rPr>
-              <a:t>Партия B</a:t>
+              <a:t>День 02</a:t>
             </a:r>
           </a:p>
         </p:txBody>
@@ -9407,11 +7689,12 @@
         </p:spPr>
         <p:txBody>
           <a:bodyPr xmlns:a="http://schemas.openxmlformats.org/drawingml/2006/main">
-            <a:normAutofit fontScale="90809"/>
+            <a:normAutofit fontScale="100000"/>
           </a:bodyPr>
           <a:lstStyle xmlns:a="http://schemas.openxmlformats.org/drawingml/2006/main"/>
           <a:p xmlns:a="http://schemas.openxmlformats.org/drawingml/2006/main">
             <a:pPr algn="ctr">
+              <a:buNone/>
               <a:defRPr sz="1275" b="1">
                 <a:solidFill>
                   <a:srgbClr val="A6B7C9"/>
@@ -9430,7 +7713,7 @@
                 <a:ea typeface="DejaVu Sans"/>
                 <a:cs typeface="DejaVu Sans"/>
               </a:rPr>
-              <a:t>Партия C</a:t>
+              <a:t>День 10</a:t>
             </a:r>
           </a:p>
         </p:txBody>
@@ -9494,11 +7777,12 @@
         </p:spPr>
         <p:txBody>
           <a:bodyPr xmlns:a="http://schemas.openxmlformats.org/drawingml/2006/main">
-            <a:normAutofit fontScale="89250"/>
+            <a:normAutofit fontScale="100000"/>
           </a:bodyPr>
           <a:lstStyle xmlns:a="http://schemas.openxmlformats.org/drawingml/2006/main"/>
           <a:p xmlns:a="http://schemas.openxmlformats.org/drawingml/2006/main">
             <a:pPr algn="ctr">
+              <a:buNone/>
               <a:defRPr sz="1275" b="1">
                 <a:solidFill>
                   <a:srgbClr val="A6B7C9"/>
@@ -9517,7 +7801,7 @@
                 <a:ea typeface="DejaVu Sans"/>
                 <a:cs typeface="DejaVu Sans"/>
               </a:rPr>
-              <a:t>Партия D</a:t>
+              <a:t>День 11</a:t>
             </a:r>
           </a:p>
         </p:txBody>
@@ -9586,6 +7870,7 @@
           <a:lstStyle xmlns:a="http://schemas.openxmlformats.org/drawingml/2006/main"/>
           <a:p xmlns:a="http://schemas.openxmlformats.org/drawingml/2006/main">
             <a:pPr algn="ctr">
+              <a:buNone/>
               <a:defRPr sz="1200" b="1">
                 <a:solidFill>
                   <a:srgbClr val="F4F7FB"/>
@@ -9604,7 +7889,7 @@
                 <a:ea typeface="DejaVu Sans"/>
                 <a:cs typeface="DejaVu Sans"/>
               </a:rPr>
-              <a:t>A–C: train  ·  D: test</a:t>
+              <a:t>Прежние: train   Новые: test</a:t>
             </a:r>
           </a:p>
         </p:txBody>
@@ -9725,6 +8010,7 @@
           <a:lstStyle xmlns:a="http://schemas.openxmlformats.org/drawingml/2006/main"/>
           <a:p xmlns:a="http://schemas.openxmlformats.org/drawingml/2006/main">
             <a:pPr algn="l">
+              <a:buNone/>
               <a:defRPr sz="1050" b="1">
                 <a:solidFill>
                   <a:srgbClr val="48CAE4"/>
@@ -9743,7 +8029,7 @@
                 <a:ea typeface="DejaVu Sans"/>
                 <a:cs typeface="DejaVu Sans"/>
               </a:rPr>
-              <a:t>ТРИ ОПОРНЫХ ПУНКТА</a:t>
+              <a:t>СХЕМА ПРОВЕРКИ</a:t>
             </a:r>
           </a:p>
         </p:txBody>
@@ -9782,6 +8068,7 @@
           <a:lstStyle xmlns:a="http://schemas.openxmlformats.org/drawingml/2006/main"/>
           <a:p xmlns:a="http://schemas.openxmlformats.org/drawingml/2006/main">
             <a:pPr algn="l">
+              <a:buNone/>
               <a:defRPr sz="2925" b="1">
                 <a:solidFill>
                   <a:srgbClr val="F4F7FB"/>
@@ -9800,7 +8087,7 @@
                 <a:ea typeface="DejaVu Sans"/>
                 <a:cs typeface="DejaVu Sans"/>
               </a:rPr>
-              <a:t>Внутренняя групповая проверка</a:t>
+              <a:t>Внутренняя проверка по дням</a:t>
             </a:r>
           </a:p>
         </p:txBody>
@@ -9869,6 +8156,7 @@
           <a:lstStyle xmlns:a="http://schemas.openxmlformats.org/drawingml/2006/main"/>
           <a:p xmlns:a="http://schemas.openxmlformats.org/drawingml/2006/main">
             <a:pPr algn="l">
+              <a:buNone/>
               <a:defRPr sz="825" b="1">
                 <a:solidFill>
                   <a:srgbClr val="A6B7C9"/>
@@ -9926,6 +8214,7 @@
           <a:lstStyle xmlns:a="http://schemas.openxmlformats.org/drawingml/2006/main"/>
           <a:p xmlns:a="http://schemas.openxmlformats.org/drawingml/2006/main">
             <a:pPr algn="r">
+              <a:buNone/>
               <a:defRPr sz="900" b="0">
                 <a:solidFill>
                   <a:srgbClr val="A6B7C9"/>
@@ -10045,6 +8334,7 @@
           <a:lstStyle xmlns:a="http://schemas.openxmlformats.org/drawingml/2006/main"/>
           <a:p xmlns:a="http://schemas.openxmlformats.org/drawingml/2006/main">
             <a:pPr algn="l">
+              <a:buNone/>
               <a:defRPr sz="2850" b="1">
                 <a:solidFill>
                   <a:srgbClr val="48CAE4"/>
@@ -10102,6 +8392,7 @@
           <a:lstStyle xmlns:a="http://schemas.openxmlformats.org/drawingml/2006/main"/>
           <a:p xmlns:a="http://schemas.openxmlformats.org/drawingml/2006/main">
             <a:pPr algn="l">
+              <a:buNone/>
               <a:defRPr sz="2025" b="1">
                 <a:solidFill>
                   <a:srgbClr val="F4F7FB"/>
@@ -10120,7 +8411,7 @@
                 <a:ea typeface="DejaVu Sans"/>
                 <a:cs typeface="DejaVu Sans"/>
               </a:rPr>
-              <a:t>GroupKFold оставляет целую партию вне обучения</a:t>
+              <a:t>На днях 0–9: GroupKFold(n_splits=5)</a:t>
             </a:r>
           </a:p>
         </p:txBody>
@@ -10221,6 +8512,7 @@
           <a:lstStyle xmlns:a="http://schemas.openxmlformats.org/drawingml/2006/main"/>
           <a:p xmlns:a="http://schemas.openxmlformats.org/drawingml/2006/main">
             <a:pPr algn="l">
+              <a:buNone/>
               <a:defRPr sz="2850" b="1">
                 <a:solidFill>
                   <a:srgbClr val="80ED99"/>
@@ -10278,6 +8570,7 @@
           <a:lstStyle xmlns:a="http://schemas.openxmlformats.org/drawingml/2006/main"/>
           <a:p xmlns:a="http://schemas.openxmlformats.org/drawingml/2006/main">
             <a:pPr algn="l">
+              <a:buNone/>
               <a:defRPr sz="2025" b="0">
                 <a:solidFill>
                   <a:srgbClr val="F4F7FB"/>
@@ -10296,7 +8589,7 @@
                 <a:ea typeface="DejaVu Sans"/>
                 <a:cs typeface="DejaVu Sans"/>
               </a:rPr>
-              <a:t>Каждая складка заново обучает весь Pipeline</a:t>
+              <a:t>В каждой складке остаются два полных дня</a:t>
             </a:r>
           </a:p>
         </p:txBody>
@@ -10397,6 +8690,7 @@
           <a:lstStyle xmlns:a="http://schemas.openxmlformats.org/drawingml/2006/main"/>
           <a:p xmlns:a="http://schemas.openxmlformats.org/drawingml/2006/main">
             <a:pPr algn="l">
+              <a:buNone/>
               <a:defRPr sz="2850" b="1">
                 <a:solidFill>
                   <a:srgbClr val="C4A7FF"/>
@@ -10454,6 +8748,7 @@
           <a:lstStyle xmlns:a="http://schemas.openxmlformats.org/drawingml/2006/main"/>
           <a:p xmlns:a="http://schemas.openxmlformats.org/drawingml/2006/main">
             <a:pPr algn="l">
+              <a:buNone/>
               <a:defRPr sz="2025" b="0">
                 <a:solidFill>
                   <a:srgbClr val="F4F7FB"/>
@@ -10472,7 +8767,7 @@
                 <a:ea typeface="DejaVu Sans"/>
                 <a:cs typeface="DejaVu Sans"/>
               </a:rPr>
-              <a:t>Разброс ошибок между складками показывают, не скрывают</a:t>
+              <a:t>Импутация, кодирование и Ridge переобучаются</a:t>
             </a:r>
           </a:p>
         </p:txBody>
@@ -10543,6 +8838,7 @@
           <a:lstStyle xmlns:a="http://schemas.openxmlformats.org/drawingml/2006/main"/>
           <a:p xmlns:a="http://schemas.openxmlformats.org/drawingml/2006/main">
             <a:pPr algn="ctr">
+              <a:buNone/>
               <a:defRPr sz="1500" b="1">
                 <a:solidFill>
                   <a:srgbClr val="48CAE4"/>
@@ -10561,7 +8857,7 @@
                 <a:ea typeface="DejaVu Sans"/>
                 <a:cs typeface="DejaVu Sans"/>
               </a:rPr>
-              <a:t>Четыре складки требуют хотя бы четыре независимые группы</a:t>
+              <a:t>Проверьте число и состав групп каждой складки</a:t>
             </a:r>
           </a:p>
         </p:txBody>
@@ -10682,6 +8978,7 @@
           <a:lstStyle xmlns:a="http://schemas.openxmlformats.org/drawingml/2006/main"/>
           <a:p xmlns:a="http://schemas.openxmlformats.org/drawingml/2006/main">
             <a:pPr algn="l">
+              <a:buNone/>
               <a:defRPr sz="1050" b="1">
                 <a:solidFill>
                   <a:srgbClr val="48CAE4"/>
@@ -10700,7 +8997,7 @@
                 <a:ea typeface="DejaVu Sans"/>
                 <a:cs typeface="DejaVu Sans"/>
               </a:rPr>
-              <a:t>ПРОВЕРКА И ИНТЕРПРЕТАЦИЯ</a:t>
+              <a:t>СХЕМА ПРОВЕРКИ</a:t>
             </a:r>
           </a:p>
         </p:txBody>
@@ -10739,6 +9036,7 @@
           <a:lstStyle xmlns:a="http://schemas.openxmlformats.org/drawingml/2006/main"/>
           <a:p xmlns:a="http://schemas.openxmlformats.org/drawingml/2006/main">
             <a:pPr algn="l">
+              <a:buNone/>
               <a:defRPr sz="2925" b="1">
                 <a:solidFill>
                   <a:srgbClr val="F4F7FB"/>
@@ -10757,7 +9055,7 @@
                 <a:ea typeface="DejaVu Sans"/>
                 <a:cs typeface="DejaVu Sans"/>
               </a:rPr>
-              <a:t>Утечка из технических повторов</a:t>
+              <a:t>Псевдорепликация в тесте</a:t>
             </a:r>
           </a:p>
         </p:txBody>
@@ -10826,6 +9124,7 @@
           <a:lstStyle xmlns:a="http://schemas.openxmlformats.org/drawingml/2006/main"/>
           <a:p xmlns:a="http://schemas.openxmlformats.org/drawingml/2006/main">
             <a:pPr algn="l">
+              <a:buNone/>
               <a:defRPr sz="825" b="1">
                 <a:solidFill>
                   <a:srgbClr val="A6B7C9"/>
@@ -10883,6 +9182,7 @@
           <a:lstStyle xmlns:a="http://schemas.openxmlformats.org/drawingml/2006/main"/>
           <a:p xmlns:a="http://schemas.openxmlformats.org/drawingml/2006/main">
             <a:pPr algn="r">
+              <a:buNone/>
               <a:defRPr sz="900" b="0">
                 <a:solidFill>
                   <a:srgbClr val="A6B7C9"/>
@@ -11002,6 +9302,7 @@
           <a:lstStyle xmlns:a="http://schemas.openxmlformats.org/drawingml/2006/main"/>
           <a:p xmlns:a="http://schemas.openxmlformats.org/drawingml/2006/main">
             <a:pPr algn="l">
+              <a:buNone/>
               <a:defRPr sz="1875" b="0">
                 <a:solidFill>
                   <a:srgbClr val="F4F7FB"/>
@@ -11020,7 +9321,7 @@
                 <a:ea typeface="DejaVu Sans"/>
                 <a:cs typeface="DejaVu Sans"/>
               </a:rPr>
-              <a:t>Изображения одной партии в train и test дают завышение</a:t>
+              <a:t>144 отсчёта соответствуют лишь 48 партиям</a:t>
             </a:r>
           </a:p>
         </p:txBody>
@@ -11089,6 +9390,7 @@
           <a:lstStyle xmlns:a="http://schemas.openxmlformats.org/drawingml/2006/main"/>
           <a:p xmlns:a="http://schemas.openxmlformats.org/drawingml/2006/main">
             <a:pPr algn="l">
+              <a:buNone/>
               <a:defRPr sz="1875" b="0">
                 <a:solidFill>
                   <a:srgbClr val="F4F7FB"/>
@@ -11107,7 +9409,7 @@
                 <a:ea typeface="DejaVu Sans"/>
                 <a:cs typeface="DejaVu Sans"/>
               </a:rPr>
-              <a:t>Модель запоминает особенности партии или фона</a:t>
+              <a:t>Случайное деление строк смешивает повторы</a:t>
             </a:r>
           </a:p>
         </p:txBody>
@@ -11176,6 +9478,7 @@
           <a:lstStyle xmlns:a="http://schemas.openxmlformats.org/drawingml/2006/main"/>
           <a:p xmlns:a="http://schemas.openxmlformats.org/drawingml/2006/main">
             <a:pPr algn="l">
+              <a:buNone/>
               <a:defRPr sz="1875" b="0">
                 <a:solidFill>
                   <a:srgbClr val="F4F7FB"/>
@@ -11194,7 +9497,7 @@
                 <a:ea typeface="DejaVu Sans"/>
                 <a:cs typeface="DejaVu Sans"/>
               </a:rPr>
-              <a:t>Группировка либо агрегирование решает этот частный случай</a:t>
+              <a:t>При новом дне группируйте четыре партии дня</a:t>
             </a:r>
           </a:p>
         </p:txBody>
@@ -11233,6 +9536,7 @@
           <a:lstStyle xmlns:a="http://schemas.openxmlformats.org/drawingml/2006/main"/>
           <a:p xmlns:a="http://schemas.openxmlformats.org/drawingml/2006/main">
             <a:pPr algn="l">
+              <a:buNone/>
               <a:defRPr sz="1275" b="1">
                 <a:solidFill>
                   <a:srgbClr val="48CAE4"/>
@@ -11290,6 +9594,7 @@
           <a:lstStyle xmlns:a="http://schemas.openxmlformats.org/drawingml/2006/main"/>
           <a:p xmlns:a="http://schemas.openxmlformats.org/drawingml/2006/main">
             <a:pPr algn="l">
+              <a:buNone/>
               <a:defRPr sz="2025" b="1">
                 <a:solidFill>
                   <a:srgbClr val="F4F7FB"/>
@@ -11308,7 +9613,7 @@
                 <a:ea typeface="DejaVu Sans"/>
                 <a:cs typeface="DejaVu Sans"/>
               </a:rPr>
-              <a:t>Проверяйте реальные ID на обеих сторонах разбиения</a:t>
+              <a:t>Проверяйте ID по обе стороны каждой границы</a:t>
             </a:r>
           </a:p>
         </p:txBody>
@@ -11429,6 +9734,7 @@
           <a:lstStyle xmlns:a="http://schemas.openxmlformats.org/drawingml/2006/main"/>
           <a:p xmlns:a="http://schemas.openxmlformats.org/drawingml/2006/main">
             <a:pPr algn="l">
+              <a:buNone/>
               <a:defRPr sz="1050" b="1">
                 <a:solidFill>
                   <a:srgbClr val="48CAE4"/>
@@ -11447,7 +9753,7 @@
                 <a:ea typeface="DejaVu Sans"/>
                 <a:cs typeface="DejaVu Sans"/>
               </a:rPr>
-              <a:t>ПРИМЕР И ПРИМЕНЕНИЕ</a:t>
+              <a:t>СХЕМА ПРОВЕРКИ</a:t>
             </a:r>
           </a:p>
         </p:txBody>
@@ -11486,6 +9792,7 @@
           <a:lstStyle xmlns:a="http://schemas.openxmlformats.org/drawingml/2006/main"/>
           <a:p xmlns:a="http://schemas.openxmlformats.org/drawingml/2006/main">
             <a:pPr algn="l">
+              <a:buNone/>
               <a:defRPr sz="2925" b="1">
                 <a:solidFill>
                   <a:srgbClr val="F4F7FB"/>
@@ -11504,7 +9811,7 @@
                 <a:ea typeface="DejaVu Sans"/>
                 <a:cs typeface="DejaVu Sans"/>
               </a:rPr>
-              <a:t>Утечка через предобработку</a:t>
+              <a:t>Предобработка внутри складки</a:t>
             </a:r>
           </a:p>
         </p:txBody>
@@ -11573,6 +9880,7 @@
           <a:lstStyle xmlns:a="http://schemas.openxmlformats.org/drawingml/2006/main"/>
           <a:p xmlns:a="http://schemas.openxmlformats.org/drawingml/2006/main">
             <a:pPr algn="l">
+              <a:buNone/>
               <a:defRPr sz="825" b="1">
                 <a:solidFill>
                   <a:srgbClr val="A6B7C9"/>
@@ -11630,6 +9938,7 @@
           <a:lstStyle xmlns:a="http://schemas.openxmlformats.org/drawingml/2006/main"/>
           <a:p xmlns:a="http://schemas.openxmlformats.org/drawingml/2006/main">
             <a:pPr algn="r">
+              <a:buNone/>
               <a:defRPr sz="900" b="0">
                 <a:solidFill>
                   <a:srgbClr val="A6B7C9"/>
@@ -11717,6 +10026,7 @@
           <a:lstStyle xmlns:a="http://schemas.openxmlformats.org/drawingml/2006/main"/>
           <a:p xmlns:a="http://schemas.openxmlformats.org/drawingml/2006/main">
             <a:pPr algn="l">
+              <a:buNone/>
               <a:defRPr sz="1800" b="1">
                 <a:solidFill>
                   <a:srgbClr val="F4F7FB"/>
@@ -11735,7 +10045,7 @@
                 <a:ea typeface="DejaVu Sans"/>
                 <a:cs typeface="DejaVu Sans"/>
               </a:rPr>
-              <a:t>Масштабирование на всей таблице видит тестовую статистику</a:t>
+              <a:t>Медиана пропуска обучается только на train</a:t>
             </a:r>
           </a:p>
         </p:txBody>
@@ -11804,6 +10114,7 @@
           <a:lstStyle xmlns:a="http://schemas.openxmlformats.org/drawingml/2006/main"/>
           <a:p xmlns:a="http://schemas.openxmlformats.org/drawingml/2006/main">
             <a:pPr algn="l">
+              <a:buNone/>
               <a:defRPr sz="1800" b="0">
                 <a:solidFill>
                   <a:srgbClr val="F4F7FB"/>
@@ -11822,7 +10133,7 @@
                 <a:ea typeface="DejaVu Sans"/>
                 <a:cs typeface="DejaVu Sans"/>
               </a:rPr>
-              <a:t>Отбор пиков по всей y использует тестовые метки</a:t>
+              <a:t>Масштаб и кодирование учатся без тестовых строк</a:t>
             </a:r>
           </a:p>
         </p:txBody>
@@ -11891,6 +10202,7 @@
           <a:lstStyle xmlns:a="http://schemas.openxmlformats.org/drawingml/2006/main"/>
           <a:p xmlns:a="http://schemas.openxmlformats.org/drawingml/2006/main">
             <a:pPr algn="l">
+              <a:buNone/>
               <a:defRPr sz="1800" b="0">
                 <a:solidFill>
                   <a:srgbClr val="F4F7FB"/>
@@ -11909,7 +10221,7 @@
                 <a:ea typeface="DejaVu Sans"/>
                 <a:cs typeface="DejaVu Sans"/>
               </a:rPr>
-              <a:t>Параметры предобработки обучают внутри каждой складки</a:t>
+              <a:t>Отбор пиков по y выполняется внутри CV</a:t>
             </a:r>
           </a:p>
         </p:txBody>
@@ -11975,11 +10287,12 @@
         </p:spPr>
         <p:txBody>
           <a:bodyPr xmlns:a="http://schemas.openxmlformats.org/drawingml/2006/main">
-            <a:normAutofit fontScale="90809"/>
+            <a:normAutofit fontScale="100000"/>
           </a:bodyPr>
           <a:lstStyle xmlns:a="http://schemas.openxmlformats.org/drawingml/2006/main"/>
           <a:p xmlns:a="http://schemas.openxmlformats.org/drawingml/2006/main">
             <a:pPr algn="ctr">
+              <a:buNone/>
               <a:defRPr sz="1275" b="1">
                 <a:solidFill>
                   <a:srgbClr val="48CAE4"/>
@@ -11998,7 +10311,7 @@
                 <a:ea typeface="DejaVu Sans"/>
                 <a:cs typeface="DejaVu Sans"/>
               </a:rPr>
-              <a:t>УТЕЧКА ПРИ СЛУЧАЙНОМ ДЕЛЕНИИ</a:t>
+              <a:t>ПРИМЕР СМЕШЕНИЯ ПОВТОРОВ</a:t>
             </a:r>
           </a:p>
         </p:txBody>
@@ -12037,6 +10350,7 @@
           <a:lstStyle xmlns:a="http://schemas.openxmlformats.org/drawingml/2006/main"/>
           <a:p xmlns:a="http://schemas.openxmlformats.org/drawingml/2006/main">
             <a:pPr algn="ctr">
+              <a:buNone/>
               <a:defRPr sz="1275" b="1">
                 <a:solidFill>
                   <a:srgbClr val="A6B7C9"/>
@@ -12124,6 +10438,7 @@
           <a:lstStyle xmlns:a="http://schemas.openxmlformats.org/drawingml/2006/main"/>
           <a:p xmlns:a="http://schemas.openxmlformats.org/drawingml/2006/main">
             <a:pPr algn="ctr">
+              <a:buNone/>
               <a:defRPr sz="1275" b="1">
                 <a:solidFill>
                   <a:srgbClr val="A6B7C9"/>
@@ -12211,6 +10526,7 @@
           <a:lstStyle xmlns:a="http://schemas.openxmlformats.org/drawingml/2006/main"/>
           <a:p xmlns:a="http://schemas.openxmlformats.org/drawingml/2006/main">
             <a:pPr algn="ctr">
+              <a:buNone/>
               <a:defRPr sz="1275" b="1">
                 <a:solidFill>
                   <a:srgbClr val="A6B7C9"/>
@@ -12298,6 +10614,7 @@
           <a:lstStyle xmlns:a="http://schemas.openxmlformats.org/drawingml/2006/main"/>
           <a:p xmlns:a="http://schemas.openxmlformats.org/drawingml/2006/main">
             <a:pPr algn="ctr">
+              <a:buNone/>
               <a:defRPr sz="1275" b="1">
                 <a:solidFill>
                   <a:srgbClr val="A6B7C9"/>
@@ -12380,11 +10697,12 @@
         </p:spPr>
         <p:txBody>
           <a:bodyPr xmlns:a="http://schemas.openxmlformats.org/drawingml/2006/main">
-            <a:normAutofit fontScale="100000"/>
+            <a:normAutofit fontScale="91503"/>
           </a:bodyPr>
           <a:lstStyle xmlns:a="http://schemas.openxmlformats.org/drawingml/2006/main"/>
           <a:p xmlns:a="http://schemas.openxmlformats.org/drawingml/2006/main">
             <a:pPr algn="ctr">
+              <a:buNone/>
               <a:defRPr sz="1200" b="1">
                 <a:solidFill>
                   <a:srgbClr val="F4F7FB"/>
@@ -12403,7 +10721,7 @@
                 <a:ea typeface="DejaVu Sans"/>
                 <a:cs typeface="DejaVu Sans"/>
               </a:rPr>
-              <a:t>Повторы партии в обеих частях</a:t>
+              <a:t>Один ID в train и test означает утечку</a:t>
             </a:r>
           </a:p>
         </p:txBody>
@@ -12524,6 +10842,7 @@
           <a:lstStyle xmlns:a="http://schemas.openxmlformats.org/drawingml/2006/main"/>
           <a:p xmlns:a="http://schemas.openxmlformats.org/drawingml/2006/main">
             <a:pPr algn="l">
+              <a:buNone/>
               <a:defRPr sz="1050" b="1">
                 <a:solidFill>
                   <a:srgbClr val="48CAE4"/>
@@ -12542,7 +10861,7 @@
                 <a:ea typeface="DejaVu Sans"/>
                 <a:cs typeface="DejaVu Sans"/>
               </a:rPr>
-              <a:t>ПРАКТИЧЕСКИЙ ВЫВОД</a:t>
+              <a:t>СХЕМА ПРОВЕРКИ</a:t>
             </a:r>
           </a:p>
         </p:txBody>
@@ -12581,6 +10900,7 @@
           <a:lstStyle xmlns:a="http://schemas.openxmlformats.org/drawingml/2006/main"/>
           <a:p xmlns:a="http://schemas.openxmlformats.org/drawingml/2006/main">
             <a:pPr algn="l">
+              <a:buNone/>
               <a:defRPr sz="2925" b="1">
                 <a:solidFill>
                   <a:srgbClr val="F4F7FB"/>
@@ -12599,7 +10919,7 @@
                 <a:ea typeface="DejaVu Sans"/>
                 <a:cs typeface="DejaVu Sans"/>
               </a:rPr>
-              <a:t>Утечка из будущего</a:t>
+              <a:t>Три разных утечки</a:t>
             </a:r>
           </a:p>
         </p:txBody>
@@ -12668,6 +10988,7 @@
           <a:lstStyle xmlns:a="http://schemas.openxmlformats.org/drawingml/2006/main"/>
           <a:p xmlns:a="http://schemas.openxmlformats.org/drawingml/2006/main">
             <a:pPr algn="l">
+              <a:buNone/>
               <a:defRPr sz="825" b="1">
                 <a:solidFill>
                   <a:srgbClr val="A6B7C9"/>
@@ -12725,6 +11046,7 @@
           <a:lstStyle xmlns:a="http://schemas.openxmlformats.org/drawingml/2006/main"/>
           <a:p xmlns:a="http://schemas.openxmlformats.org/drawingml/2006/main">
             <a:pPr algn="r">
+              <a:buNone/>
               <a:defRPr sz="900" b="0">
                 <a:solidFill>
                   <a:srgbClr val="A6B7C9"/>
@@ -12782,6 +11104,7 @@
           <a:lstStyle xmlns:a="http://schemas.openxmlformats.org/drawingml/2006/main"/>
           <a:p xmlns:a="http://schemas.openxmlformats.org/drawingml/2006/main">
             <a:pPr algn="l">
+              <a:buNone/>
               <a:defRPr sz="3825" b="1">
                 <a:solidFill>
                   <a:srgbClr val="48CAE4"/>
@@ -12869,6 +11192,7 @@
           <a:lstStyle xmlns:a="http://schemas.openxmlformats.org/drawingml/2006/main"/>
           <a:p xmlns:a="http://schemas.openxmlformats.org/drawingml/2006/main">
             <a:pPr algn="l">
+              <a:buNone/>
               <a:defRPr sz="1875" b="1">
                 <a:solidFill>
                   <a:srgbClr val="F4F7FB"/>
@@ -12887,7 +11211,7 @@
                 <a:ea typeface="DejaVu Sans"/>
                 <a:cs typeface="DejaVu Sans"/>
               </a:rPr>
-              <a:t>Прогноз ранней рецептуры не знает поздней морфологии</a:t>
+              <a:t>Целевой результат QC в предсинтезных входах</a:t>
             </a:r>
           </a:p>
         </p:txBody>
@@ -12926,6 +11250,7 @@
           <a:lstStyle xmlns:a="http://schemas.openxmlformats.org/drawingml/2006/main"/>
           <a:p xmlns:a="http://schemas.openxmlformats.org/drawingml/2006/main">
             <a:pPr algn="l">
+              <a:buNone/>
               <a:defRPr sz="3825" b="1">
                 <a:solidFill>
                   <a:srgbClr val="80ED99"/>
@@ -13013,6 +11338,7 @@
           <a:lstStyle xmlns:a="http://schemas.openxmlformats.org/drawingml/2006/main"/>
           <a:p xmlns:a="http://schemas.openxmlformats.org/drawingml/2006/main">
             <a:pPr algn="l">
+              <a:buNone/>
               <a:defRPr sz="1875" b="0">
                 <a:solidFill>
                   <a:srgbClr val="F4F7FB"/>
@@ -13031,7 +11357,7 @@
                 <a:ea typeface="DejaVu Sans"/>
                 <a:cs typeface="DejaVu Sans"/>
               </a:rPr>
-              <a:t>Признак с результатом теста качества сообщает ответ</a:t>
+              <a:t>Отбор признаков по ответам всех кампаний</a:t>
             </a:r>
           </a:p>
         </p:txBody>
@@ -13070,6 +11396,7 @@
           <a:lstStyle xmlns:a="http://schemas.openxmlformats.org/drawingml/2006/main"/>
           <a:p xmlns:a="http://schemas.openxmlformats.org/drawingml/2006/main">
             <a:pPr algn="l">
+              <a:buNone/>
               <a:defRPr sz="3825" b="1">
                 <a:solidFill>
                   <a:srgbClr val="C4A7FF"/>
@@ -13157,6 +11484,7 @@
           <a:lstStyle xmlns:a="http://schemas.openxmlformats.org/drawingml/2006/main"/>
           <a:p xmlns:a="http://schemas.openxmlformats.org/drawingml/2006/main">
             <a:pPr algn="l">
+              <a:buNone/>
               <a:defRPr sz="1875" b="0">
                 <a:solidFill>
                   <a:srgbClr val="F4F7FB"/>
@@ -13175,7 +11503,7 @@
                 <a:ea typeface="DejaVu Sans"/>
                 <a:cs typeface="DejaVu Sans"/>
               </a:rPr>
-              <a:t>Метаданные о партии могут косвенно кодировать цель</a:t>
+              <a:t>Выбор лучшего seed по финальным двум дням</a:t>
             </a:r>
           </a:p>
         </p:txBody>
@@ -13246,6 +11574,7 @@
           <a:lstStyle xmlns:a="http://schemas.openxmlformats.org/drawingml/2006/main"/>
           <a:p xmlns:a="http://schemas.openxmlformats.org/drawingml/2006/main">
             <a:pPr algn="ctr">
+              <a:buNone/>
               <a:defRPr sz="1500" b="1">
                 <a:solidFill>
                   <a:srgbClr val="48CAE4"/>
@@ -13264,7 +11593,7 @@
                 <a:ea typeface="DejaVu Sans"/>
                 <a:cs typeface="DejaVu Sans"/>
               </a:rPr>
-              <a:t>Составьте временную схему получения каждого столбца</a:t>
+              <a:t>Аудит времени появления и происхождения полей</a:t>
             </a:r>
           </a:p>
         </p:txBody>
@@ -13385,6 +11714,7 @@
           <a:lstStyle xmlns:a="http://schemas.openxmlformats.org/drawingml/2006/main"/>
           <a:p xmlns:a="http://schemas.openxmlformats.org/drawingml/2006/main">
             <a:pPr algn="l">
+              <a:buNone/>
               <a:defRPr sz="1050" b="1">
                 <a:solidFill>
                   <a:srgbClr val="48CAE4"/>
@@ -13403,7 +11733,7 @@
                 <a:ea typeface="DejaVu Sans"/>
                 <a:cs typeface="DejaVu Sans"/>
               </a:rPr>
-              <a:t>ПОСТАНОВКА И МЕТОД</a:t>
+              <a:t>СХЕМА ПРОВЕРКИ</a:t>
             </a:r>
           </a:p>
         </p:txBody>
@@ -13442,6 +11772,7 @@
           <a:lstStyle xmlns:a="http://schemas.openxmlformats.org/drawingml/2006/main"/>
           <a:p xmlns:a="http://schemas.openxmlformats.org/drawingml/2006/main">
             <a:pPr algn="l">
+              <a:buNone/>
               <a:defRPr sz="2925" b="1">
                 <a:solidFill>
                   <a:srgbClr val="F4F7FB"/>
@@ -13460,7 +11791,7 @@
                 <a:ea typeface="DejaVu Sans"/>
                 <a:cs typeface="DejaVu Sans"/>
               </a:rPr>
-              <a:t>Полный цикл оценки</a:t>
+              <a:t>Процедура выбора модели</a:t>
             </a:r>
           </a:p>
         </p:txBody>
@@ -13529,6 +11860,7 @@
           <a:lstStyle xmlns:a="http://schemas.openxmlformats.org/drawingml/2006/main"/>
           <a:p xmlns:a="http://schemas.openxmlformats.org/drawingml/2006/main">
             <a:pPr algn="l">
+              <a:buNone/>
               <a:defRPr sz="825" b="1">
                 <a:solidFill>
                   <a:srgbClr val="A6B7C9"/>
@@ -13586,6 +11918,7 @@
           <a:lstStyle xmlns:a="http://schemas.openxmlformats.org/drawingml/2006/main"/>
           <a:p xmlns:a="http://schemas.openxmlformats.org/drawingml/2006/main">
             <a:pPr algn="r">
+              <a:buNone/>
               <a:defRPr sz="900" b="0">
                 <a:solidFill>
                   <a:srgbClr val="A6B7C9"/>
@@ -13643,6 +11976,7 @@
           <a:lstStyle xmlns:a="http://schemas.openxmlformats.org/drawingml/2006/main"/>
           <a:p xmlns:a="http://schemas.openxmlformats.org/drawingml/2006/main">
             <a:pPr algn="l">
+              <a:buNone/>
               <a:defRPr sz="2400" b="1">
                 <a:solidFill>
                   <a:srgbClr val="48CAE4"/>
@@ -13700,6 +12034,7 @@
           <a:lstStyle xmlns:a="http://schemas.openxmlformats.org/drawingml/2006/main"/>
           <a:p xmlns:a="http://schemas.openxmlformats.org/drawingml/2006/main">
             <a:pPr algn="l">
+              <a:buNone/>
               <a:defRPr sz="2025" b="1">
                 <a:solidFill>
                   <a:srgbClr val="F4F7FB"/>
@@ -13718,7 +12053,7 @@
                 <a:ea typeface="DejaVu Sans"/>
                 <a:cs typeface="DejaVu Sans"/>
               </a:rPr>
-              <a:t>1. Отложить группы для финального теста</a:t>
+              <a:t>1. Удержать новые дни до анализа</a:t>
             </a:r>
           </a:p>
         </p:txBody>
@@ -13787,6 +12122,7 @@
           <a:lstStyle xmlns:a="http://schemas.openxmlformats.org/drawingml/2006/main"/>
           <a:p xmlns:a="http://schemas.openxmlformats.org/drawingml/2006/main">
             <a:pPr algn="l">
+              <a:buNone/>
               <a:defRPr sz="2400" b="1">
                 <a:solidFill>
                   <a:srgbClr val="80ED99"/>
@@ -13844,6 +12180,7 @@
           <a:lstStyle xmlns:a="http://schemas.openxmlformats.org/drawingml/2006/main"/>
           <a:p xmlns:a="http://schemas.openxmlformats.org/drawingml/2006/main">
             <a:pPr algn="l">
+              <a:buNone/>
               <a:defRPr sz="2025" b="0">
                 <a:solidFill>
                   <a:srgbClr val="F4F7FB"/>
@@ -13862,7 +12199,7 @@
                 <a:ea typeface="DejaVu Sans"/>
                 <a:cs typeface="DejaVu Sans"/>
               </a:rPr>
-              <a:t>2. Выбрать метод по CV на остальных группах</a:t>
+              <a:t>2. Подобрать alpha по групповой CV на прежних</a:t>
             </a:r>
           </a:p>
         </p:txBody>
@@ -13931,6 +12268,7 @@
           <a:lstStyle xmlns:a="http://schemas.openxmlformats.org/drawingml/2006/main"/>
           <a:p xmlns:a="http://schemas.openxmlformats.org/drawingml/2006/main">
             <a:pPr algn="l">
+              <a:buNone/>
               <a:defRPr sz="2400" b="1">
                 <a:solidFill>
                   <a:srgbClr val="C4A7FF"/>
@@ -13988,6 +12326,7 @@
           <a:lstStyle xmlns:a="http://schemas.openxmlformats.org/drawingml/2006/main"/>
           <a:p xmlns:a="http://schemas.openxmlformats.org/drawingml/2006/main">
             <a:pPr algn="l">
+              <a:buNone/>
               <a:defRPr sz="2025" b="0">
                 <a:solidFill>
                   <a:srgbClr val="F4F7FB"/>
@@ -14006,7 +12345,7 @@
                 <a:ea typeface="DejaVu Sans"/>
                 <a:cs typeface="DejaVu Sans"/>
               </a:rPr>
-              <a:t>3. Обучить на разработке и оценить на тесте</a:t>
+              <a:t>3. Обучить на разработке и открыть тест один раз</a:t>
             </a:r>
           </a:p>
         </p:txBody>
@@ -14107,6 +12446,7 @@
           <a:lstStyle xmlns:a="http://schemas.openxmlformats.org/drawingml/2006/main"/>
           <a:p xmlns:a="http://schemas.openxmlformats.org/drawingml/2006/main">
             <a:pPr algn="ctr">
+              <a:buNone/>
               <a:defRPr sz="1500" b="1">
                 <a:solidFill>
                   <a:srgbClr val="48CAE4"/>
@@ -14125,7 +12465,7 @@
                 <a:ea typeface="DejaVu Sans"/>
                 <a:cs typeface="DejaVu Sans"/>
               </a:rPr>
-              <a:t>Тест не служит источником новых гиперпараметров</a:t>
+              <a:t>best_score_ после подбора не финальная оценка</a:t>
             </a:r>
           </a:p>
         </p:txBody>
@@ -14246,6 +12586,7 @@
           <a:lstStyle xmlns:a="http://schemas.openxmlformats.org/drawingml/2006/main"/>
           <a:p xmlns:a="http://schemas.openxmlformats.org/drawingml/2006/main">
             <a:pPr algn="l">
+              <a:buNone/>
               <a:defRPr sz="1050" b="1">
                 <a:solidFill>
                   <a:srgbClr val="48CAE4"/>
@@ -14264,7 +12605,7 @@
                 <a:ea typeface="DejaVu Sans"/>
                 <a:cs typeface="DejaVu Sans"/>
               </a:rPr>
-              <a:t>ТРИ ОПОРНЫХ ПУНКТА</a:t>
+              <a:t>СХЕМА ПРОВЕРКИ</a:t>
             </a:r>
           </a:p>
         </p:txBody>
@@ -14303,6 +12644,7 @@
           <a:lstStyle xmlns:a="http://schemas.openxmlformats.org/drawingml/2006/main"/>
           <a:p xmlns:a="http://schemas.openxmlformats.org/drawingml/2006/main">
             <a:pPr algn="l">
+              <a:buNone/>
               <a:defRPr sz="2925" b="1">
                 <a:solidFill>
                   <a:srgbClr val="F4F7FB"/>
@@ -14321,7 +12663,7 @@
                 <a:ea typeface="DejaVu Sans"/>
                 <a:cs typeface="DejaVu Sans"/>
               </a:rPr>
-              <a:t>Pipeline: масштаб и модель</a:t>
+              <a:t>Из чего состоит Pipeline</a:t>
             </a:r>
           </a:p>
         </p:txBody>
@@ -14390,6 +12732,7 @@
           <a:lstStyle xmlns:a="http://schemas.openxmlformats.org/drawingml/2006/main"/>
           <a:p xmlns:a="http://schemas.openxmlformats.org/drawingml/2006/main">
             <a:pPr algn="l">
+              <a:buNone/>
               <a:defRPr sz="825" b="1">
                 <a:solidFill>
                   <a:srgbClr val="A6B7C9"/>
@@ -14447,6 +12790,7 @@
           <a:lstStyle xmlns:a="http://schemas.openxmlformats.org/drawingml/2006/main"/>
           <a:p xmlns:a="http://schemas.openxmlformats.org/drawingml/2006/main">
             <a:pPr algn="r">
+              <a:buNone/>
               <a:defRPr sz="900" b="0">
                 <a:solidFill>
                   <a:srgbClr val="A6B7C9"/>
@@ -14566,6 +12910,7 @@
           <a:lstStyle xmlns:a="http://schemas.openxmlformats.org/drawingml/2006/main"/>
           <a:p xmlns:a="http://schemas.openxmlformats.org/drawingml/2006/main">
             <a:pPr algn="l">
+              <a:buNone/>
               <a:defRPr sz="2850" b="1">
                 <a:solidFill>
                   <a:srgbClr val="48CAE4"/>
@@ -14623,6 +12968,7 @@
           <a:lstStyle xmlns:a="http://schemas.openxmlformats.org/drawingml/2006/main"/>
           <a:p xmlns:a="http://schemas.openxmlformats.org/drawingml/2006/main">
             <a:pPr algn="l">
+              <a:buNone/>
               <a:defRPr sz="2025" b="1">
                 <a:solidFill>
                   <a:srgbClr val="F4F7FB"/>
@@ -14641,7 +12987,7 @@
                 <a:ea typeface="DejaVu Sans"/>
                 <a:cs typeface="DejaVu Sans"/>
               </a:rPr>
-              <a:t>SimpleImputer заменяет пропуски по train</a:t>
+              <a:t>Числа: пропуски и масштаб</a:t>
             </a:r>
           </a:p>
         </p:txBody>
@@ -14742,6 +13088,7 @@
           <a:lstStyle xmlns:a="http://schemas.openxmlformats.org/drawingml/2006/main"/>
           <a:p xmlns:a="http://schemas.openxmlformats.org/drawingml/2006/main">
             <a:pPr algn="l">
+              <a:buNone/>
               <a:defRPr sz="2850" b="1">
                 <a:solidFill>
                   <a:srgbClr val="80ED99"/>
@@ -14799,6 +13146,7 @@
           <a:lstStyle xmlns:a="http://schemas.openxmlformats.org/drawingml/2006/main"/>
           <a:p xmlns:a="http://schemas.openxmlformats.org/drawingml/2006/main">
             <a:pPr algn="l">
+              <a:buNone/>
               <a:defRPr sz="2025" b="0">
                 <a:solidFill>
                   <a:srgbClr val="F4F7FB"/>
@@ -14817,7 +13165,7 @@
                 <a:ea typeface="DejaVu Sans"/>
                 <a:cs typeface="DejaVu Sans"/>
               </a:rPr>
-              <a:t>StandardScaler оценивает среднее и масштаб по train</a:t>
+              <a:t>Масло: кодирование категорий</a:t>
             </a:r>
           </a:p>
         </p:txBody>
@@ -14918,6 +13266,7 @@
           <a:lstStyle xmlns:a="http://schemas.openxmlformats.org/drawingml/2006/main"/>
           <a:p xmlns:a="http://schemas.openxmlformats.org/drawingml/2006/main">
             <a:pPr algn="l">
+              <a:buNone/>
               <a:defRPr sz="2850" b="1">
                 <a:solidFill>
                   <a:srgbClr val="C4A7FF"/>
@@ -14975,6 +13324,7 @@
           <a:lstStyle xmlns:a="http://schemas.openxmlformats.org/drawingml/2006/main"/>
           <a:p xmlns:a="http://schemas.openxmlformats.org/drawingml/2006/main">
             <a:pPr algn="l">
+              <a:buNone/>
               <a:defRPr sz="2025" b="0">
                 <a:solidFill>
                   <a:srgbClr val="F4F7FB"/>
@@ -14993,7 +13343,7 @@
                 <a:ea typeface="DejaVu Sans"/>
                 <a:cs typeface="DejaVu Sans"/>
               </a:rPr>
-              <a:t>Ridge обучается на преобразованных признаках</a:t>
+              <a:t>Ridge: alpha = 0,1; 1; 10; 100</a:t>
             </a:r>
           </a:p>
         </p:txBody>
@@ -15064,6 +13414,7 @@
           <a:lstStyle xmlns:a="http://schemas.openxmlformats.org/drawingml/2006/main"/>
           <a:p xmlns:a="http://schemas.openxmlformats.org/drawingml/2006/main">
             <a:pPr algn="ctr">
+              <a:buNone/>
               <a:defRPr sz="1500" b="1">
                 <a:solidFill>
                   <a:srgbClr val="48CAE4"/>
@@ -15082,7 +13433,7 @@
                 <a:ea typeface="DejaVu Sans"/>
                 <a:cs typeface="DejaVu Sans"/>
               </a:rPr>
-              <a:t>На тесте используются сохранённые параметры преобразований</a:t>
+              <a:t>GridSearchCV обучает весь конвейер в каждой складке</a:t>
             </a:r>
           </a:p>
         </p:txBody>
@@ -15203,6 +13554,7 @@
           <a:lstStyle xmlns:a="http://schemas.openxmlformats.org/drawingml/2006/main"/>
           <a:p xmlns:a="http://schemas.openxmlformats.org/drawingml/2006/main">
             <a:pPr algn="l">
+              <a:buNone/>
               <a:defRPr sz="1050" b="1">
                 <a:solidFill>
                   <a:srgbClr val="48CAE4"/>
@@ -15221,7 +13573,7 @@
                 <a:ea typeface="DejaVu Sans"/>
                 <a:cs typeface="DejaVu Sans"/>
               </a:rPr>
-              <a:t>ПРОВЕРКА И ИНТЕРПРЕТАЦИЯ</a:t>
+              <a:t>ОШИБКА И НЕОПРЕДЕЛЁННОСТЬ</a:t>
             </a:r>
           </a:p>
         </p:txBody>
@@ -15260,6 +13612,7 @@
           <a:lstStyle xmlns:a="http://schemas.openxmlformats.org/drawingml/2006/main"/>
           <a:p xmlns:a="http://schemas.openxmlformats.org/drawingml/2006/main">
             <a:pPr algn="l">
+              <a:buNone/>
               <a:defRPr sz="2925" b="1">
                 <a:solidFill>
                   <a:srgbClr val="F4F7FB"/>
@@ -15278,7 +13631,7 @@
                 <a:ea typeface="DejaVu Sans"/>
                 <a:cs typeface="DejaVu Sans"/>
               </a:rPr>
-              <a:t>Модель ошибается в физических единицах</a:t>
+              <a:t>Ручной расчёт MAE</a:t>
             </a:r>
           </a:p>
         </p:txBody>
@@ -15347,6 +13700,7 @@
           <a:lstStyle xmlns:a="http://schemas.openxmlformats.org/drawingml/2006/main"/>
           <a:p xmlns:a="http://schemas.openxmlformats.org/drawingml/2006/main">
             <a:pPr algn="l">
+              <a:buNone/>
               <a:defRPr sz="825" b="1">
                 <a:solidFill>
                   <a:srgbClr val="A6B7C9"/>
@@ -15404,6 +13758,7 @@
           <a:lstStyle xmlns:a="http://schemas.openxmlformats.org/drawingml/2006/main"/>
           <a:p xmlns:a="http://schemas.openxmlformats.org/drawingml/2006/main">
             <a:pPr algn="r">
+              <a:buNone/>
               <a:defRPr sz="900" b="0">
                 <a:solidFill>
                   <a:srgbClr val="A6B7C9"/>
@@ -15491,6 +13846,7 @@
           <a:lstStyle xmlns:a="http://schemas.openxmlformats.org/drawingml/2006/main"/>
           <a:p xmlns:a="http://schemas.openxmlformats.org/drawingml/2006/main">
             <a:pPr algn="l">
+              <a:buNone/>
               <a:defRPr sz="1800" b="1">
                 <a:solidFill>
                   <a:srgbClr val="F4F7FB"/>
@@ -15509,7 +13865,7 @@
                 <a:ea typeface="DejaVu Sans"/>
                 <a:cs typeface="DejaVu Sans"/>
               </a:rPr>
-              <a:t>MAE = средняя абсолютная ошибка, здесь нм</a:t>
+              <a:t>Baseline: (17 + 3 + 12 + 28) / 4 = 15 нм</a:t>
             </a:r>
           </a:p>
         </p:txBody>
@@ -15578,6 +13934,7 @@
           <a:lstStyle xmlns:a="http://schemas.openxmlformats.org/drawingml/2006/main"/>
           <a:p xmlns:a="http://schemas.openxmlformats.org/drawingml/2006/main">
             <a:pPr algn="l">
+              <a:buNone/>
               <a:defRPr sz="1800" b="0">
                 <a:solidFill>
                   <a:srgbClr val="F4F7FB"/>
@@ -15596,7 +13953,7 @@
                 <a:ea typeface="DejaVu Sans"/>
                 <a:cs typeface="DejaVu Sans"/>
               </a:rPr>
-              <a:t>RMSE сильнее штрафует большие промахи</a:t>
+              <a:t>Модель: (4 + 4 + 7 + 7) / 4 = 5,5 нм</a:t>
             </a:r>
           </a:p>
         </p:txBody>
@@ -15665,6 +14022,7 @@
           <a:lstStyle xmlns:a="http://schemas.openxmlformats.org/drawingml/2006/main"/>
           <a:p xmlns:a="http://schemas.openxmlformats.org/drawingml/2006/main">
             <a:pPr algn="l">
+              <a:buNone/>
               <a:defRPr sz="1800" b="0">
                 <a:solidFill>
                   <a:srgbClr val="F4F7FB"/>
@@ -15683,7 +14041,7 @@
                 <a:ea typeface="DejaVu Sans"/>
                 <a:cs typeface="DejaVu Sans"/>
               </a:rPr>
-              <a:t>Порог полезности задают относительно решения и точности измерения</a:t>
+              <a:t>Четыре условные партии не оценивают редкие промахи</a:t>
             </a:r>
           </a:p>
         </p:txBody>
@@ -16024,6 +14382,7 @@
           <a:lstStyle xmlns:a="http://schemas.openxmlformats.org/drawingml/2006/main"/>
           <a:p xmlns:a="http://schemas.openxmlformats.org/drawingml/2006/main">
             <a:pPr algn="ctr">
+              <a:buNone/>
               <a:defRPr sz="1125" b="1">
                 <a:solidFill>
                   <a:srgbClr val="A6B7C9"/>
@@ -16081,6 +14440,7 @@
           <a:lstStyle xmlns:a="http://schemas.openxmlformats.org/drawingml/2006/main"/>
           <a:p xmlns:a="http://schemas.openxmlformats.org/drawingml/2006/main">
             <a:pPr algn="ctr">
+              <a:buNone/>
               <a:defRPr sz="1425" b="1">
                 <a:solidFill>
                   <a:srgbClr val="48CAE4"/>
@@ -16099,7 +14459,7 @@
                 <a:ea typeface="DejaVu Sans"/>
                 <a:cs typeface="DejaVu Sans"/>
               </a:rPr>
-              <a:t>y и ŷ</a:t>
+              <a:t>ŷ и y</a:t>
             </a:r>
           </a:p>
         </p:txBody>
@@ -16220,6 +14580,7 @@
           <a:lstStyle xmlns:a="http://schemas.openxmlformats.org/drawingml/2006/main"/>
           <a:p xmlns:a="http://schemas.openxmlformats.org/drawingml/2006/main">
             <a:pPr algn="l">
+              <a:buNone/>
               <a:defRPr sz="1050" b="1">
                 <a:solidFill>
                   <a:srgbClr val="48CAE4"/>
@@ -16238,7 +14599,7 @@
                 <a:ea typeface="DejaVu Sans"/>
                 <a:cs typeface="DejaVu Sans"/>
               </a:rPr>
-              <a:t>ПОСТАНОВКА И МЕТОД</a:t>
+              <a:t>ПОСТАНОВКА</a:t>
             </a:r>
           </a:p>
         </p:txBody>
@@ -16277,6 +14638,7 @@
           <a:lstStyle xmlns:a="http://schemas.openxmlformats.org/drawingml/2006/main"/>
           <a:p xmlns:a="http://schemas.openxmlformats.org/drawingml/2006/main">
             <a:pPr algn="l">
+              <a:buNone/>
               <a:defRPr sz="2925" b="1">
                 <a:solidFill>
                   <a:srgbClr val="F4F7FB"/>
@@ -16295,7 +14657,7 @@
                 <a:ea typeface="DejaVu Sans"/>
                 <a:cs typeface="DejaVu Sans"/>
               </a:rPr>
-              <a:t>Задача предшествует алгоритму</a:t>
+              <a:t>Контракт прогноза новой партии</a:t>
             </a:r>
           </a:p>
         </p:txBody>
@@ -16364,6 +14726,7 @@
           <a:lstStyle xmlns:a="http://schemas.openxmlformats.org/drawingml/2006/main"/>
           <a:p xmlns:a="http://schemas.openxmlformats.org/drawingml/2006/main">
             <a:pPr algn="l">
+              <a:buNone/>
               <a:defRPr sz="825" b="1">
                 <a:solidFill>
                   <a:srgbClr val="A6B7C9"/>
@@ -16421,6 +14784,7 @@
           <a:lstStyle xmlns:a="http://schemas.openxmlformats.org/drawingml/2006/main"/>
           <a:p xmlns:a="http://schemas.openxmlformats.org/drawingml/2006/main">
             <a:pPr algn="r">
+              <a:buNone/>
               <a:defRPr sz="900" b="0">
                 <a:solidFill>
                   <a:srgbClr val="A6B7C9"/>
@@ -16478,6 +14842,7 @@
           <a:lstStyle xmlns:a="http://schemas.openxmlformats.org/drawingml/2006/main"/>
           <a:p xmlns:a="http://schemas.openxmlformats.org/drawingml/2006/main">
             <a:pPr algn="l">
+              <a:buNone/>
               <a:defRPr sz="2400" b="1">
                 <a:solidFill>
                   <a:srgbClr val="48CAE4"/>
@@ -16535,6 +14900,7 @@
           <a:lstStyle xmlns:a="http://schemas.openxmlformats.org/drawingml/2006/main"/>
           <a:p xmlns:a="http://schemas.openxmlformats.org/drawingml/2006/main">
             <a:pPr algn="l">
+              <a:buNone/>
               <a:defRPr sz="2025" b="1">
                 <a:solidFill>
                   <a:srgbClr val="F4F7FB"/>
@@ -16553,7 +14919,7 @@
                 <a:ea typeface="DejaVu Sans"/>
                 <a:cs typeface="DejaVu Sans"/>
               </a:rPr>
-              <a:t>Решение: выбрать условия следующей партии</a:t>
+              <a:t>Решение: выбрать рецепт до приготовления</a:t>
             </a:r>
           </a:p>
         </p:txBody>
@@ -16622,6 +14988,7 @@
           <a:lstStyle xmlns:a="http://schemas.openxmlformats.org/drawingml/2006/main"/>
           <a:p xmlns:a="http://schemas.openxmlformats.org/drawingml/2006/main">
             <a:pPr algn="l">
+              <a:buNone/>
               <a:defRPr sz="2400" b="1">
                 <a:solidFill>
                   <a:srgbClr val="80ED99"/>
@@ -16679,6 +15046,7 @@
           <a:lstStyle xmlns:a="http://schemas.openxmlformats.org/drawingml/2006/main"/>
           <a:p xmlns:a="http://schemas.openxmlformats.org/drawingml/2006/main">
             <a:pPr algn="l">
+              <a:buNone/>
               <a:defRPr sz="2025" b="0">
                 <a:solidFill>
                   <a:srgbClr val="F4F7FB"/>
@@ -16697,7 +15065,7 @@
                 <a:ea typeface="DejaVu Sans"/>
                 <a:cs typeface="DejaVu Sans"/>
               </a:rPr>
-              <a:t>Цель: размер частиц в нм по заранее заданному методу</a:t>
+              <a:t>Цель: средний диаметр трёх отсчётов, нм</a:t>
             </a:r>
           </a:p>
         </p:txBody>
@@ -16766,6 +15134,7 @@
           <a:lstStyle xmlns:a="http://schemas.openxmlformats.org/drawingml/2006/main"/>
           <a:p xmlns:a="http://schemas.openxmlformats.org/drawingml/2006/main">
             <a:pPr algn="l">
+              <a:buNone/>
               <a:defRPr sz="2400" b="1">
                 <a:solidFill>
                   <a:srgbClr val="C4A7FF"/>
@@ -16823,6 +15192,7 @@
           <a:lstStyle xmlns:a="http://schemas.openxmlformats.org/drawingml/2006/main"/>
           <a:p xmlns:a="http://schemas.openxmlformats.org/drawingml/2006/main">
             <a:pPr algn="l">
+              <a:buNone/>
               <a:defRPr sz="2025" b="0">
                 <a:solidFill>
                   <a:srgbClr val="F4F7FB"/>
@@ -16841,7 +15211,7 @@
                 <a:ea typeface="DejaVu Sans"/>
                 <a:cs typeface="DejaVu Sans"/>
               </a:rPr>
-              <a:t>Входы: рецепт и настройки, известные до синтеза</a:t>
+              <a:t>Будущее: новый день, тот же прибор и диапазон</a:t>
             </a:r>
           </a:p>
         </p:txBody>
@@ -16942,6 +15312,7 @@
           <a:lstStyle xmlns:a="http://schemas.openxmlformats.org/drawingml/2006/main"/>
           <a:p xmlns:a="http://schemas.openxmlformats.org/drawingml/2006/main">
             <a:pPr algn="ctr">
+              <a:buNone/>
               <a:defRPr sz="1500" b="1">
                 <a:solidFill>
                   <a:srgbClr val="48CAE4"/>
@@ -16960,7 +15331,7 @@
                 <a:ea typeface="DejaVu Sans"/>
                 <a:cs typeface="DejaVu Sans"/>
               </a:rPr>
-              <a:t>Момент прогноза определяет допустимые признаки</a:t>
+              <a:t>Фиксируем решение, цель и новизну до просмотра метрик</a:t>
             </a:r>
           </a:p>
         </p:txBody>
@@ -17081,6 +15452,7 @@
           <a:lstStyle xmlns:a="http://schemas.openxmlformats.org/drawingml/2006/main"/>
           <a:p xmlns:a="http://schemas.openxmlformats.org/drawingml/2006/main">
             <a:pPr algn="l">
+              <a:buNone/>
               <a:defRPr sz="1050" b="1">
                 <a:solidFill>
                   <a:srgbClr val="48CAE4"/>
@@ -17099,7 +15471,7 @@
                 <a:ea typeface="DejaVu Sans"/>
                 <a:cs typeface="DejaVu Sans"/>
               </a:rPr>
-              <a:t>ПРИМЕР И ПРИМЕНЕНИЕ</a:t>
+              <a:t>ОШИБКА И НЕОПРЕДЕЛЁННОСТЬ</a:t>
             </a:r>
           </a:p>
         </p:txBody>
@@ -17138,6 +15510,7 @@
           <a:lstStyle xmlns:a="http://schemas.openxmlformats.org/drawingml/2006/main"/>
           <a:p xmlns:a="http://schemas.openxmlformats.org/drawingml/2006/main">
             <a:pPr algn="l">
+              <a:buNone/>
               <a:defRPr sz="2925" b="1">
                 <a:solidFill>
                   <a:srgbClr val="F4F7FB"/>
@@ -17156,7 +15529,7 @@
                 <a:ea typeface="DejaVu Sans"/>
                 <a:cs typeface="DejaVu Sans"/>
               </a:rPr>
-              <a:t>R² не заменяет анализ ошибок</a:t>
+              <a:t>RMSE и смещение на тех же партиях</a:t>
             </a:r>
           </a:p>
         </p:txBody>
@@ -17225,6 +15598,7 @@
           <a:lstStyle xmlns:a="http://schemas.openxmlformats.org/drawingml/2006/main"/>
           <a:p xmlns:a="http://schemas.openxmlformats.org/drawingml/2006/main">
             <a:pPr algn="l">
+              <a:buNone/>
               <a:defRPr sz="825" b="1">
                 <a:solidFill>
                   <a:srgbClr val="A6B7C9"/>
@@ -17282,6 +15656,7 @@
           <a:lstStyle xmlns:a="http://schemas.openxmlformats.org/drawingml/2006/main"/>
           <a:p xmlns:a="http://schemas.openxmlformats.org/drawingml/2006/main">
             <a:pPr algn="r">
+              <a:buNone/>
               <a:defRPr sz="900" b="0">
                 <a:solidFill>
                   <a:srgbClr val="A6B7C9"/>
@@ -17401,6 +15776,7 @@
           <a:lstStyle xmlns:a="http://schemas.openxmlformats.org/drawingml/2006/main"/>
           <a:p xmlns:a="http://schemas.openxmlformats.org/drawingml/2006/main">
             <a:pPr algn="l">
+              <a:buNone/>
               <a:defRPr sz="2025" b="1">
                 <a:solidFill>
                   <a:srgbClr val="F4F7FB"/>
@@ -17419,7 +15795,7 @@
                 <a:ea typeface="DejaVu Sans"/>
                 <a:cs typeface="DejaVu Sans"/>
               </a:rPr>
-              <a:t>R² сравнивает с константным прогнозом</a:t>
+              <a:t>RMSE = √[(16 + 16 + 49 + 49) / 4]</a:t>
             </a:r>
           </a:p>
         </p:txBody>
@@ -17520,6 +15896,7 @@
           <a:lstStyle xmlns:a="http://schemas.openxmlformats.org/drawingml/2006/main"/>
           <a:p xmlns:a="http://schemas.openxmlformats.org/drawingml/2006/main">
             <a:pPr algn="l">
+              <a:buNone/>
               <a:defRPr sz="2025" b="0">
                 <a:solidFill>
                   <a:srgbClr val="F4F7FB"/>
@@ -17538,7 +15915,7 @@
                 <a:ea typeface="DejaVu Sans"/>
                 <a:cs typeface="DejaVu Sans"/>
               </a:rPr>
-              <a:t>На независимом тесте R² может стать отрицательным</a:t>
+              <a:t>Результат: около 5,70 нм</a:t>
             </a:r>
           </a:p>
         </p:txBody>
@@ -17639,6 +16016,7 @@
           <a:lstStyle xmlns:a="http://schemas.openxmlformats.org/drawingml/2006/main"/>
           <a:p xmlns:a="http://schemas.openxmlformats.org/drawingml/2006/main">
             <a:pPr algn="l">
+              <a:buNone/>
               <a:defRPr sz="2025" b="0">
                 <a:solidFill>
                   <a:srgbClr val="F4F7FB"/>
@@ -17657,7 +16035,7 @@
                 <a:ea typeface="DejaVu Sans"/>
                 <a:cs typeface="DejaVu Sans"/>
               </a:rPr>
-              <a:t>Даже высокий R² не исключает опасных промахов</a:t>
+              <a:t>Средняя ошибка ŷ − y = −3,5 нм</a:t>
             </a:r>
           </a:p>
         </p:txBody>
@@ -17728,6 +16106,7 @@
           <a:lstStyle xmlns:a="http://schemas.openxmlformats.org/drawingml/2006/main"/>
           <a:p xmlns:a="http://schemas.openxmlformats.org/drawingml/2006/main">
             <a:pPr algn="ctr">
+              <a:buNone/>
               <a:defRPr sz="1500" b="1">
                 <a:solidFill>
                   <a:srgbClr val="48CAE4"/>
@@ -17746,7 +16125,7 @@
                 <a:ea typeface="DejaVu Sans"/>
                 <a:cs typeface="DejaVu Sans"/>
               </a:rPr>
-              <a:t>Покажите остатки и ошибки по диапазонам</a:t>
+              <a:t>Отдельно проверьте край диапазона и порог</a:t>
             </a:r>
           </a:p>
         </p:txBody>
@@ -17867,6 +16246,7 @@
           <a:lstStyle xmlns:a="http://schemas.openxmlformats.org/drawingml/2006/main"/>
           <a:p xmlns:a="http://schemas.openxmlformats.org/drawingml/2006/main">
             <a:pPr algn="l">
+              <a:buNone/>
               <a:defRPr sz="1050" b="1">
                 <a:solidFill>
                   <a:srgbClr val="48CAE4"/>
@@ -17885,7 +16265,7 @@
                 <a:ea typeface="DejaVu Sans"/>
                 <a:cs typeface="DejaVu Sans"/>
               </a:rPr>
-              <a:t>ПРАКТИЧЕСКИЙ ВЫВОД</a:t>
+              <a:t>ОШИБКА И НЕОПРЕДЕЛЁННОСТЬ</a:t>
             </a:r>
           </a:p>
         </p:txBody>
@@ -17924,6 +16304,7 @@
           <a:lstStyle xmlns:a="http://schemas.openxmlformats.org/drawingml/2006/main"/>
           <a:p xmlns:a="http://schemas.openxmlformats.org/drawingml/2006/main">
             <a:pPr algn="l">
+              <a:buNone/>
               <a:defRPr sz="2925" b="1">
                 <a:solidFill>
                   <a:srgbClr val="F4F7FB"/>
@@ -17942,7 +16323,7 @@
                 <a:ea typeface="DejaVu Sans"/>
                 <a:cs typeface="DejaVu Sans"/>
               </a:rPr>
-              <a:t>Что рисовать рядом с метрикой</a:t>
+              <a:t>Графики дополняют среднюю ошибку</a:t>
             </a:r>
           </a:p>
         </p:txBody>
@@ -18011,6 +16392,7 @@
           <a:lstStyle xmlns:a="http://schemas.openxmlformats.org/drawingml/2006/main"/>
           <a:p xmlns:a="http://schemas.openxmlformats.org/drawingml/2006/main">
             <a:pPr algn="l">
+              <a:buNone/>
               <a:defRPr sz="825" b="1">
                 <a:solidFill>
                   <a:srgbClr val="A6B7C9"/>
@@ -18068,6 +16450,7 @@
           <a:lstStyle xmlns:a="http://schemas.openxmlformats.org/drawingml/2006/main"/>
           <a:p xmlns:a="http://schemas.openxmlformats.org/drawingml/2006/main">
             <a:pPr algn="r">
+              <a:buNone/>
               <a:defRPr sz="900" b="0">
                 <a:solidFill>
                   <a:srgbClr val="A6B7C9"/>
@@ -18125,6 +16508,7 @@
           <a:lstStyle xmlns:a="http://schemas.openxmlformats.org/drawingml/2006/main"/>
           <a:p xmlns:a="http://schemas.openxmlformats.org/drawingml/2006/main">
             <a:pPr algn="l">
+              <a:buNone/>
               <a:defRPr sz="3825" b="1">
                 <a:solidFill>
                   <a:srgbClr val="48CAE4"/>
@@ -18212,6 +16596,7 @@
           <a:lstStyle xmlns:a="http://schemas.openxmlformats.org/drawingml/2006/main"/>
           <a:p xmlns:a="http://schemas.openxmlformats.org/drawingml/2006/main">
             <a:pPr algn="l">
+              <a:buNone/>
               <a:defRPr sz="1875" b="1">
                 <a:solidFill>
                   <a:srgbClr val="F4F7FB"/>
@@ -18230,7 +16615,7 @@
                 <a:ea typeface="DejaVu Sans"/>
                 <a:cs typeface="DejaVu Sans"/>
               </a:rPr>
-              <a:t>Измерено против предсказано с линией равенства</a:t>
+              <a:t>Факт против прогноза: линия равенства</a:t>
             </a:r>
           </a:p>
         </p:txBody>
@@ -18269,6 +16654,7 @@
           <a:lstStyle xmlns:a="http://schemas.openxmlformats.org/drawingml/2006/main"/>
           <a:p xmlns:a="http://schemas.openxmlformats.org/drawingml/2006/main">
             <a:pPr algn="l">
+              <a:buNone/>
               <a:defRPr sz="3825" b="1">
                 <a:solidFill>
                   <a:srgbClr val="80ED99"/>
@@ -18356,6 +16742,7 @@
           <a:lstStyle xmlns:a="http://schemas.openxmlformats.org/drawingml/2006/main"/>
           <a:p xmlns:a="http://schemas.openxmlformats.org/drawingml/2006/main">
             <a:pPr algn="l">
+              <a:buNone/>
               <a:defRPr sz="1875" b="0">
                 <a:solidFill>
                   <a:srgbClr val="F4F7FB"/>
@@ -18374,7 +16761,7 @@
                 <a:ea typeface="DejaVu Sans"/>
                 <a:cs typeface="DejaVu Sans"/>
               </a:rPr>
-              <a:t>Остаток против прогноза и факторов синтеза</a:t>
+              <a:t>Подписанная ошибка против условий синтеза</a:t>
             </a:r>
           </a:p>
         </p:txBody>
@@ -18413,6 +16800,7 @@
           <a:lstStyle xmlns:a="http://schemas.openxmlformats.org/drawingml/2006/main"/>
           <a:p xmlns:a="http://schemas.openxmlformats.org/drawingml/2006/main">
             <a:pPr algn="l">
+              <a:buNone/>
               <a:defRPr sz="3825" b="1">
                 <a:solidFill>
                   <a:srgbClr val="C4A7FF"/>
@@ -18500,6 +16888,7 @@
           <a:lstStyle xmlns:a="http://schemas.openxmlformats.org/drawingml/2006/main"/>
           <a:p xmlns:a="http://schemas.openxmlformats.org/drawingml/2006/main">
             <a:pPr algn="l">
+              <a:buNone/>
               <a:defRPr sz="1875" b="0">
                 <a:solidFill>
                   <a:srgbClr val="F4F7FB"/>
@@ -18518,7 +16907,7 @@
                 <a:ea typeface="DejaVu Sans"/>
                 <a:cs typeface="DejaVu Sans"/>
               </a:rPr>
-              <a:t>Ошибки по партиям, прибору и диапазону</a:t>
+              <a:t>Ошибки отдельно для дня 10 и дня 11</a:t>
             </a:r>
           </a:p>
         </p:txBody>
@@ -18589,6 +16978,7 @@
           <a:lstStyle xmlns:a="http://schemas.openxmlformats.org/drawingml/2006/main"/>
           <a:p xmlns:a="http://schemas.openxmlformats.org/drawingml/2006/main">
             <a:pPr algn="ctr">
+              <a:buNone/>
               <a:defRPr sz="1500" b="1">
                 <a:solidFill>
                   <a:srgbClr val="48CAE4"/>
@@ -18607,7 +16997,7 @@
                 <a:ea typeface="DejaVu Sans"/>
                 <a:cs typeface="DejaVu Sans"/>
               </a:rPr>
-              <a:t>Систематический сдвиг виден на графике лучше, чем в среднем MAE</a:t>
+              <a:t>Общий MAE может скрыть сдвиг одного дня</a:t>
             </a:r>
           </a:p>
         </p:txBody>
@@ -18728,6 +17118,7 @@
           <a:lstStyle xmlns:a="http://schemas.openxmlformats.org/drawingml/2006/main"/>
           <a:p xmlns:a="http://schemas.openxmlformats.org/drawingml/2006/main">
             <a:pPr algn="l">
+              <a:buNone/>
               <a:defRPr sz="1050" b="1">
                 <a:solidFill>
                   <a:srgbClr val="48CAE4"/>
@@ -18746,7 +17137,7 @@
                 <a:ea typeface="DejaVu Sans"/>
                 <a:cs typeface="DejaVu Sans"/>
               </a:rPr>
-              <a:t>ПОСТАНОВКА И МЕТОД</a:t>
+              <a:t>ОШИБКА И НЕОПРЕДЕЛЁННОСТЬ</a:t>
             </a:r>
           </a:p>
         </p:txBody>
@@ -18785,6 +17176,7 @@
           <a:lstStyle xmlns:a="http://schemas.openxmlformats.org/drawingml/2006/main"/>
           <a:p xmlns:a="http://schemas.openxmlformats.org/drawingml/2006/main">
             <a:pPr algn="l">
+              <a:buNone/>
               <a:defRPr sz="2925" b="1">
                 <a:solidFill>
                   <a:srgbClr val="F4F7FB"/>
@@ -18803,7 +17195,7 @@
                 <a:ea typeface="DejaVu Sans"/>
                 <a:cs typeface="DejaVu Sans"/>
               </a:rPr>
-              <a:t>Повторы и неопределённость метрики</a:t>
+              <a:t>Что именно усредняется</a:t>
             </a:r>
           </a:p>
         </p:txBody>
@@ -18872,6 +17264,7 @@
           <a:lstStyle xmlns:a="http://schemas.openxmlformats.org/drawingml/2006/main"/>
           <a:p xmlns:a="http://schemas.openxmlformats.org/drawingml/2006/main">
             <a:pPr algn="l">
+              <a:buNone/>
               <a:defRPr sz="825" b="1">
                 <a:solidFill>
                   <a:srgbClr val="A6B7C9"/>
@@ -18929,6 +17322,7 @@
           <a:lstStyle xmlns:a="http://schemas.openxmlformats.org/drawingml/2006/main"/>
           <a:p xmlns:a="http://schemas.openxmlformats.org/drawingml/2006/main">
             <a:pPr algn="r">
+              <a:buNone/>
               <a:defRPr sz="900" b="0">
                 <a:solidFill>
                   <a:srgbClr val="A6B7C9"/>
@@ -18986,6 +17380,7 @@
           <a:lstStyle xmlns:a="http://schemas.openxmlformats.org/drawingml/2006/main"/>
           <a:p xmlns:a="http://schemas.openxmlformats.org/drawingml/2006/main">
             <a:pPr algn="l">
+              <a:buNone/>
               <a:defRPr sz="2400" b="1">
                 <a:solidFill>
                   <a:srgbClr val="48CAE4"/>
@@ -19043,6 +17438,7 @@
           <a:lstStyle xmlns:a="http://schemas.openxmlformats.org/drawingml/2006/main"/>
           <a:p xmlns:a="http://schemas.openxmlformats.org/drawingml/2006/main">
             <a:pPr algn="l">
+              <a:buNone/>
               <a:defRPr sz="2025" b="1">
                 <a:solidFill>
                   <a:srgbClr val="F4F7FB"/>
@@ -19061,7 +17457,7 @@
                 <a:ea typeface="DejaVu Sans"/>
                 <a:cs typeface="DejaVu Sans"/>
               </a:rPr>
-              <a:t>Соседние поля зрения коррелированы</a:t>
+              <a:t>MAE по партиям взвешивает каждую партию</a:t>
             </a:r>
           </a:p>
         </p:txBody>
@@ -19130,6 +17526,7 @@
           <a:lstStyle xmlns:a="http://schemas.openxmlformats.org/drawingml/2006/main"/>
           <a:p xmlns:a="http://schemas.openxmlformats.org/drawingml/2006/main">
             <a:pPr algn="l">
+              <a:buNone/>
               <a:defRPr sz="2400" b="1">
                 <a:solidFill>
                   <a:srgbClr val="80ED99"/>
@@ -19187,6 +17584,7 @@
           <a:lstStyle xmlns:a="http://schemas.openxmlformats.org/drawingml/2006/main"/>
           <a:p xmlns:a="http://schemas.openxmlformats.org/drawingml/2006/main">
             <a:pPr algn="l">
+              <a:buNone/>
               <a:defRPr sz="2025" b="0">
                 <a:solidFill>
                   <a:srgbClr val="F4F7FB"/>
@@ -19205,7 +17603,7 @@
                 <a:ea typeface="DejaVu Sans"/>
                 <a:cs typeface="DejaVu Sans"/>
               </a:rPr>
-              <a:t>Пересэмплировать надо независимые группы</a:t>
+              <a:t>Среднее MAE по дням взвешивает каждый день</a:t>
             </a:r>
           </a:p>
         </p:txBody>
@@ -19274,6 +17672,7 @@
           <a:lstStyle xmlns:a="http://schemas.openxmlformats.org/drawingml/2006/main"/>
           <a:p xmlns:a="http://schemas.openxmlformats.org/drawingml/2006/main">
             <a:pPr algn="l">
+              <a:buNone/>
               <a:defRPr sz="2400" b="1">
                 <a:solidFill>
                   <a:srgbClr val="C4A7FF"/>
@@ -19331,6 +17730,7 @@
           <a:lstStyle xmlns:a="http://schemas.openxmlformats.org/drawingml/2006/main"/>
           <a:p xmlns:a="http://schemas.openxmlformats.org/drawingml/2006/main">
             <a:pPr algn="l">
+              <a:buNone/>
               <a:defRPr sz="2025" b="0">
                 <a:solidFill>
                   <a:srgbClr val="F4F7FB"/>
@@ -19349,7 +17749,7 @@
                 <a:ea typeface="DejaVu Sans"/>
                 <a:cs typeface="DejaVu Sans"/>
               </a:rPr>
-              <a:t>Малое число партий даёт широкий разброс качества</a:t>
+              <a:t>Неопределённость оценивают по независимым дням</a:t>
             </a:r>
           </a:p>
         </p:txBody>
@@ -19450,6 +17850,7 @@
           <a:lstStyle xmlns:a="http://schemas.openxmlformats.org/drawingml/2006/main"/>
           <a:p xmlns:a="http://schemas.openxmlformats.org/drawingml/2006/main">
             <a:pPr algn="ctr">
+              <a:buNone/>
               <a:defRPr sz="1500" b="1">
                 <a:solidFill>
                   <a:srgbClr val="48CAE4"/>
@@ -19468,7 +17869,7 @@
                 <a:ea typeface="DejaVu Sans"/>
                 <a:cs typeface="DejaVu Sans"/>
               </a:rPr>
-              <a:t>Укажите n партий рядом с любой оценкой точности</a:t>
+              <a:t>Два тестовых дня не дают точного интервала</a:t>
             </a:r>
           </a:p>
         </p:txBody>
@@ -19589,6 +17990,7 @@
           <a:lstStyle xmlns:a="http://schemas.openxmlformats.org/drawingml/2006/main"/>
           <a:p xmlns:a="http://schemas.openxmlformats.org/drawingml/2006/main">
             <a:pPr algn="l">
+              <a:buNone/>
               <a:defRPr sz="1050" b="1">
                 <a:solidFill>
                   <a:srgbClr val="48CAE4"/>
@@ -19607,7 +18009,7 @@
                 <a:ea typeface="DejaVu Sans"/>
                 <a:cs typeface="DejaVu Sans"/>
               </a:rPr>
-              <a:t>ТРИ ОПОРНЫХ ПУНКТА</a:t>
+              <a:t>ОШИБКА И НЕОПРЕДЕЛЁННОСТЬ</a:t>
             </a:r>
           </a:p>
         </p:txBody>
@@ -19641,11 +18043,12 @@
         </p:spPr>
         <p:txBody>
           <a:bodyPr xmlns:a="http://schemas.openxmlformats.org/drawingml/2006/main">
-            <a:normAutofit fontScale="98399"/>
+            <a:normAutofit fontScale="100000"/>
           </a:bodyPr>
           <a:lstStyle xmlns:a="http://schemas.openxmlformats.org/drawingml/2006/main"/>
           <a:p xmlns:a="http://schemas.openxmlformats.org/drawingml/2006/main">
             <a:pPr algn="l">
+              <a:buNone/>
               <a:defRPr sz="2925" b="1">
                 <a:solidFill>
                   <a:srgbClr val="F4F7FB"/>
@@ -19664,7 +18067,7 @@
                 <a:ea typeface="DejaVu Sans"/>
                 <a:cs typeface="DejaVu Sans"/>
               </a:rPr>
-              <a:t>Классификация: что такое положительный класс</a:t>
+              <a:t>Интервалы имеют разный смысл</a:t>
             </a:r>
           </a:p>
         </p:txBody>
@@ -19733,6 +18136,7 @@
           <a:lstStyle xmlns:a="http://schemas.openxmlformats.org/drawingml/2006/main"/>
           <a:p xmlns:a="http://schemas.openxmlformats.org/drawingml/2006/main">
             <a:pPr algn="l">
+              <a:buNone/>
               <a:defRPr sz="825" b="1">
                 <a:solidFill>
                   <a:srgbClr val="A6B7C9"/>
@@ -19790,6 +18194,7 @@
           <a:lstStyle xmlns:a="http://schemas.openxmlformats.org/drawingml/2006/main"/>
           <a:p xmlns:a="http://schemas.openxmlformats.org/drawingml/2006/main">
             <a:pPr algn="r">
+              <a:buNone/>
               <a:defRPr sz="900" b="0">
                 <a:solidFill>
                   <a:srgbClr val="A6B7C9"/>
@@ -19909,6 +18314,7 @@
           <a:lstStyle xmlns:a="http://schemas.openxmlformats.org/drawingml/2006/main"/>
           <a:p xmlns:a="http://schemas.openxmlformats.org/drawingml/2006/main">
             <a:pPr algn="l">
+              <a:buNone/>
               <a:defRPr sz="2850" b="1">
                 <a:solidFill>
                   <a:srgbClr val="48CAE4"/>
@@ -19966,6 +18372,7 @@
           <a:lstStyle xmlns:a="http://schemas.openxmlformats.org/drawingml/2006/main"/>
           <a:p xmlns:a="http://schemas.openxmlformats.org/drawingml/2006/main">
             <a:pPr algn="l">
+              <a:buNone/>
               <a:defRPr sz="2025" b="1">
                 <a:solidFill>
                   <a:srgbClr val="F4F7FB"/>
@@ -19984,7 +18391,7 @@
                 <a:ea typeface="DejaVu Sans"/>
                 <a:cs typeface="DejaVu Sans"/>
               </a:rPr>
-              <a:t>Категория определяется отдельным эталонным тестом</a:t>
+              <a:t>SD измерений: повторяемость внутри партии</a:t>
             </a:r>
           </a:p>
         </p:txBody>
@@ -20085,6 +18492,7 @@
           <a:lstStyle xmlns:a="http://schemas.openxmlformats.org/drawingml/2006/main"/>
           <a:p xmlns:a="http://schemas.openxmlformats.org/drawingml/2006/main">
             <a:pPr algn="l">
+              <a:buNone/>
               <a:defRPr sz="2850" b="1">
                 <a:solidFill>
                   <a:srgbClr val="80ED99"/>
@@ -20142,6 +18550,7 @@
           <a:lstStyle xmlns:a="http://schemas.openxmlformats.org/drawingml/2006/main"/>
           <a:p xmlns:a="http://schemas.openxmlformats.org/drawingml/2006/main">
             <a:pPr algn="l">
+              <a:buNone/>
               <a:defRPr sz="2025" b="0">
                 <a:solidFill>
                   <a:srgbClr val="F4F7FB"/>
@@ -20160,7 +18569,7 @@
                 <a:ea typeface="DejaVu Sans"/>
                 <a:cs typeface="DejaVu Sans"/>
               </a:rPr>
-              <a:t>Критерий стабильности фиксируют до обучения</a:t>
+              <a:t>Прогнозный интервал: результат новой партии</a:t>
             </a:r>
           </a:p>
         </p:txBody>
@@ -20261,6 +18670,7 @@
           <a:lstStyle xmlns:a="http://schemas.openxmlformats.org/drawingml/2006/main"/>
           <a:p xmlns:a="http://schemas.openxmlformats.org/drawingml/2006/main">
             <a:pPr algn="l">
+              <a:buNone/>
               <a:defRPr sz="2850" b="1">
                 <a:solidFill>
                   <a:srgbClr val="C4A7FF"/>
@@ -20318,6 +18728,7 @@
           <a:lstStyle xmlns:a="http://schemas.openxmlformats.org/drawingml/2006/main"/>
           <a:p xmlns:a="http://schemas.openxmlformats.org/drawingml/2006/main">
             <a:pPr algn="l">
+              <a:buNone/>
               <a:defRPr sz="2025" b="0">
                 <a:solidFill>
                   <a:srgbClr val="F4F7FB"/>
@@ -20336,7 +18747,7 @@
                 <a:ea typeface="DejaVu Sans"/>
                 <a:cs typeface="DejaVu Sans"/>
               </a:rPr>
-              <a:t>Доля положительных партий важна для выбора метрики</a:t>
+              <a:t>Интервал ошибки модели: качество на новых днях</a:t>
             </a:r>
           </a:p>
         </p:txBody>
@@ -20407,6 +18818,7 @@
           <a:lstStyle xmlns:a="http://schemas.openxmlformats.org/drawingml/2006/main"/>
           <a:p xmlns:a="http://schemas.openxmlformats.org/drawingml/2006/main">
             <a:pPr algn="ctr">
+              <a:buNone/>
               <a:defRPr sz="1500" b="1">
                 <a:solidFill>
                   <a:srgbClr val="48CAE4"/>
@@ -20425,7 +18837,7 @@
                 <a:ea typeface="DejaVu Sans"/>
                 <a:cs typeface="DejaVu Sans"/>
               </a:rPr>
-              <a:t>Порог физического свойства не выбирают по финальному тесту</a:t>
+              <a:t>Bootstrap по двум дням не создаст новые данные</a:t>
             </a:r>
           </a:p>
         </p:txBody>
@@ -20546,6 +18958,7 @@
           <a:lstStyle xmlns:a="http://schemas.openxmlformats.org/drawingml/2006/main"/>
           <a:p xmlns:a="http://schemas.openxmlformats.org/drawingml/2006/main">
             <a:pPr algn="l">
+              <a:buNone/>
               <a:defRPr sz="1050" b="1">
                 <a:solidFill>
                   <a:srgbClr val="48CAE4"/>
@@ -20564,7 +18977,7 @@
                 <a:ea typeface="DejaVu Sans"/>
                 <a:cs typeface="DejaVu Sans"/>
               </a:rPr>
-              <a:t>ПРОВЕРКА И ИНТЕРПРЕТАЦИЯ</a:t>
+              <a:t>КЛАССИФИКАЦИЯ</a:t>
             </a:r>
           </a:p>
         </p:txBody>
@@ -20603,6 +19016,7 @@
           <a:lstStyle xmlns:a="http://schemas.openxmlformats.org/drawingml/2006/main"/>
           <a:p xmlns:a="http://schemas.openxmlformats.org/drawingml/2006/main">
             <a:pPr algn="l">
+              <a:buNone/>
               <a:defRPr sz="2925" b="1">
                 <a:solidFill>
                   <a:srgbClr val="F4F7FB"/>
@@ -20621,7 +19035,7 @@
                 <a:ea typeface="DejaVu Sans"/>
                 <a:cs typeface="DejaVu Sans"/>
               </a:rPr>
-              <a:t>Матрица ошибок</a:t>
+              <a:t>Матрица ошибок для брака</a:t>
             </a:r>
           </a:p>
         </p:txBody>
@@ -20690,6 +19104,7 @@
           <a:lstStyle xmlns:a="http://schemas.openxmlformats.org/drawingml/2006/main"/>
           <a:p xmlns:a="http://schemas.openxmlformats.org/drawingml/2006/main">
             <a:pPr algn="l">
+              <a:buNone/>
               <a:defRPr sz="825" b="1">
                 <a:solidFill>
                   <a:srgbClr val="A6B7C9"/>
@@ -20747,6 +19162,7 @@
           <a:lstStyle xmlns:a="http://schemas.openxmlformats.org/drawingml/2006/main"/>
           <a:p xmlns:a="http://schemas.openxmlformats.org/drawingml/2006/main">
             <a:pPr algn="r">
+              <a:buNone/>
               <a:defRPr sz="900" b="0">
                 <a:solidFill>
                   <a:srgbClr val="A6B7C9"/>
@@ -20866,6 +19282,7 @@
           <a:lstStyle xmlns:a="http://schemas.openxmlformats.org/drawingml/2006/main"/>
           <a:p xmlns:a="http://schemas.openxmlformats.org/drawingml/2006/main">
             <a:pPr algn="l">
+              <a:buNone/>
               <a:defRPr sz="1875" b="0">
                 <a:solidFill>
                   <a:srgbClr val="F4F7FB"/>
@@ -20884,7 +19301,7 @@
                 <a:ea typeface="DejaVu Sans"/>
                 <a:cs typeface="DejaVu Sans"/>
               </a:rPr>
-              <a:t>TP и FN описывают положительный класс</a:t>
+              <a:t>Положительный класс: партия с браком</a:t>
             </a:r>
           </a:p>
         </p:txBody>
@@ -20953,6 +19370,7 @@
           <a:lstStyle xmlns:a="http://schemas.openxmlformats.org/drawingml/2006/main"/>
           <a:p xmlns:a="http://schemas.openxmlformats.org/drawingml/2006/main">
             <a:pPr algn="l">
+              <a:buNone/>
               <a:defRPr sz="1875" b="0">
                 <a:solidFill>
                   <a:srgbClr val="F4F7FB"/>
@@ -20971,7 +19389,7 @@
                 <a:ea typeface="DejaVu Sans"/>
                 <a:cs typeface="DejaVu Sans"/>
               </a:rPr>
-              <a:t>FP и TN описывают отрицательный класс</a:t>
+              <a:t>TP = найденный брак; FN = пропущенный брак</a:t>
             </a:r>
           </a:p>
         </p:txBody>
@@ -21040,6 +19458,7 @@
           <a:lstStyle xmlns:a="http://schemas.openxmlformats.org/drawingml/2006/main"/>
           <a:p xmlns:a="http://schemas.openxmlformats.org/drawingml/2006/main">
             <a:pPr algn="l">
+              <a:buNone/>
               <a:defRPr sz="1875" b="0">
                 <a:solidFill>
                   <a:srgbClr val="F4F7FB"/>
@@ -21058,7 +19477,7 @@
                 <a:ea typeface="DejaVu Sans"/>
                 <a:cs typeface="DejaVu Sans"/>
               </a:rPr>
-              <a:t>Цена пропуска брака может отличаться от цены проверки</a:t>
+              <a:t>FP = лишняя проверка; TN = верный пропуск</a:t>
             </a:r>
           </a:p>
         </p:txBody>
@@ -21097,6 +19516,7 @@
           <a:lstStyle xmlns:a="http://schemas.openxmlformats.org/drawingml/2006/main"/>
           <a:p xmlns:a="http://schemas.openxmlformats.org/drawingml/2006/main">
             <a:pPr algn="l">
+              <a:buNone/>
               <a:defRPr sz="1275" b="1">
                 <a:solidFill>
                   <a:srgbClr val="48CAE4"/>
@@ -21154,6 +19574,7 @@
           <a:lstStyle xmlns:a="http://schemas.openxmlformats.org/drawingml/2006/main"/>
           <a:p xmlns:a="http://schemas.openxmlformats.org/drawingml/2006/main">
             <a:pPr algn="l">
+              <a:buNone/>
               <a:defRPr sz="2025" b="1">
                 <a:solidFill>
                   <a:srgbClr val="F4F7FB"/>
@@ -21172,7 +19593,7 @@
                 <a:ea typeface="DejaVu Sans"/>
                 <a:cs typeface="DejaVu Sans"/>
               </a:rPr>
-              <a:t>Прежде чем читать precision, укажите смысл положительного класса</a:t>
+              <a:t>Фиксируйте ориентацию y_true и y_pred</a:t>
             </a:r>
           </a:p>
         </p:txBody>
@@ -21293,6 +19714,7 @@
           <a:lstStyle xmlns:a="http://schemas.openxmlformats.org/drawingml/2006/main"/>
           <a:p xmlns:a="http://schemas.openxmlformats.org/drawingml/2006/main">
             <a:pPr algn="l">
+              <a:buNone/>
               <a:defRPr sz="1050" b="1">
                 <a:solidFill>
                   <a:srgbClr val="48CAE4"/>
@@ -21311,7 +19733,7 @@
                 <a:ea typeface="DejaVu Sans"/>
                 <a:cs typeface="DejaVu Sans"/>
               </a:rPr>
-              <a:t>ПРИМЕР И ПРИМЕНЕНИЕ</a:t>
+              <a:t>КЛАССИФИКАЦИЯ</a:t>
             </a:r>
           </a:p>
         </p:txBody>
@@ -21350,6 +19772,7 @@
           <a:lstStyle xmlns:a="http://schemas.openxmlformats.org/drawingml/2006/main"/>
           <a:p xmlns:a="http://schemas.openxmlformats.org/drawingml/2006/main">
             <a:pPr algn="l">
+              <a:buNone/>
               <a:defRPr sz="2925" b="1">
                 <a:solidFill>
                   <a:srgbClr val="F4F7FB"/>
@@ -21368,7 +19791,7 @@
                 <a:ea typeface="DejaVu Sans"/>
                 <a:cs typeface="DejaVu Sans"/>
               </a:rPr>
-              <a:t>Accuracy при дисбалансе обманчива</a:t>
+              <a:t>Accuracy скрывает пропуски брака</a:t>
             </a:r>
           </a:p>
         </p:txBody>
@@ -21437,6 +19860,7 @@
           <a:lstStyle xmlns:a="http://schemas.openxmlformats.org/drawingml/2006/main"/>
           <a:p xmlns:a="http://schemas.openxmlformats.org/drawingml/2006/main">
             <a:pPr algn="l">
+              <a:buNone/>
               <a:defRPr sz="825" b="1">
                 <a:solidFill>
                   <a:srgbClr val="A6B7C9"/>
@@ -21494,6 +19918,7 @@
           <a:lstStyle xmlns:a="http://schemas.openxmlformats.org/drawingml/2006/main"/>
           <a:p xmlns:a="http://schemas.openxmlformats.org/drawingml/2006/main">
             <a:pPr algn="r">
+              <a:buNone/>
               <a:defRPr sz="900" b="0">
                 <a:solidFill>
                   <a:srgbClr val="A6B7C9"/>
@@ -21581,6 +20006,7 @@
           <a:lstStyle xmlns:a="http://schemas.openxmlformats.org/drawingml/2006/main"/>
           <a:p xmlns:a="http://schemas.openxmlformats.org/drawingml/2006/main">
             <a:pPr algn="l">
+              <a:buNone/>
               <a:defRPr sz="1800" b="1">
                 <a:solidFill>
                   <a:srgbClr val="F4F7FB"/>
@@ -21599,7 +20025,7 @@
                 <a:ea typeface="DejaVu Sans"/>
                 <a:cs typeface="DejaVu Sans"/>
               </a:rPr>
-              <a:t>90% пригодных партий дают 90% accuracy при прогнозе «все пригодны»</a:t>
+              <a:t>10 бракованных из 100; «все годны» даёт 90%</a:t>
             </a:r>
           </a:p>
         </p:txBody>
@@ -21668,6 +20094,7 @@
           <a:lstStyle xmlns:a="http://schemas.openxmlformats.org/drawingml/2006/main"/>
           <a:p xmlns:a="http://schemas.openxmlformats.org/drawingml/2006/main">
             <a:pPr algn="l">
+              <a:buNone/>
               <a:defRPr sz="1800" b="0">
                 <a:solidFill>
                   <a:srgbClr val="F4F7FB"/>
@@ -21686,7 +20113,7 @@
                 <a:ea typeface="DejaVu Sans"/>
                 <a:cs typeface="DejaVu Sans"/>
               </a:rPr>
-              <a:t>Recall: доля найденных положительных случаев</a:t>
+              <a:t>Но recall брака для такого правила равен нулю</a:t>
             </a:r>
           </a:p>
         </p:txBody>
@@ -21755,6 +20182,7 @@
           <a:lstStyle xmlns:a="http://schemas.openxmlformats.org/drawingml/2006/main"/>
           <a:p xmlns:a="http://schemas.openxmlformats.org/drawingml/2006/main">
             <a:pPr algn="l">
+              <a:buNone/>
               <a:defRPr sz="1800" b="0">
                 <a:solidFill>
                   <a:srgbClr val="F4F7FB"/>
@@ -21773,7 +20201,7 @@
                 <a:ea typeface="DejaVu Sans"/>
                 <a:cs typeface="DejaVu Sans"/>
               </a:rPr>
-              <a:t>Precision: доля истинных среди отмеченных положительных</a:t>
+              <a:t>Пример: TP=7, FN=3, FP=8, TN=82</a:t>
             </a:r>
           </a:p>
         </p:txBody>
@@ -21844,6 +20272,7 @@
           <a:lstStyle xmlns:a="http://schemas.openxmlformats.org/drawingml/2006/main"/>
           <a:p xmlns:a="http://schemas.openxmlformats.org/drawingml/2006/main">
             <a:pPr algn="ctr">
+              <a:buNone/>
               <a:defRPr sz="1350" b="1">
                 <a:solidFill>
                   <a:srgbClr val="48CAE4"/>
@@ -21933,6 +20362,7 @@
           <a:lstStyle xmlns:a="http://schemas.openxmlformats.org/drawingml/2006/main"/>
           <a:p xmlns:a="http://schemas.openxmlformats.org/drawingml/2006/main">
             <a:pPr algn="ctr">
+              <a:buNone/>
               <a:defRPr sz="2400" b="1">
                 <a:solidFill>
                   <a:srgbClr val="48CAE4"/>
@@ -21951,7 +20381,7 @@
                 <a:ea typeface="DejaVu Sans"/>
                 <a:cs typeface="DejaVu Sans"/>
               </a:rPr>
-              <a:t>TP</a:t>
+              <a:t>TP 7</a:t>
             </a:r>
           </a:p>
         </p:txBody>
@@ -22022,6 +20452,7 @@
           <a:lstStyle xmlns:a="http://schemas.openxmlformats.org/drawingml/2006/main"/>
           <a:p xmlns:a="http://schemas.openxmlformats.org/drawingml/2006/main">
             <a:pPr algn="ctr">
+              <a:buNone/>
               <a:defRPr sz="2400" b="1">
                 <a:solidFill>
                   <a:srgbClr val="80ED99"/>
@@ -22040,7 +20471,7 @@
                 <a:ea typeface="DejaVu Sans"/>
                 <a:cs typeface="DejaVu Sans"/>
               </a:rPr>
-              <a:t>FP</a:t>
+              <a:t>FP 8</a:t>
             </a:r>
           </a:p>
         </p:txBody>
@@ -22111,6 +20542,7 @@
           <a:lstStyle xmlns:a="http://schemas.openxmlformats.org/drawingml/2006/main"/>
           <a:p xmlns:a="http://schemas.openxmlformats.org/drawingml/2006/main">
             <a:pPr algn="ctr">
+              <a:buNone/>
               <a:defRPr sz="2400" b="1">
                 <a:solidFill>
                   <a:srgbClr val="C4A7FF"/>
@@ -22129,7 +20561,7 @@
                 <a:ea typeface="DejaVu Sans"/>
                 <a:cs typeface="DejaVu Sans"/>
               </a:rPr>
-              <a:t>FN</a:t>
+              <a:t>FN 3</a:t>
             </a:r>
           </a:p>
         </p:txBody>
@@ -22200,6 +20632,7 @@
           <a:lstStyle xmlns:a="http://schemas.openxmlformats.org/drawingml/2006/main"/>
           <a:p xmlns:a="http://schemas.openxmlformats.org/drawingml/2006/main">
             <a:pPr algn="ctr">
+              <a:buNone/>
               <a:defRPr sz="2400" b="1">
                 <a:solidFill>
                   <a:srgbClr val="F9C74F"/>
@@ -22218,7 +20651,7 @@
                 <a:ea typeface="DejaVu Sans"/>
                 <a:cs typeface="DejaVu Sans"/>
               </a:rPr>
-              <a:t>TN</a:t>
+              <a:t>TN 82</a:t>
             </a:r>
           </a:p>
         </p:txBody>
@@ -22257,6 +20690,7 @@
           <a:lstStyle xmlns:a="http://schemas.openxmlformats.org/drawingml/2006/main"/>
           <a:p xmlns:a="http://schemas.openxmlformats.org/drawingml/2006/main">
             <a:pPr algn="ctr">
+              <a:buNone/>
               <a:defRPr sz="1200" b="1">
                 <a:solidFill>
                   <a:srgbClr val="A6B7C9"/>
@@ -22275,7 +20709,7 @@
                 <a:ea typeface="DejaVu Sans"/>
                 <a:cs typeface="DejaVu Sans"/>
               </a:rPr>
-              <a:t>Истина: положит. / отрицат.</a:t>
+              <a:t>Истина: брак / годен</a:t>
             </a:r>
           </a:p>
         </p:txBody>
@@ -22396,6 +20830,7 @@
           <a:lstStyle xmlns:a="http://schemas.openxmlformats.org/drawingml/2006/main"/>
           <a:p xmlns:a="http://schemas.openxmlformats.org/drawingml/2006/main">
             <a:pPr algn="l">
+              <a:buNone/>
               <a:defRPr sz="1050" b="1">
                 <a:solidFill>
                   <a:srgbClr val="48CAE4"/>
@@ -22414,7 +20849,7 @@
                 <a:ea typeface="DejaVu Sans"/>
                 <a:cs typeface="DejaVu Sans"/>
               </a:rPr>
-              <a:t>ПРАКТИЧЕСКИЙ ВЫВОД</a:t>
+              <a:t>КЛАССИФИКАЦИЯ</a:t>
             </a:r>
           </a:p>
         </p:txBody>
@@ -22453,6 +20888,7 @@
           <a:lstStyle xmlns:a="http://schemas.openxmlformats.org/drawingml/2006/main"/>
           <a:p xmlns:a="http://schemas.openxmlformats.org/drawingml/2006/main">
             <a:pPr algn="l">
+              <a:buNone/>
               <a:defRPr sz="2925" b="1">
                 <a:solidFill>
                   <a:srgbClr val="F4F7FB"/>
@@ -22471,7 +20907,7 @@
                 <a:ea typeface="DejaVu Sans"/>
                 <a:cs typeface="DejaVu Sans"/>
               </a:rPr>
-              <a:t>Вероятность требует калибровки</a:t>
+              <a:t>Precision и recall на числах</a:t>
             </a:r>
           </a:p>
         </p:txBody>
@@ -22540,6 +20976,7 @@
           <a:lstStyle xmlns:a="http://schemas.openxmlformats.org/drawingml/2006/main"/>
           <a:p xmlns:a="http://schemas.openxmlformats.org/drawingml/2006/main">
             <a:pPr algn="l">
+              <a:buNone/>
               <a:defRPr sz="825" b="1">
                 <a:solidFill>
                   <a:srgbClr val="A6B7C9"/>
@@ -22597,6 +21034,7 @@
           <a:lstStyle xmlns:a="http://schemas.openxmlformats.org/drawingml/2006/main"/>
           <a:p xmlns:a="http://schemas.openxmlformats.org/drawingml/2006/main">
             <a:pPr algn="r">
+              <a:buNone/>
               <a:defRPr sz="900" b="0">
                 <a:solidFill>
                   <a:srgbClr val="A6B7C9"/>
@@ -22654,6 +21092,7 @@
           <a:lstStyle xmlns:a="http://schemas.openxmlformats.org/drawingml/2006/main"/>
           <a:p xmlns:a="http://schemas.openxmlformats.org/drawingml/2006/main">
             <a:pPr algn="l">
+              <a:buNone/>
               <a:defRPr sz="3825" b="1">
                 <a:solidFill>
                   <a:srgbClr val="48CAE4"/>
@@ -22741,6 +21180,7 @@
           <a:lstStyle xmlns:a="http://schemas.openxmlformats.org/drawingml/2006/main"/>
           <a:p xmlns:a="http://schemas.openxmlformats.org/drawingml/2006/main">
             <a:pPr algn="l">
+              <a:buNone/>
               <a:defRPr sz="1875" b="1">
                 <a:solidFill>
                   <a:srgbClr val="F4F7FB"/>
@@ -22759,7 +21199,7 @@
                 <a:ea typeface="DejaVu Sans"/>
                 <a:cs typeface="DejaVu Sans"/>
               </a:rPr>
-              <a:t>Оценка 0,8 должна соответствовать частоте события при похожих прогнозах</a:t>
+              <a:t>Precision брака = 7 / 15 ≈ 0,47</a:t>
             </a:r>
           </a:p>
         </p:txBody>
@@ -22798,6 +21238,7 @@
           <a:lstStyle xmlns:a="http://schemas.openxmlformats.org/drawingml/2006/main"/>
           <a:p xmlns:a="http://schemas.openxmlformats.org/drawingml/2006/main">
             <a:pPr algn="l">
+              <a:buNone/>
               <a:defRPr sz="3825" b="1">
                 <a:solidFill>
                   <a:srgbClr val="80ED99"/>
@@ -22885,6 +21326,7 @@
           <a:lstStyle xmlns:a="http://schemas.openxmlformats.org/drawingml/2006/main"/>
           <a:p xmlns:a="http://schemas.openxmlformats.org/drawingml/2006/main">
             <a:pPr algn="l">
+              <a:buNone/>
               <a:defRPr sz="1875" b="0">
                 <a:solidFill>
                   <a:srgbClr val="F4F7FB"/>
@@ -22903,7 +21345,7 @@
                 <a:ea typeface="DejaVu Sans"/>
                 <a:cs typeface="DejaVu Sans"/>
               </a:rPr>
-              <a:t>Сырой predict_proba не гарантирует этого свойства</a:t>
+              <a:t>Recall брака = 7 / 10 = 0,70</a:t>
             </a:r>
           </a:p>
         </p:txBody>
@@ -22942,6 +21384,7 @@
           <a:lstStyle xmlns:a="http://schemas.openxmlformats.org/drawingml/2006/main"/>
           <a:p xmlns:a="http://schemas.openxmlformats.org/drawingml/2006/main">
             <a:pPr algn="l">
+              <a:buNone/>
               <a:defRPr sz="3825" b="1">
                 <a:solidFill>
                   <a:srgbClr val="C4A7FF"/>
@@ -23029,6 +21472,7 @@
           <a:lstStyle xmlns:a="http://schemas.openxmlformats.org/drawingml/2006/main"/>
           <a:p xmlns:a="http://schemas.openxmlformats.org/drawingml/2006/main">
             <a:pPr algn="l">
+              <a:buNone/>
               <a:defRPr sz="1875" b="0">
                 <a:solidFill>
                   <a:srgbClr val="F4F7FB"/>
@@ -23047,7 +21491,7 @@
                 <a:ea typeface="DejaVu Sans"/>
                 <a:cs typeface="DejaVu Sans"/>
               </a:rPr>
-              <a:t>Калибровку обучают без доступа к финальному тесту</a:t>
+              <a:t>Специфичность = 82 / 90 ≈ 0,91</a:t>
             </a:r>
           </a:p>
         </p:txBody>
@@ -23118,6 +21562,7 @@
           <a:lstStyle xmlns:a="http://schemas.openxmlformats.org/drawingml/2006/main"/>
           <a:p xmlns:a="http://schemas.openxmlformats.org/drawingml/2006/main">
             <a:pPr algn="ctr">
+              <a:buNone/>
               <a:defRPr sz="1500" b="1">
                 <a:solidFill>
                   <a:srgbClr val="48CAE4"/>
@@ -23136,7 +21581,7 @@
                 <a:ea typeface="DejaVu Sans"/>
                 <a:cs typeface="DejaVu Sans"/>
               </a:rPr>
-              <a:t>На малом числе положительных партий проверка нестабильна</a:t>
+              <a:t>Без числа положительных партий доли непрочны</a:t>
             </a:r>
           </a:p>
         </p:txBody>
@@ -23257,6 +21702,7 @@
           <a:lstStyle xmlns:a="http://schemas.openxmlformats.org/drawingml/2006/main"/>
           <a:p xmlns:a="http://schemas.openxmlformats.org/drawingml/2006/main">
             <a:pPr algn="l">
+              <a:buNone/>
               <a:defRPr sz="1050" b="1">
                 <a:solidFill>
                   <a:srgbClr val="48CAE4"/>
@@ -23275,7 +21721,7 @@
                 <a:ea typeface="DejaVu Sans"/>
                 <a:cs typeface="DejaVu Sans"/>
               </a:rPr>
-              <a:t>ПОСТАНОВКА И МЕТОД</a:t>
+              <a:t>КЛАССИФИКАЦИЯ</a:t>
             </a:r>
           </a:p>
         </p:txBody>
@@ -23314,6 +21760,7 @@
           <a:lstStyle xmlns:a="http://schemas.openxmlformats.org/drawingml/2006/main"/>
           <a:p xmlns:a="http://schemas.openxmlformats.org/drawingml/2006/main">
             <a:pPr algn="l">
+              <a:buNone/>
               <a:defRPr sz="2925" b="1">
                 <a:solidFill>
                   <a:srgbClr val="F4F7FB"/>
@@ -23332,7 +21779,7 @@
                 <a:ea typeface="DejaVu Sans"/>
                 <a:cs typeface="DejaVu Sans"/>
               </a:rPr>
-              <a:t>Порог зависит от решения</a:t>
+              <a:t>Цена ошибки задаёт порог действия</a:t>
             </a:r>
           </a:p>
         </p:txBody>
@@ -23401,6 +21848,7 @@
           <a:lstStyle xmlns:a="http://schemas.openxmlformats.org/drawingml/2006/main"/>
           <a:p xmlns:a="http://schemas.openxmlformats.org/drawingml/2006/main">
             <a:pPr algn="l">
+              <a:buNone/>
               <a:defRPr sz="825" b="1">
                 <a:solidFill>
                   <a:srgbClr val="A6B7C9"/>
@@ -23458,6 +21906,7 @@
           <a:lstStyle xmlns:a="http://schemas.openxmlformats.org/drawingml/2006/main"/>
           <a:p xmlns:a="http://schemas.openxmlformats.org/drawingml/2006/main">
             <a:pPr algn="r">
+              <a:buNone/>
               <a:defRPr sz="900" b="0">
                 <a:solidFill>
                   <a:srgbClr val="A6B7C9"/>
@@ -23515,6 +21964,7 @@
           <a:lstStyle xmlns:a="http://schemas.openxmlformats.org/drawingml/2006/main"/>
           <a:p xmlns:a="http://schemas.openxmlformats.org/drawingml/2006/main">
             <a:pPr algn="l">
+              <a:buNone/>
               <a:defRPr sz="2400" b="1">
                 <a:solidFill>
                   <a:srgbClr val="48CAE4"/>
@@ -23572,6 +22022,7 @@
           <a:lstStyle xmlns:a="http://schemas.openxmlformats.org/drawingml/2006/main"/>
           <a:p xmlns:a="http://schemas.openxmlformats.org/drawingml/2006/main">
             <a:pPr algn="l">
+              <a:buNone/>
               <a:defRPr sz="2025" b="1">
                 <a:solidFill>
                   <a:srgbClr val="F4F7FB"/>
@@ -23590,7 +22041,7 @@
                 <a:ea typeface="DejaVu Sans"/>
                 <a:cs typeface="DejaVu Sans"/>
               </a:rPr>
-              <a:t>Порог 0,5 не всегда оптимален</a:t>
+              <a:t>Пропуск брака стоит 10 условных единиц</a:t>
             </a:r>
           </a:p>
         </p:txBody>
@@ -23659,6 +22110,7 @@
           <a:lstStyle xmlns:a="http://schemas.openxmlformats.org/drawingml/2006/main"/>
           <a:p xmlns:a="http://schemas.openxmlformats.org/drawingml/2006/main">
             <a:pPr algn="l">
+              <a:buNone/>
               <a:defRPr sz="2400" b="1">
                 <a:solidFill>
                   <a:srgbClr val="80ED99"/>
@@ -23716,6 +22168,7 @@
           <a:lstStyle xmlns:a="http://schemas.openxmlformats.org/drawingml/2006/main"/>
           <a:p xmlns:a="http://schemas.openxmlformats.org/drawingml/2006/main">
             <a:pPr algn="l">
+              <a:buNone/>
               <a:defRPr sz="2025" b="0">
                 <a:solidFill>
                   <a:srgbClr val="F4F7FB"/>
@@ -23734,7 +22187,7 @@
                 <a:ea typeface="DejaVu Sans"/>
                 <a:cs typeface="DejaVu Sans"/>
               </a:rPr>
-              <a:t>Стоимость ложного пропуска и ложной тревоги различается</a:t>
+              <a:t>Лишняя проверка стоит 1; пример даёт 38</a:t>
             </a:r>
           </a:p>
         </p:txBody>
@@ -23803,6 +22256,7 @@
           <a:lstStyle xmlns:a="http://schemas.openxmlformats.org/drawingml/2006/main"/>
           <a:p xmlns:a="http://schemas.openxmlformats.org/drawingml/2006/main">
             <a:pPr algn="l">
+              <a:buNone/>
               <a:defRPr sz="2400" b="1">
                 <a:solidFill>
                   <a:srgbClr val="C4A7FF"/>
@@ -23860,6 +22314,7 @@
           <a:lstStyle xmlns:a="http://schemas.openxmlformats.org/drawingml/2006/main"/>
           <a:p xmlns:a="http://schemas.openxmlformats.org/drawingml/2006/main">
             <a:pPr algn="l">
+              <a:buNone/>
               <a:defRPr sz="2025" b="0">
                 <a:solidFill>
                   <a:srgbClr val="F4F7FB"/>
@@ -23878,7 +22333,7 @@
                 <a:ea typeface="DejaVu Sans"/>
                 <a:cs typeface="DejaVu Sans"/>
               </a:rPr>
-              <a:t>Порог выбирают на разработке и фиксируют</a:t>
+              <a:t>При калиброванной p порог = 1 / 11 ≈ 0,09</a:t>
             </a:r>
           </a:p>
         </p:txBody>
@@ -23979,6 +22434,7 @@
           <a:lstStyle xmlns:a="http://schemas.openxmlformats.org/drawingml/2006/main"/>
           <a:p xmlns:a="http://schemas.openxmlformats.org/drawingml/2006/main">
             <a:pPr algn="ctr">
+              <a:buNone/>
               <a:defRPr sz="1500" b="1">
                 <a:solidFill>
                   <a:srgbClr val="48CAE4"/>
@@ -23997,7 +22453,7 @@
                 <a:ea typeface="DejaVu Sans"/>
                 <a:cs typeface="DejaVu Sans"/>
               </a:rPr>
-              <a:t>Не подстраивайте порог под тестовые партии</a:t>
+              <a:t>Цены и порог утверждают до финального теста</a:t>
             </a:r>
           </a:p>
         </p:txBody>
@@ -24118,6 +22574,7 @@
           <a:lstStyle xmlns:a="http://schemas.openxmlformats.org/drawingml/2006/main"/>
           <a:p xmlns:a="http://schemas.openxmlformats.org/drawingml/2006/main">
             <a:pPr algn="l">
+              <a:buNone/>
               <a:defRPr sz="1050" b="1">
                 <a:solidFill>
                   <a:srgbClr val="48CAE4"/>
@@ -24136,7 +22593,7 @@
                 <a:ea typeface="DejaVu Sans"/>
                 <a:cs typeface="DejaVu Sans"/>
               </a:rPr>
-              <a:t>ТРИ ОПОРНЫХ ПУНКТА</a:t>
+              <a:t>КЛАССИФИКАЦИЯ</a:t>
             </a:r>
           </a:p>
         </p:txBody>
@@ -24175,6 +22632,7 @@
           <a:lstStyle xmlns:a="http://schemas.openxmlformats.org/drawingml/2006/main"/>
           <a:p xmlns:a="http://schemas.openxmlformats.org/drawingml/2006/main">
             <a:pPr algn="l">
+              <a:buNone/>
               <a:defRPr sz="2925" b="1">
                 <a:solidFill>
                   <a:srgbClr val="F4F7FB"/>
@@ -24193,7 +22651,7 @@
                 <a:ea typeface="DejaVu Sans"/>
                 <a:cs typeface="DejaVu Sans"/>
               </a:rPr>
-              <a:t>Смена области применения</a:t>
+              <a:t>Калибровка и смена частоты брака</a:t>
             </a:r>
           </a:p>
         </p:txBody>
@@ -24262,6 +22720,7 @@
           <a:lstStyle xmlns:a="http://schemas.openxmlformats.org/drawingml/2006/main"/>
           <a:p xmlns:a="http://schemas.openxmlformats.org/drawingml/2006/main">
             <a:pPr algn="l">
+              <a:buNone/>
               <a:defRPr sz="825" b="1">
                 <a:solidFill>
                   <a:srgbClr val="A6B7C9"/>
@@ -24319,6 +22778,7 @@
           <a:lstStyle xmlns:a="http://schemas.openxmlformats.org/drawingml/2006/main"/>
           <a:p xmlns:a="http://schemas.openxmlformats.org/drawingml/2006/main">
             <a:pPr algn="r">
+              <a:buNone/>
               <a:defRPr sz="900" b="0">
                 <a:solidFill>
                   <a:srgbClr val="A6B7C9"/>
@@ -24438,6 +22898,7 @@
           <a:lstStyle xmlns:a="http://schemas.openxmlformats.org/drawingml/2006/main"/>
           <a:p xmlns:a="http://schemas.openxmlformats.org/drawingml/2006/main">
             <a:pPr algn="l">
+              <a:buNone/>
               <a:defRPr sz="2850" b="1">
                 <a:solidFill>
                   <a:srgbClr val="48CAE4"/>
@@ -24495,6 +22956,7 @@
           <a:lstStyle xmlns:a="http://schemas.openxmlformats.org/drawingml/2006/main"/>
           <a:p xmlns:a="http://schemas.openxmlformats.org/drawingml/2006/main">
             <a:pPr algn="l">
+              <a:buNone/>
               <a:defRPr sz="2025" b="1">
                 <a:solidFill>
                   <a:srgbClr val="F4F7FB"/>
@@ -24513,7 +22975,7 @@
                 <a:ea typeface="DejaVu Sans"/>
                 <a:cs typeface="DejaVu Sans"/>
               </a:rPr>
-              <a:t>Новая поставка меняет химические свойства сырья</a:t>
+              <a:t>predict_proba не гарантирует частоту событий</a:t>
             </a:r>
           </a:p>
         </p:txBody>
@@ -24614,6 +23076,7 @@
           <a:lstStyle xmlns:a="http://schemas.openxmlformats.org/drawingml/2006/main"/>
           <a:p xmlns:a="http://schemas.openxmlformats.org/drawingml/2006/main">
             <a:pPr algn="l">
+              <a:buNone/>
               <a:defRPr sz="2850" b="1">
                 <a:solidFill>
                   <a:srgbClr val="80ED99"/>
@@ -24671,6 +23134,7 @@
           <a:lstStyle xmlns:a="http://schemas.openxmlformats.org/drawingml/2006/main"/>
           <a:p xmlns:a="http://schemas.openxmlformats.org/drawingml/2006/main">
             <a:pPr algn="l">
+              <a:buNone/>
               <a:defRPr sz="2025" b="0">
                 <a:solidFill>
                   <a:srgbClr val="F4F7FB"/>
@@ -24689,7 +23153,7 @@
                 <a:ea typeface="DejaVu Sans"/>
                 <a:cs typeface="DejaVu Sans"/>
               </a:rPr>
-              <a:t>Новый прибор меняет распределение спектров</a:t>
+              <a:t>Калибровка учится только на разработке</a:t>
             </a:r>
           </a:p>
         </p:txBody>
@@ -24790,6 +23254,7 @@
           <a:lstStyle xmlns:a="http://schemas.openxmlformats.org/drawingml/2006/main"/>
           <a:p xmlns:a="http://schemas.openxmlformats.org/drawingml/2006/main">
             <a:pPr algn="l">
+              <a:buNone/>
               <a:defRPr sz="2850" b="1">
                 <a:solidFill>
                   <a:srgbClr val="C4A7FF"/>
@@ -24847,6 +23312,7 @@
           <a:lstStyle xmlns:a="http://schemas.openxmlformats.org/drawingml/2006/main"/>
           <a:p xmlns:a="http://schemas.openxmlformats.org/drawingml/2006/main">
             <a:pPr algn="l">
+              <a:buNone/>
               <a:defRPr sz="2025" b="0">
                 <a:solidFill>
                   <a:srgbClr val="F4F7FB"/>
@@ -24865,7 +23331,7 @@
                 <a:ea typeface="DejaVu Sans"/>
                 <a:cs typeface="DejaVu Sans"/>
               </a:rPr>
-              <a:t>Новый диапазон рецептур требует отдельной проверки</a:t>
+              <a:t>Новая поставка может изменить долю брака</a:t>
             </a:r>
           </a:p>
         </p:txBody>
@@ -24936,6 +23402,7 @@
           <a:lstStyle xmlns:a="http://schemas.openxmlformats.org/drawingml/2006/main"/>
           <a:p xmlns:a="http://schemas.openxmlformats.org/drawingml/2006/main">
             <a:pPr algn="ctr">
+              <a:buNone/>
               <a:defRPr sz="1500" b="1">
                 <a:solidFill>
                   <a:srgbClr val="48CAE4"/>
@@ -24954,7 +23421,7 @@
                 <a:ea typeface="DejaVu Sans"/>
                 <a:cs typeface="DejaVu Sans"/>
               </a:rPr>
-              <a:t>GroupKFold по партиям не доказывает перенос на новый прибор</a:t>
+              <a:t>Порог из старого процесса нуждается в проверке</a:t>
             </a:r>
           </a:p>
         </p:txBody>
@@ -25075,6 +23542,7 @@
           <a:lstStyle xmlns:a="http://schemas.openxmlformats.org/drawingml/2006/main"/>
           <a:p xmlns:a="http://schemas.openxmlformats.org/drawingml/2006/main">
             <a:pPr algn="l">
+              <a:buNone/>
               <a:defRPr sz="1050" b="1">
                 <a:solidFill>
                   <a:srgbClr val="48CAE4"/>
@@ -25093,7 +23561,7 @@
                 <a:ea typeface="DejaVu Sans"/>
                 <a:cs typeface="DejaVu Sans"/>
               </a:rPr>
-              <a:t>ПРОВЕРКА И ИНТЕРПРЕТАЦИЯ</a:t>
+              <a:t>ОБЛАСТЬ ПРИМЕНЕНИЯ</a:t>
             </a:r>
           </a:p>
         </p:txBody>
@@ -25132,6 +23600,7 @@
           <a:lstStyle xmlns:a="http://schemas.openxmlformats.org/drawingml/2006/main"/>
           <a:p xmlns:a="http://schemas.openxmlformats.org/drawingml/2006/main">
             <a:pPr algn="l">
+              <a:buNone/>
               <a:defRPr sz="2925" b="1">
                 <a:solidFill>
                   <a:srgbClr val="F4F7FB"/>
@@ -25219,6 +23688,7 @@
           <a:lstStyle xmlns:a="http://schemas.openxmlformats.org/drawingml/2006/main"/>
           <a:p xmlns:a="http://schemas.openxmlformats.org/drawingml/2006/main">
             <a:pPr algn="l">
+              <a:buNone/>
               <a:defRPr sz="825" b="1">
                 <a:solidFill>
                   <a:srgbClr val="A6B7C9"/>
@@ -25276,6 +23746,7 @@
           <a:lstStyle xmlns:a="http://schemas.openxmlformats.org/drawingml/2006/main"/>
           <a:p xmlns:a="http://schemas.openxmlformats.org/drawingml/2006/main">
             <a:pPr algn="r">
+              <a:buNone/>
               <a:defRPr sz="900" b="0">
                 <a:solidFill>
                   <a:srgbClr val="A6B7C9"/>
@@ -25363,6 +23834,7 @@
           <a:lstStyle xmlns:a="http://schemas.openxmlformats.org/drawingml/2006/main"/>
           <a:p xmlns:a="http://schemas.openxmlformats.org/drawingml/2006/main">
             <a:pPr algn="l">
+              <a:buNone/>
               <a:defRPr sz="1800" b="1">
                 <a:solidFill>
                   <a:srgbClr val="F4F7FB"/>
@@ -25381,7 +23853,7 @@
                 <a:ea typeface="DejaVu Sans"/>
                 <a:cs typeface="DejaVu Sans"/>
               </a:rPr>
-              <a:t>Внутренняя CV оценивает сценарий в данных разработки</a:t>
+              <a:t>CV по дням оценивает похожие будущие дни</a:t>
             </a:r>
           </a:p>
         </p:txBody>
@@ -25450,6 +23922,7 @@
           <a:lstStyle xmlns:a="http://schemas.openxmlformats.org/drawingml/2006/main"/>
           <a:p xmlns:a="http://schemas.openxmlformats.org/drawingml/2006/main">
             <a:pPr algn="l">
+              <a:buNone/>
               <a:defRPr sz="1800" b="0">
                 <a:solidFill>
                   <a:srgbClr val="F4F7FB"/>
@@ -25468,7 +23941,7 @@
                 <a:ea typeface="DejaVu Sans"/>
                 <a:cs typeface="DejaVu Sans"/>
               </a:rPr>
-              <a:t>Финальный тест новых партий проверяет выбранный протокол</a:t>
+              <a:t>Финальный тест: последние две кампании</a:t>
             </a:r>
           </a:p>
         </p:txBody>
@@ -25537,6 +24010,7 @@
           <a:lstStyle xmlns:a="http://schemas.openxmlformats.org/drawingml/2006/main"/>
           <a:p xmlns:a="http://schemas.openxmlformats.org/drawingml/2006/main">
             <a:pPr algn="l">
+              <a:buNone/>
               <a:defRPr sz="1800" b="0">
                 <a:solidFill>
                   <a:srgbClr val="F4F7FB"/>
@@ -25555,7 +24029,7 @@
                 <a:ea typeface="DejaVu Sans"/>
                 <a:cs typeface="DejaVu Sans"/>
               </a:rPr>
-              <a:t>Внешний тест оценивает иной прибор, сырьё или масштаб</a:t>
+              <a:t>Поставка и другой прибор требуют нового теста</a:t>
             </a:r>
           </a:p>
         </p:txBody>
@@ -25626,6 +24100,7 @@
           <a:lstStyle xmlns:a="http://schemas.openxmlformats.org/drawingml/2006/main"/>
           <a:p xmlns:a="http://schemas.openxmlformats.org/drawingml/2006/main">
             <a:pPr algn="ctr">
+              <a:buNone/>
               <a:defRPr sz="1350" b="1">
                 <a:solidFill>
                   <a:srgbClr val="48CAE4"/>
@@ -25644,7 +24119,7 @@
                 <a:ea typeface="DejaVu Sans"/>
                 <a:cs typeface="DejaVu Sans"/>
               </a:rPr>
-              <a:t>ОБЛАСТЬ ДАННЫХ</a:t>
+              <a:t>ИЗУЧЕННЫЙ ДИАПАЗОН</a:t>
             </a:r>
           </a:p>
         </p:txBody>
@@ -26188,11 +24663,12 @@
         </p:spPr>
         <p:txBody>
           <a:bodyPr xmlns:a="http://schemas.openxmlformats.org/drawingml/2006/main">
-            <a:normAutofit fontScale="83784"/>
+            <a:normAutofit fontScale="95997"/>
           </a:bodyPr>
           <a:lstStyle xmlns:a="http://schemas.openxmlformats.org/drawingml/2006/main"/>
           <a:p xmlns:a="http://schemas.openxmlformats.org/drawingml/2006/main">
             <a:pPr algn="ctr">
+              <a:buNone/>
               <a:defRPr sz="1200" b="1">
                 <a:solidFill>
                   <a:srgbClr val="FF7B7B"/>
@@ -26211,7 +24687,7 @@
                 <a:ea typeface="DejaVu Sans"/>
                 <a:cs typeface="DejaVu Sans"/>
               </a:rPr>
-              <a:t>новая рецептура</a:t>
+              <a:t>новые условия</a:t>
             </a:r>
           </a:p>
         </p:txBody>
@@ -26250,6 +24726,7 @@
           <a:lstStyle xmlns:a="http://schemas.openxmlformats.org/drawingml/2006/main"/>
           <a:p xmlns:a="http://schemas.openxmlformats.org/drawingml/2006/main">
             <a:pPr algn="ctr">
+              <a:buNone/>
               <a:defRPr sz="1125" b="1">
                 <a:solidFill>
                   <a:srgbClr val="A6B7C9"/>
@@ -26268,7 +24745,7 @@
                 <a:ea typeface="DejaVu Sans"/>
                 <a:cs typeface="DejaVu Sans"/>
               </a:rPr>
-              <a:t>состав  →</a:t>
+              <a:t>состав →</a:t>
             </a:r>
           </a:p>
         </p:txBody>
@@ -26389,6 +24866,7 @@
           <a:lstStyle xmlns:a="http://schemas.openxmlformats.org/drawingml/2006/main"/>
           <a:p xmlns:a="http://schemas.openxmlformats.org/drawingml/2006/main">
             <a:pPr algn="l">
+              <a:buNone/>
               <a:defRPr sz="1050" b="1">
                 <a:solidFill>
                   <a:srgbClr val="48CAE4"/>
@@ -26407,7 +24885,7 @@
                 <a:ea typeface="DejaVu Sans"/>
                 <a:cs typeface="DejaVu Sans"/>
               </a:rPr>
-              <a:t>ТРИ ОПОРНЫХ ПУНКТА</a:t>
+              <a:t>ПОСТАНОВКА</a:t>
             </a:r>
           </a:p>
         </p:txBody>
@@ -26446,6 +24924,7 @@
           <a:lstStyle xmlns:a="http://schemas.openxmlformats.org/drawingml/2006/main"/>
           <a:p xmlns:a="http://schemas.openxmlformats.org/drawingml/2006/main">
             <a:pPr algn="l">
+              <a:buNone/>
               <a:defRPr sz="2925" b="1">
                 <a:solidFill>
                   <a:srgbClr val="F4F7FB"/>
@@ -26464,7 +24943,7 @@
                 <a:ea typeface="DejaVu Sans"/>
                 <a:cs typeface="DejaVu Sans"/>
               </a:rPr>
-              <a:t>Вопросы для паспорта прогноза</a:t>
+              <a:t>Формальная цель оценки</a:t>
             </a:r>
           </a:p>
         </p:txBody>
@@ -26533,6 +25012,7 @@
           <a:lstStyle xmlns:a="http://schemas.openxmlformats.org/drawingml/2006/main"/>
           <a:p xmlns:a="http://schemas.openxmlformats.org/drawingml/2006/main">
             <a:pPr algn="l">
+              <a:buNone/>
               <a:defRPr sz="825" b="1">
                 <a:solidFill>
                   <a:srgbClr val="A6B7C9"/>
@@ -26590,6 +25070,7 @@
           <a:lstStyle xmlns:a="http://schemas.openxmlformats.org/drawingml/2006/main"/>
           <a:p xmlns:a="http://schemas.openxmlformats.org/drawingml/2006/main">
             <a:pPr algn="r">
+              <a:buNone/>
               <a:defRPr sz="900" b="0">
                 <a:solidFill>
                   <a:srgbClr val="A6B7C9"/>
@@ -26709,6 +25190,7 @@
           <a:lstStyle xmlns:a="http://schemas.openxmlformats.org/drawingml/2006/main"/>
           <a:p xmlns:a="http://schemas.openxmlformats.org/drawingml/2006/main">
             <a:pPr algn="l">
+              <a:buNone/>
               <a:defRPr sz="2850" b="1">
                 <a:solidFill>
                   <a:srgbClr val="48CAE4"/>
@@ -26766,6 +25248,7 @@
           <a:lstStyle xmlns:a="http://schemas.openxmlformats.org/drawingml/2006/main"/>
           <a:p xmlns:a="http://schemas.openxmlformats.org/drawingml/2006/main">
             <a:pPr algn="l">
+              <a:buNone/>
               <a:defRPr sz="2025" b="1">
                 <a:solidFill>
                   <a:srgbClr val="F4F7FB"/>
@@ -26784,7 +25267,7 @@
                 <a:ea typeface="DejaVu Sans"/>
                 <a:cs typeface="DejaVu Sans"/>
               </a:rPr>
-              <a:t>Что предсказываем и для какого объекта?</a:t>
+              <a:t>Единица данных: одна партия</a:t>
             </a:r>
           </a:p>
         </p:txBody>
@@ -26885,6 +25368,7 @@
           <a:lstStyle xmlns:a="http://schemas.openxmlformats.org/drawingml/2006/main"/>
           <a:p xmlns:a="http://schemas.openxmlformats.org/drawingml/2006/main">
             <a:pPr algn="l">
+              <a:buNone/>
               <a:defRPr sz="2850" b="1">
                 <a:solidFill>
                   <a:srgbClr val="80ED99"/>
@@ -26942,6 +25426,7 @@
           <a:lstStyle xmlns:a="http://schemas.openxmlformats.org/drawingml/2006/main"/>
           <a:p xmlns:a="http://schemas.openxmlformats.org/drawingml/2006/main">
             <a:pPr algn="l">
+              <a:buNone/>
               <a:defRPr sz="2025" b="0">
                 <a:solidFill>
                   <a:srgbClr val="F4F7FB"/>
@@ -26960,7 +25445,7 @@
                 <a:ea typeface="DejaVu Sans"/>
                 <a:cs typeface="DejaVu Sans"/>
               </a:rPr>
-              <a:t>Какие входы доступны к моменту решения?</a:t>
+              <a:t>Модель обучена на прежних днях</a:t>
             </a:r>
           </a:p>
         </p:txBody>
@@ -27061,6 +25546,7 @@
           <a:lstStyle xmlns:a="http://schemas.openxmlformats.org/drawingml/2006/main"/>
           <a:p xmlns:a="http://schemas.openxmlformats.org/drawingml/2006/main">
             <a:pPr algn="l">
+              <a:buNone/>
               <a:defRPr sz="2850" b="1">
                 <a:solidFill>
                   <a:srgbClr val="C4A7FF"/>
@@ -27118,6 +25604,7 @@
           <a:lstStyle xmlns:a="http://schemas.openxmlformats.org/drawingml/2006/main"/>
           <a:p xmlns:a="http://schemas.openxmlformats.org/drawingml/2006/main">
             <a:pPr algn="l">
+              <a:buNone/>
               <a:defRPr sz="2025" b="0">
                 <a:solidFill>
                   <a:srgbClr val="F4F7FB"/>
@@ -27136,7 +25623,7 @@
                 <a:ea typeface="DejaVu Sans"/>
                 <a:cs typeface="DejaVu Sans"/>
               </a:rPr>
-              <a:t>На каких будущих партиях будет применяться модель?</a:t>
+              <a:t>Цель: ошибка на будущих днях</a:t>
             </a:r>
           </a:p>
         </p:txBody>
@@ -27207,6 +25694,7 @@
           <a:lstStyle xmlns:a="http://schemas.openxmlformats.org/drawingml/2006/main"/>
           <a:p xmlns:a="http://schemas.openxmlformats.org/drawingml/2006/main">
             <a:pPr algn="ctr">
+              <a:buNone/>
               <a:defRPr sz="1500" b="1">
                 <a:solidFill>
                   <a:srgbClr val="48CAE4"/>
@@ -27225,7 +25713,7 @@
                 <a:ea typeface="DejaVu Sans"/>
                 <a:cs typeface="DejaVu Sans"/>
               </a:rPr>
-              <a:t>Без этих ответов метрика мало что значит</a:t>
+              <a:t>Тест должен представлять будущие условия применения</a:t>
             </a:r>
           </a:p>
         </p:txBody>
@@ -27346,6 +25834,7 @@
           <a:lstStyle xmlns:a="http://schemas.openxmlformats.org/drawingml/2006/main"/>
           <a:p xmlns:a="http://schemas.openxmlformats.org/drawingml/2006/main">
             <a:pPr algn="l">
+              <a:buNone/>
               <a:defRPr sz="1050" b="1">
                 <a:solidFill>
                   <a:srgbClr val="48CAE4"/>
@@ -27364,7 +25853,7 @@
                 <a:ea typeface="DejaVu Sans"/>
                 <a:cs typeface="DejaVu Sans"/>
               </a:rPr>
-              <a:t>ПРИМЕР И ПРИМЕНЕНИЕ</a:t>
+              <a:t>ОБЛАСТЬ ПРИМЕНЕНИЯ</a:t>
             </a:r>
           </a:p>
         </p:txBody>
@@ -27403,6 +25892,7 @@
           <a:lstStyle xmlns:a="http://schemas.openxmlformats.org/drawingml/2006/main"/>
           <a:p xmlns:a="http://schemas.openxmlformats.org/drawingml/2006/main">
             <a:pPr algn="l">
+              <a:buNone/>
               <a:defRPr sz="2925" b="1">
                 <a:solidFill>
                   <a:srgbClr val="F4F7FB"/>
@@ -27421,7 +25911,7 @@
                 <a:ea typeface="DejaVu Sans"/>
                 <a:cs typeface="DejaVu Sans"/>
               </a:rPr>
-              <a:t>Пример: наноэмульсия</a:t>
+              <a:t>Сквозной пример: 12 кампаний</a:t>
             </a:r>
           </a:p>
         </p:txBody>
@@ -27490,6 +25980,7 @@
           <a:lstStyle xmlns:a="http://schemas.openxmlformats.org/drawingml/2006/main"/>
           <a:p xmlns:a="http://schemas.openxmlformats.org/drawingml/2006/main">
             <a:pPr algn="l">
+              <a:buNone/>
               <a:defRPr sz="825" b="1">
                 <a:solidFill>
                   <a:srgbClr val="A6B7C9"/>
@@ -27547,6 +26038,7 @@
           <a:lstStyle xmlns:a="http://schemas.openxmlformats.org/drawingml/2006/main"/>
           <a:p xmlns:a="http://schemas.openxmlformats.org/drawingml/2006/main">
             <a:pPr algn="r">
+              <a:buNone/>
               <a:defRPr sz="900" b="0">
                 <a:solidFill>
                   <a:srgbClr val="A6B7C9"/>
@@ -27666,6 +26158,7 @@
           <a:lstStyle xmlns:a="http://schemas.openxmlformats.org/drawingml/2006/main"/>
           <a:p xmlns:a="http://schemas.openxmlformats.org/drawingml/2006/main">
             <a:pPr algn="l">
+              <a:buNone/>
               <a:defRPr sz="2025" b="1">
                 <a:solidFill>
                   <a:srgbClr val="F4F7FB"/>
@@ -27684,7 +26177,7 @@
                 <a:ea typeface="DejaVu Sans"/>
                 <a:cs typeface="DejaVu Sans"/>
               </a:rPr>
-              <a:t>Рецептура: масло, ПАВ, температура</a:t>
+              <a:t>12 дней × 4 партии × 3 отсчёта = 144 измерения</a:t>
             </a:r>
           </a:p>
         </p:txBody>
@@ -27785,6 +26278,7 @@
           <a:lstStyle xmlns:a="http://schemas.openxmlformats.org/drawingml/2006/main"/>
           <a:p xmlns:a="http://schemas.openxmlformats.org/drawingml/2006/main">
             <a:pPr algn="l">
+              <a:buNone/>
               <a:defRPr sz="2025" b="0">
                 <a:solidFill>
                   <a:srgbClr val="F4F7FB"/>
@@ -27803,7 +26297,7 @@
                 <a:ea typeface="DejaVu Sans"/>
                 <a:cs typeface="DejaVu Sans"/>
               </a:rPr>
-              <a:t>Цель: диаметр частиц в нм</a:t>
+              <a:t>После агрегации: 48 строк для регрессии</a:t>
             </a:r>
           </a:p>
         </p:txBody>
@@ -27904,6 +26398,7 @@
           <a:lstStyle xmlns:a="http://schemas.openxmlformats.org/drawingml/2006/main"/>
           <a:p xmlns:a="http://schemas.openxmlformats.org/drawingml/2006/main">
             <a:pPr algn="l">
+              <a:buNone/>
               <a:defRPr sz="2025" b="0">
                 <a:solidFill>
                   <a:srgbClr val="F4F7FB"/>
@@ -27922,7 +26417,7 @@
                 <a:ea typeface="DejaVu Sans"/>
                 <a:cs typeface="DejaVu Sans"/>
               </a:rPr>
-              <a:t>Группы: независимо приготовленные партии</a:t>
+              <a:t>Обучение: 40 партий; тест: 8 партий</a:t>
             </a:r>
           </a:p>
         </p:txBody>
@@ -27993,6 +26488,7 @@
           <a:lstStyle xmlns:a="http://schemas.openxmlformats.org/drawingml/2006/main"/>
           <a:p xmlns:a="http://schemas.openxmlformats.org/drawingml/2006/main">
             <a:pPr algn="ctr">
+              <a:buNone/>
               <a:defRPr sz="1500" b="1">
                 <a:solidFill>
                   <a:srgbClr val="48CAE4"/>
@@ -28011,7 +26507,7 @@
                 <a:ea typeface="DejaVu Sans"/>
                 <a:cs typeface="DejaVu Sans"/>
               </a:rPr>
-              <a:t>Искусственные данные демонстрируют метод, а не закономерность материала</a:t>
+              <a:t>Числа генератора искусственные, не физический закон</a:t>
             </a:r>
           </a:p>
         </p:txBody>
@@ -28132,6 +26628,7 @@
           <a:lstStyle xmlns:a="http://schemas.openxmlformats.org/drawingml/2006/main"/>
           <a:p xmlns:a="http://schemas.openxmlformats.org/drawingml/2006/main">
             <a:pPr algn="l">
+              <a:buNone/>
               <a:defRPr sz="1050" b="1">
                 <a:solidFill>
                   <a:srgbClr val="48CAE4"/>
@@ -28150,7 +26647,7 @@
                 <a:ea typeface="DejaVu Sans"/>
                 <a:cs typeface="DejaVu Sans"/>
               </a:rPr>
-              <a:t>ПРАКТИЧЕСКИЙ ВЫВОД</a:t>
+              <a:t>ОБЛАСТЬ ПРИМЕНЕНИЯ</a:t>
             </a:r>
           </a:p>
         </p:txBody>
@@ -28189,6 +26686,7 @@
           <a:lstStyle xmlns:a="http://schemas.openxmlformats.org/drawingml/2006/main"/>
           <a:p xmlns:a="http://schemas.openxmlformats.org/drawingml/2006/main">
             <a:pPr algn="l">
+              <a:buNone/>
               <a:defRPr sz="2925" b="1">
                 <a:solidFill>
                   <a:srgbClr val="F4F7FB"/>
@@ -28207,7 +26705,7 @@
                 <a:ea typeface="DejaVu Sans"/>
                 <a:cs typeface="DejaVu Sans"/>
               </a:rPr>
-              <a:t>Как выглядит групповой код</a:t>
+              <a:t>Проверки в коде до обучения</a:t>
             </a:r>
           </a:p>
         </p:txBody>
@@ -28276,6 +26774,7 @@
           <a:lstStyle xmlns:a="http://schemas.openxmlformats.org/drawingml/2006/main"/>
           <a:p xmlns:a="http://schemas.openxmlformats.org/drawingml/2006/main">
             <a:pPr algn="l">
+              <a:buNone/>
               <a:defRPr sz="825" b="1">
                 <a:solidFill>
                   <a:srgbClr val="A6B7C9"/>
@@ -28333,6 +26832,7 @@
           <a:lstStyle xmlns:a="http://schemas.openxmlformats.org/drawingml/2006/main"/>
           <a:p xmlns:a="http://schemas.openxmlformats.org/drawingml/2006/main">
             <a:pPr algn="r">
+              <a:buNone/>
               <a:defRPr sz="900" b="0">
                 <a:solidFill>
                   <a:srgbClr val="A6B7C9"/>
@@ -28390,6 +26890,7 @@
           <a:lstStyle xmlns:a="http://schemas.openxmlformats.org/drawingml/2006/main"/>
           <a:p xmlns:a="http://schemas.openxmlformats.org/drawingml/2006/main">
             <a:pPr algn="l">
+              <a:buNone/>
               <a:defRPr sz="3825" b="1">
                 <a:solidFill>
                   <a:srgbClr val="48CAE4"/>
@@ -28477,6 +26978,7 @@
           <a:lstStyle xmlns:a="http://schemas.openxmlformats.org/drawingml/2006/main"/>
           <a:p xmlns:a="http://schemas.openxmlformats.org/drawingml/2006/main">
             <a:pPr algn="l">
+              <a:buNone/>
               <a:defRPr sz="1875" b="1">
                 <a:solidFill>
                   <a:srgbClr val="F4F7FB"/>
@@ -28495,7 +26997,7 @@
                 <a:ea typeface="DejaVu Sans"/>
                 <a:cs typeface="DejaVu Sans"/>
               </a:rPr>
-              <a:t>GroupShuffleSplit отделяет новые партии</a:t>
+              <a:t>batch_id уникален в таблице партий</a:t>
             </a:r>
           </a:p>
         </p:txBody>
@@ -28534,6 +27036,7 @@
           <a:lstStyle xmlns:a="http://schemas.openxmlformats.org/drawingml/2006/main"/>
           <a:p xmlns:a="http://schemas.openxmlformats.org/drawingml/2006/main">
             <a:pPr algn="l">
+              <a:buNone/>
               <a:defRPr sz="3825" b="1">
                 <a:solidFill>
                   <a:srgbClr val="80ED99"/>
@@ -28621,6 +27124,7 @@
           <a:lstStyle xmlns:a="http://schemas.openxmlformats.org/drawingml/2006/main"/>
           <a:p xmlns:a="http://schemas.openxmlformats.org/drawingml/2006/main">
             <a:pPr algn="l">
+              <a:buNone/>
               <a:defRPr sz="1875" b="0">
                 <a:solidFill>
                   <a:srgbClr val="F4F7FB"/>
@@ -28639,7 +27143,7 @@
                 <a:ea typeface="DejaVu Sans"/>
                 <a:cs typeface="DejaVu Sans"/>
               </a:rPr>
-              <a:t>GroupKFold перебирает группы внутри разработки</a:t>
+              <a:t>ID дней разработки и теста не пересекаются</a:t>
             </a:r>
           </a:p>
         </p:txBody>
@@ -28678,6 +27182,7 @@
           <a:lstStyle xmlns:a="http://schemas.openxmlformats.org/drawingml/2006/main"/>
           <a:p xmlns:a="http://schemas.openxmlformats.org/drawingml/2006/main">
             <a:pPr algn="l">
+              <a:buNone/>
               <a:defRPr sz="3825" b="1">
                 <a:solidFill>
                   <a:srgbClr val="C4A7FF"/>
@@ -28765,6 +27270,7 @@
           <a:lstStyle xmlns:a="http://schemas.openxmlformats.org/drawingml/2006/main"/>
           <a:p xmlns:a="http://schemas.openxmlformats.org/drawingml/2006/main">
             <a:pPr algn="l">
+              <a:buNone/>
               <a:defRPr sz="1875" b="0">
                 <a:solidFill>
                   <a:srgbClr val="F4F7FB"/>
@@ -28783,7 +27289,7 @@
                 <a:ea typeface="DejaVu Sans"/>
                 <a:cs typeface="DejaVu Sans"/>
               </a:rPr>
-              <a:t>assert проверяет непересечение ID</a:t>
+              <a:t>В каждой складке также сверяются ID дней</a:t>
             </a:r>
           </a:p>
         </p:txBody>
@@ -28854,6 +27360,7 @@
           <a:lstStyle xmlns:a="http://schemas.openxmlformats.org/drawingml/2006/main"/>
           <a:p xmlns:a="http://schemas.openxmlformats.org/drawingml/2006/main">
             <a:pPr algn="ctr">
+              <a:buNone/>
               <a:defRPr sz="1500" b="1">
                 <a:solidFill>
                   <a:srgbClr val="48CAE4"/>
@@ -28872,7 +27379,7 @@
                 <a:ea typeface="DejaVu Sans"/>
                 <a:cs typeface="DejaVu Sans"/>
               </a:rPr>
-              <a:t>Проверка ID ловит ошибку до обсуждения качества модели</a:t>
+              <a:t>Хронологический тест не подбирают по seed</a:t>
             </a:r>
           </a:p>
         </p:txBody>
@@ -28993,6 +27500,7 @@
           <a:lstStyle xmlns:a="http://schemas.openxmlformats.org/drawingml/2006/main"/>
           <a:p xmlns:a="http://schemas.openxmlformats.org/drawingml/2006/main">
             <a:pPr algn="l">
+              <a:buNone/>
               <a:defRPr sz="1050" b="1">
                 <a:solidFill>
                   <a:srgbClr val="48CAE4"/>
@@ -29011,7 +27519,7 @@
                 <a:ea typeface="DejaVu Sans"/>
                 <a:cs typeface="DejaVu Sans"/>
               </a:rPr>
-              <a:t>ПОСТАНОВКА И МЕТОД</a:t>
+              <a:t>ОБЛАСТЬ ПРИМЕНЕНИЯ</a:t>
             </a:r>
           </a:p>
         </p:txBody>
@@ -29050,6 +27558,7 @@
           <a:lstStyle xmlns:a="http://schemas.openxmlformats.org/drawingml/2006/main"/>
           <a:p xmlns:a="http://schemas.openxmlformats.org/drawingml/2006/main">
             <a:pPr algn="l">
+              <a:buNone/>
               <a:defRPr sz="2925" b="1">
                 <a:solidFill>
                   <a:srgbClr val="F4F7FB"/>
@@ -29068,7 +27577,7 @@
                 <a:ea typeface="DejaVu Sans"/>
                 <a:cs typeface="DejaVu Sans"/>
               </a:rPr>
-              <a:t>Как выбрать признак спектра</a:t>
+              <a:t>Настройка без доступа к тесту</a:t>
             </a:r>
           </a:p>
         </p:txBody>
@@ -29137,6 +27646,7 @@
           <a:lstStyle xmlns:a="http://schemas.openxmlformats.org/drawingml/2006/main"/>
           <a:p xmlns:a="http://schemas.openxmlformats.org/drawingml/2006/main">
             <a:pPr algn="l">
+              <a:buNone/>
               <a:defRPr sz="825" b="1">
                 <a:solidFill>
                   <a:srgbClr val="A6B7C9"/>
@@ -29194,6 +27704,7 @@
           <a:lstStyle xmlns:a="http://schemas.openxmlformats.org/drawingml/2006/main"/>
           <a:p xmlns:a="http://schemas.openxmlformats.org/drawingml/2006/main">
             <a:pPr algn="r">
+              <a:buNone/>
               <a:defRPr sz="900" b="0">
                 <a:solidFill>
                   <a:srgbClr val="A6B7C9"/>
@@ -29251,6 +27762,7 @@
           <a:lstStyle xmlns:a="http://schemas.openxmlformats.org/drawingml/2006/main"/>
           <a:p xmlns:a="http://schemas.openxmlformats.org/drawingml/2006/main">
             <a:pPr algn="l">
+              <a:buNone/>
               <a:defRPr sz="2400" b="1">
                 <a:solidFill>
                   <a:srgbClr val="48CAE4"/>
@@ -29308,6 +27820,7 @@
           <a:lstStyle xmlns:a="http://schemas.openxmlformats.org/drawingml/2006/main"/>
           <a:p xmlns:a="http://schemas.openxmlformats.org/drawingml/2006/main">
             <a:pPr algn="l">
+              <a:buNone/>
               <a:defRPr sz="2025" b="1">
                 <a:solidFill>
                   <a:srgbClr val="F4F7FB"/>
@@ -29326,7 +27839,7 @@
                 <a:ea typeface="DejaVu Sans"/>
                 <a:cs typeface="DejaVu Sans"/>
               </a:rPr>
-              <a:t>Физический пик и его единицы фиксируются в протоколе</a:t>
+              <a:t>Четыре заранее выбранных значения alpha</a:t>
             </a:r>
           </a:p>
         </p:txBody>
@@ -29395,6 +27908,7 @@
           <a:lstStyle xmlns:a="http://schemas.openxmlformats.org/drawingml/2006/main"/>
           <a:p xmlns:a="http://schemas.openxmlformats.org/drawingml/2006/main">
             <a:pPr algn="l">
+              <a:buNone/>
               <a:defRPr sz="2400" b="1">
                 <a:solidFill>
                   <a:srgbClr val="80ED99"/>
@@ -29452,6 +27966,7 @@
           <a:lstStyle xmlns:a="http://schemas.openxmlformats.org/drawingml/2006/main"/>
           <a:p xmlns:a="http://schemas.openxmlformats.org/drawingml/2006/main">
             <a:pPr algn="l">
+              <a:buNone/>
               <a:defRPr sz="2025" b="0">
                 <a:solidFill>
                   <a:srgbClr val="F4F7FB"/>
@@ -29470,7 +27985,7 @@
                 <a:ea typeface="DejaVu Sans"/>
                 <a:cs typeface="DejaVu Sans"/>
               </a:rPr>
-              <a:t>Подбор каналов по всей y запрещён</a:t>
+              <a:t>5 складок по двум дням для выбора</a:t>
             </a:r>
           </a:p>
         </p:txBody>
@@ -29539,6 +28054,7 @@
           <a:lstStyle xmlns:a="http://schemas.openxmlformats.org/drawingml/2006/main"/>
           <a:p xmlns:a="http://schemas.openxmlformats.org/drawingml/2006/main">
             <a:pPr algn="l">
+              <a:buNone/>
               <a:defRPr sz="2400" b="1">
                 <a:solidFill>
                   <a:srgbClr val="C4A7FF"/>
@@ -29596,6 +28112,7 @@
           <a:lstStyle xmlns:a="http://schemas.openxmlformats.org/drawingml/2006/main"/>
           <a:p xmlns:a="http://schemas.openxmlformats.org/drawingml/2006/main">
             <a:pPr algn="l">
+              <a:buNone/>
               <a:defRPr sz="2025" b="0">
                 <a:solidFill>
                   <a:srgbClr val="F4F7FB"/>
@@ -29614,7 +28131,7 @@
                 <a:ea typeface="DejaVu Sans"/>
                 <a:cs typeface="DejaVu Sans"/>
               </a:rPr>
-              <a:t>Изменяемый отбор длины волны переносится в CV</a:t>
+              <a:t>GridSearchCV заново обучает Pipeline</a:t>
             </a:r>
           </a:p>
         </p:txBody>
@@ -29715,6 +28232,7 @@
           <a:lstStyle xmlns:a="http://schemas.openxmlformats.org/drawingml/2006/main"/>
           <a:p xmlns:a="http://schemas.openxmlformats.org/drawingml/2006/main">
             <a:pPr algn="ctr">
+              <a:buNone/>
               <a:defRPr sz="1500" b="1">
                 <a:solidFill>
                   <a:srgbClr val="48CAE4"/>
@@ -29733,7 +28251,7 @@
                 <a:ea typeface="DejaVu Sans"/>
                 <a:cs typeface="DejaVu Sans"/>
               </a:rPr>
-              <a:t>Сначала решите, доступен ли спектр к моменту прогноза</a:t>
+              <a:t>best_score_ выбирает модель, но не оценивает победителя</a:t>
             </a:r>
           </a:p>
         </p:txBody>
@@ -29854,6 +28372,7 @@
           <a:lstStyle xmlns:a="http://schemas.openxmlformats.org/drawingml/2006/main"/>
           <a:p xmlns:a="http://schemas.openxmlformats.org/drawingml/2006/main">
             <a:pPr algn="l">
+              <a:buNone/>
               <a:defRPr sz="1050" b="1">
                 <a:solidFill>
                   <a:srgbClr val="48CAE4"/>
@@ -29872,7 +28391,7 @@
                 <a:ea typeface="DejaVu Sans"/>
                 <a:cs typeface="DejaVu Sans"/>
               </a:rPr>
-              <a:t>ТРИ ОПОРНЫХ ПУНКТА</a:t>
+              <a:t>ОБЛАСТЬ ПРИМЕНЕНИЯ</a:t>
             </a:r>
           </a:p>
         </p:txBody>
@@ -29911,6 +28430,7 @@
           <a:lstStyle xmlns:a="http://schemas.openxmlformats.org/drawingml/2006/main"/>
           <a:p xmlns:a="http://schemas.openxmlformats.org/drawingml/2006/main">
             <a:pPr algn="l">
+              <a:buNone/>
               <a:defRPr sz="2925" b="1">
                 <a:solidFill>
                   <a:srgbClr val="F4F7FB"/>
@@ -29929,7 +28449,7 @@
                 <a:ea typeface="DejaVu Sans"/>
                 <a:cs typeface="DejaVu Sans"/>
               </a:rPr>
-              <a:t>Когда данных мало</a:t>
+              <a:t>Ограничения восьми тестовых партий</a:t>
             </a:r>
           </a:p>
         </p:txBody>
@@ -29998,6 +28518,7 @@
           <a:lstStyle xmlns:a="http://schemas.openxmlformats.org/drawingml/2006/main"/>
           <a:p xmlns:a="http://schemas.openxmlformats.org/drawingml/2006/main">
             <a:pPr algn="l">
+              <a:buNone/>
               <a:defRPr sz="825" b="1">
                 <a:solidFill>
                   <a:srgbClr val="A6B7C9"/>
@@ -30055,6 +28576,7 @@
           <a:lstStyle xmlns:a="http://schemas.openxmlformats.org/drawingml/2006/main"/>
           <a:p xmlns:a="http://schemas.openxmlformats.org/drawingml/2006/main">
             <a:pPr algn="r">
+              <a:buNone/>
               <a:defRPr sz="900" b="0">
                 <a:solidFill>
                   <a:srgbClr val="A6B7C9"/>
@@ -30174,6 +28696,7 @@
           <a:lstStyle xmlns:a="http://schemas.openxmlformats.org/drawingml/2006/main"/>
           <a:p xmlns:a="http://schemas.openxmlformats.org/drawingml/2006/main">
             <a:pPr algn="l">
+              <a:buNone/>
               <a:defRPr sz="2850" b="1">
                 <a:solidFill>
                   <a:srgbClr val="48CAE4"/>
@@ -30231,6 +28754,7 @@
           <a:lstStyle xmlns:a="http://schemas.openxmlformats.org/drawingml/2006/main"/>
           <a:p xmlns:a="http://schemas.openxmlformats.org/drawingml/2006/main">
             <a:pPr algn="l">
+              <a:buNone/>
               <a:defRPr sz="2025" b="1">
                 <a:solidFill>
                   <a:srgbClr val="F4F7FB"/>
@@ -30249,7 +28773,7 @@
                 <a:ea typeface="DejaVu Sans"/>
                 <a:cs typeface="DejaVu Sans"/>
               </a:rPr>
-              <a:t>Не сокращайте требования к независимости</a:t>
+              <a:t>Покажите все восемь факт–прогноз–ошибка</a:t>
             </a:r>
           </a:p>
         </p:txBody>
@@ -30350,6 +28874,7 @@
           <a:lstStyle xmlns:a="http://schemas.openxmlformats.org/drawingml/2006/main"/>
           <a:p xmlns:a="http://schemas.openxmlformats.org/drawingml/2006/main">
             <a:pPr algn="l">
+              <a:buNone/>
               <a:defRPr sz="2850" b="1">
                 <a:solidFill>
                   <a:srgbClr val="80ED99"/>
@@ -30407,6 +28932,7 @@
           <a:lstStyle xmlns:a="http://schemas.openxmlformats.org/drawingml/2006/main"/>
           <a:p xmlns:a="http://schemas.openxmlformats.org/drawingml/2006/main">
             <a:pPr algn="l">
+              <a:buNone/>
               <a:defRPr sz="2025" b="0">
                 <a:solidFill>
                   <a:srgbClr val="F4F7FB"/>
@@ -30425,7 +28951,7 @@
                 <a:ea typeface="DejaVu Sans"/>
                 <a:cs typeface="DejaVu Sans"/>
               </a:rPr>
-              <a:t>Покажите ошибки по отдельным партиям</a:t>
+              <a:t>Средняя ошибка может зависеть от двух дней</a:t>
             </a:r>
           </a:p>
         </p:txBody>
@@ -30526,6 +29052,7 @@
           <a:lstStyle xmlns:a="http://schemas.openxmlformats.org/drawingml/2006/main"/>
           <a:p xmlns:a="http://schemas.openxmlformats.org/drawingml/2006/main">
             <a:pPr algn="l">
+              <a:buNone/>
               <a:defRPr sz="2850" b="1">
                 <a:solidFill>
                   <a:srgbClr val="C4A7FF"/>
@@ -30583,6 +29110,7 @@
           <a:lstStyle xmlns:a="http://schemas.openxmlformats.org/drawingml/2006/main"/>
           <a:p xmlns:a="http://schemas.openxmlformats.org/drawingml/2006/main">
             <a:pPr algn="l">
+              <a:buNone/>
               <a:defRPr sz="2025" b="0">
                 <a:solidFill>
                   <a:srgbClr val="F4F7FB"/>
@@ -30601,7 +29129,7 @@
                 <a:ea typeface="DejaVu Sans"/>
                 <a:cs typeface="DejaVu Sans"/>
               </a:rPr>
-              <a:t>Спланируйте новые партии для проверки и обучения</a:t>
+              <a:t>Для нового прибора и сырья данных нет</a:t>
             </a:r>
           </a:p>
         </p:txBody>
@@ -30672,6 +29200,7 @@
           <a:lstStyle xmlns:a="http://schemas.openxmlformats.org/drawingml/2006/main"/>
           <a:p xmlns:a="http://schemas.openxmlformats.org/drawingml/2006/main">
             <a:pPr algn="ctr">
+              <a:buNone/>
               <a:defRPr sz="1500" b="1">
                 <a:solidFill>
                   <a:srgbClr val="48CAE4"/>
@@ -30690,7 +29219,7 @@
                 <a:ea typeface="DejaVu Sans"/>
                 <a:cs typeface="DejaVu Sans"/>
               </a:rPr>
-              <a:t>Дополнительные технические повторы не заменяют независимый синтез</a:t>
+              <a:t>Следующий шаг — новые независимые кампании</a:t>
             </a:r>
           </a:p>
         </p:txBody>
@@ -30811,6 +29340,7 @@
           <a:lstStyle xmlns:a="http://schemas.openxmlformats.org/drawingml/2006/main"/>
           <a:p xmlns:a="http://schemas.openxmlformats.org/drawingml/2006/main">
             <a:pPr algn="l">
+              <a:buNone/>
               <a:defRPr sz="1050" b="1">
                 <a:solidFill>
                   <a:srgbClr val="48CAE4"/>
@@ -30829,7 +29359,7 @@
                 <a:ea typeface="DejaVu Sans"/>
                 <a:cs typeface="DejaVu Sans"/>
               </a:rPr>
-              <a:t>ПРОВЕРКА И ИНТЕРПРЕТАЦИЯ</a:t>
+              <a:t>ОБЛАСТЬ ПРИМЕНЕНИЯ</a:t>
             </a:r>
           </a:p>
         </p:txBody>
@@ -30868,6 +29398,7 @@
           <a:lstStyle xmlns:a="http://schemas.openxmlformats.org/drawingml/2006/main"/>
           <a:p xmlns:a="http://schemas.openxmlformats.org/drawingml/2006/main">
             <a:pPr algn="l">
+              <a:buNone/>
               <a:defRPr sz="2925" b="1">
                 <a:solidFill>
                   <a:srgbClr val="F4F7FB"/>
@@ -30886,7 +29417,7 @@
                 <a:ea typeface="DejaVu Sans"/>
                 <a:cs typeface="DejaVu Sans"/>
               </a:rPr>
-              <a:t>Где нужен план эксперимента</a:t>
+              <a:t>Прогноз не определяет эффект фактора</a:t>
             </a:r>
           </a:p>
         </p:txBody>
@@ -30955,6 +29486,7 @@
           <a:lstStyle xmlns:a="http://schemas.openxmlformats.org/drawingml/2006/main"/>
           <a:p xmlns:a="http://schemas.openxmlformats.org/drawingml/2006/main">
             <a:pPr algn="l">
+              <a:buNone/>
               <a:defRPr sz="825" b="1">
                 <a:solidFill>
                   <a:srgbClr val="A6B7C9"/>
@@ -31012,6 +29544,7 @@
           <a:lstStyle xmlns:a="http://schemas.openxmlformats.org/drawingml/2006/main"/>
           <a:p xmlns:a="http://schemas.openxmlformats.org/drawingml/2006/main">
             <a:pPr algn="r">
+              <a:buNone/>
               <a:defRPr sz="900" b="0">
                 <a:solidFill>
                   <a:srgbClr val="A6B7C9"/>
@@ -31131,6 +29664,7 @@
           <a:lstStyle xmlns:a="http://schemas.openxmlformats.org/drawingml/2006/main"/>
           <a:p xmlns:a="http://schemas.openxmlformats.org/drawingml/2006/main">
             <a:pPr algn="l">
+              <a:buNone/>
               <a:defRPr sz="1875" b="0">
                 <a:solidFill>
                   <a:srgbClr val="F4F7FB"/>
@@ -31149,7 +29683,7 @@
                 <a:ea typeface="DejaVu Sans"/>
                 <a:cs typeface="DejaVu Sans"/>
               </a:rPr>
-              <a:t>Если факторы жёстко коррелированы, модель не разделит их эффекты</a:t>
+              <a:t>Время обработки и состав могут быть смешаны</a:t>
             </a:r>
           </a:p>
         </p:txBody>
@@ -31218,6 +29752,7 @@
           <a:lstStyle xmlns:a="http://schemas.openxmlformats.org/drawingml/2006/main"/>
           <a:p xmlns:a="http://schemas.openxmlformats.org/drawingml/2006/main">
             <a:pPr algn="l">
+              <a:buNone/>
               <a:defRPr sz="1875" b="0">
                 <a:solidFill>
                   <a:srgbClr val="F4F7FB"/>
@@ -31236,7 +29771,7 @@
                 <a:ea typeface="DejaVu Sans"/>
                 <a:cs typeface="DejaVu Sans"/>
               </a:rPr>
-              <a:t>Факторный план исследует разрешённые комбинации</a:t>
+              <a:t>Значимый коэффициент не доказывает механизм</a:t>
             </a:r>
           </a:p>
         </p:txBody>
@@ -31305,6 +29840,7 @@
           <a:lstStyle xmlns:a="http://schemas.openxmlformats.org/drawingml/2006/main"/>
           <a:p xmlns:a="http://schemas.openxmlformats.org/drawingml/2006/main">
             <a:pPr algn="l">
+              <a:buNone/>
               <a:defRPr sz="1875" b="0">
                 <a:solidFill>
                   <a:srgbClr val="F4F7FB"/>
@@ -31323,7 +29859,7 @@
                 <a:ea typeface="DejaVu Sans"/>
                 <a:cs typeface="DejaVu Sans"/>
               </a:rPr>
-              <a:t>Рандомизация и блоки помогают интерпретации</a:t>
+              <a:t>Факторный опыт меняет факторы по плану</a:t>
             </a:r>
           </a:p>
         </p:txBody>
@@ -31362,6 +29898,7 @@
           <a:lstStyle xmlns:a="http://schemas.openxmlformats.org/drawingml/2006/main"/>
           <a:p xmlns:a="http://schemas.openxmlformats.org/drawingml/2006/main">
             <a:pPr algn="l">
+              <a:buNone/>
               <a:defRPr sz="1275" b="1">
                 <a:solidFill>
                   <a:srgbClr val="48CAE4"/>
@@ -31419,6 +29956,7 @@
           <a:lstStyle xmlns:a="http://schemas.openxmlformats.org/drawingml/2006/main"/>
           <a:p xmlns:a="http://schemas.openxmlformats.org/drawingml/2006/main">
             <a:pPr algn="l">
+              <a:buNone/>
               <a:defRPr sz="2025" b="1">
                 <a:solidFill>
                   <a:srgbClr val="F4F7FB"/>
@@ -31437,7 +29975,7 @@
                 <a:ea typeface="DejaVu Sans"/>
                 <a:cs typeface="DejaVu Sans"/>
               </a:rPr>
-              <a:t>Прогнозная связь не устанавливает причинность</a:t>
+              <a:t>Причинный вывод требует отдельного дизайна</a:t>
             </a:r>
           </a:p>
         </p:txBody>
@@ -31558,6 +30096,7 @@
           <a:lstStyle xmlns:a="http://schemas.openxmlformats.org/drawingml/2006/main"/>
           <a:p xmlns:a="http://schemas.openxmlformats.org/drawingml/2006/main">
             <a:pPr algn="l">
+              <a:buNone/>
               <a:defRPr sz="1050" b="1">
                 <a:solidFill>
                   <a:srgbClr val="48CAE4"/>
@@ -31576,7 +30115,7 @@
                 <a:ea typeface="DejaVu Sans"/>
                 <a:cs typeface="DejaVu Sans"/>
               </a:rPr>
-              <a:t>ПРИМЕР И ПРИМЕНЕНИЕ</a:t>
+              <a:t>ОБЛАСТЬ ПРИМЕНЕНИЯ</a:t>
             </a:r>
           </a:p>
         </p:txBody>
@@ -31615,6 +30154,7 @@
           <a:lstStyle xmlns:a="http://schemas.openxmlformats.org/drawingml/2006/main"/>
           <a:p xmlns:a="http://schemas.openxmlformats.org/drawingml/2006/main">
             <a:pPr algn="l">
+              <a:buNone/>
               <a:defRPr sz="2925" b="1">
                 <a:solidFill>
                   <a:srgbClr val="F4F7FB"/>
@@ -31633,7 +30173,7 @@
                 <a:ea typeface="DejaVu Sans"/>
                 <a:cs typeface="DejaVu Sans"/>
               </a:rPr>
-              <a:t>Паспорт модели для передачи</a:t>
+              <a:t>Паспорт области применения</a:t>
             </a:r>
           </a:p>
         </p:txBody>
@@ -31702,6 +30242,7 @@
           <a:lstStyle xmlns:a="http://schemas.openxmlformats.org/drawingml/2006/main"/>
           <a:p xmlns:a="http://schemas.openxmlformats.org/drawingml/2006/main">
             <a:pPr algn="l">
+              <a:buNone/>
               <a:defRPr sz="825" b="1">
                 <a:solidFill>
                   <a:srgbClr val="A6B7C9"/>
@@ -31759,6 +30300,7 @@
           <a:lstStyle xmlns:a="http://schemas.openxmlformats.org/drawingml/2006/main"/>
           <a:p xmlns:a="http://schemas.openxmlformats.org/drawingml/2006/main">
             <a:pPr algn="r">
+              <a:buNone/>
               <a:defRPr sz="900" b="0">
                 <a:solidFill>
                   <a:srgbClr val="A6B7C9"/>
@@ -31878,6 +30420,7 @@
           <a:lstStyle xmlns:a="http://schemas.openxmlformats.org/drawingml/2006/main"/>
           <a:p xmlns:a="http://schemas.openxmlformats.org/drawingml/2006/main">
             <a:pPr algn="l">
+              <a:buNone/>
               <a:defRPr sz="2025" b="1">
                 <a:solidFill>
                   <a:srgbClr val="F4F7FB"/>
@@ -31896,7 +30439,7 @@
                 <a:ea typeface="DejaVu Sans"/>
                 <a:cs typeface="DejaVu Sans"/>
               </a:rPr>
-              <a:t>Цель, единицы, момент и входные поля</a:t>
+              <a:t>Масла, интервалы долей и времени</a:t>
             </a:r>
           </a:p>
         </p:txBody>
@@ -31997,6 +30540,7 @@
           <a:lstStyle xmlns:a="http://schemas.openxmlformats.org/drawingml/2006/main"/>
           <a:p xmlns:a="http://schemas.openxmlformats.org/drawingml/2006/main">
             <a:pPr algn="l">
+              <a:buNone/>
               <a:defRPr sz="2025" b="0">
                 <a:solidFill>
                   <a:srgbClr val="F4F7FB"/>
@@ -32015,7 +30559,7 @@
                 <a:ea typeface="DejaVu Sans"/>
                 <a:cs typeface="DejaVu Sans"/>
               </a:rPr>
-              <a:t>Число групп, способ разбиения и baseline</a:t>
+              <a:t>Покрытие сочетаний факторов, даты, прибор</a:t>
             </a:r>
           </a:p>
         </p:txBody>
@@ -32116,6 +30660,7 @@
           <a:lstStyle xmlns:a="http://schemas.openxmlformats.org/drawingml/2006/main"/>
           <a:p xmlns:a="http://schemas.openxmlformats.org/drawingml/2006/main">
             <a:pPr algn="l">
+              <a:buNone/>
               <a:defRPr sz="2025" b="0">
                 <a:solidFill>
                   <a:srgbClr val="F4F7FB"/>
@@ -32134,7 +30679,7 @@
                 <a:ea typeface="DejaVu Sans"/>
                 <a:cs typeface="DejaVu Sans"/>
               </a:rPr>
-              <a:t>Ошибка по подгруппам и границы применимости</a:t>
+              <a:t>MAE по дням и число независимых кампаний</a:t>
             </a:r>
           </a:p>
         </p:txBody>
@@ -32205,6 +30750,7 @@
           <a:lstStyle xmlns:a="http://schemas.openxmlformats.org/drawingml/2006/main"/>
           <a:p xmlns:a="http://schemas.openxmlformats.org/drawingml/2006/main">
             <a:pPr algn="ctr">
+              <a:buNone/>
               <a:defRPr sz="1500" b="1">
                 <a:solidFill>
                   <a:srgbClr val="48CAE4"/>
@@ -32223,7 +30769,7 @@
                 <a:ea typeface="DejaVu Sans"/>
                 <a:cs typeface="DejaVu Sans"/>
               </a:rPr>
-              <a:t>Только такая запись позволяет повторить проверку</a:t>
+              <a:t>Флаг вне изученной области требует проверки</a:t>
             </a:r>
           </a:p>
         </p:txBody>
@@ -32344,6 +30890,7 @@
           <a:lstStyle xmlns:a="http://schemas.openxmlformats.org/drawingml/2006/main"/>
           <a:p xmlns:a="http://schemas.openxmlformats.org/drawingml/2006/main">
             <a:pPr algn="l">
+              <a:buNone/>
               <a:defRPr sz="1050" b="1">
                 <a:solidFill>
                   <a:srgbClr val="48CAE4"/>
@@ -32362,7 +30909,7 @@
                 <a:ea typeface="DejaVu Sans"/>
                 <a:cs typeface="DejaVu Sans"/>
               </a:rPr>
-              <a:t>ПРАКТИЧЕСКИЙ ВЫВОД</a:t>
+              <a:t>ПРАКТИКА</a:t>
             </a:r>
           </a:p>
         </p:txBody>
@@ -32401,6 +30948,7 @@
           <a:lstStyle xmlns:a="http://schemas.openxmlformats.org/drawingml/2006/main"/>
           <a:p xmlns:a="http://schemas.openxmlformats.org/drawingml/2006/main">
             <a:pPr algn="l">
+              <a:buNone/>
               <a:defRPr sz="2925" b="1">
                 <a:solidFill>
                   <a:srgbClr val="F4F7FB"/>
@@ -32488,6 +31036,7 @@
           <a:lstStyle xmlns:a="http://schemas.openxmlformats.org/drawingml/2006/main"/>
           <a:p xmlns:a="http://schemas.openxmlformats.org/drawingml/2006/main">
             <a:pPr algn="l">
+              <a:buNone/>
               <a:defRPr sz="825" b="1">
                 <a:solidFill>
                   <a:srgbClr val="A6B7C9"/>
@@ -32545,6 +31094,7 @@
           <a:lstStyle xmlns:a="http://schemas.openxmlformats.org/drawingml/2006/main"/>
           <a:p xmlns:a="http://schemas.openxmlformats.org/drawingml/2006/main">
             <a:pPr algn="r">
+              <a:buNone/>
               <a:defRPr sz="900" b="0">
                 <a:solidFill>
                   <a:srgbClr val="A6B7C9"/>
@@ -32602,6 +31152,7 @@
           <a:lstStyle xmlns:a="http://schemas.openxmlformats.org/drawingml/2006/main"/>
           <a:p xmlns:a="http://schemas.openxmlformats.org/drawingml/2006/main">
             <a:pPr algn="l">
+              <a:buNone/>
               <a:defRPr sz="3825" b="1">
                 <a:solidFill>
                   <a:srgbClr val="48CAE4"/>
@@ -32689,6 +31240,7 @@
           <a:lstStyle xmlns:a="http://schemas.openxmlformats.org/drawingml/2006/main"/>
           <a:p xmlns:a="http://schemas.openxmlformats.org/drawingml/2006/main">
             <a:pPr algn="l">
+              <a:buNone/>
               <a:defRPr sz="1875" b="1">
                 <a:solidFill>
                   <a:srgbClr val="F4F7FB"/>
@@ -32707,7 +31259,7 @@
                 <a:ea typeface="DejaVu Sans"/>
                 <a:cs typeface="DejaVu Sans"/>
               </a:rPr>
-              <a:t>Сформулируйте лабораторное решение и целевую величину</a:t>
+              <a:t>Решение и момент получения входов</a:t>
             </a:r>
           </a:p>
         </p:txBody>
@@ -32746,6 +31298,7 @@
           <a:lstStyle xmlns:a="http://schemas.openxmlformats.org/drawingml/2006/main"/>
           <a:p xmlns:a="http://schemas.openxmlformats.org/drawingml/2006/main">
             <a:pPr algn="l">
+              <a:buNone/>
               <a:defRPr sz="3825" b="1">
                 <a:solidFill>
                   <a:srgbClr val="80ED99"/>
@@ -32833,6 +31386,7 @@
           <a:lstStyle xmlns:a="http://schemas.openxmlformats.org/drawingml/2006/main"/>
           <a:p xmlns:a="http://schemas.openxmlformats.org/drawingml/2006/main">
             <a:pPr algn="l">
+              <a:buNone/>
               <a:defRPr sz="1875" b="0">
                 <a:solidFill>
                   <a:srgbClr val="F4F7FB"/>
@@ -32851,7 +31405,7 @@
                 <a:ea typeface="DejaVu Sans"/>
                 <a:cs typeface="DejaVu Sans"/>
               </a:rPr>
-              <a:t>Перечислите ID, единицы и время доступности признаков</a:t>
+              <a:t>Иерархия: день, партия, технический отсчёт</a:t>
             </a:r>
           </a:p>
         </p:txBody>
@@ -32890,6 +31444,7 @@
           <a:lstStyle xmlns:a="http://schemas.openxmlformats.org/drawingml/2006/main"/>
           <a:p xmlns:a="http://schemas.openxmlformats.org/drawingml/2006/main">
             <a:pPr algn="l">
+              <a:buNone/>
               <a:defRPr sz="3825" b="1">
                 <a:solidFill>
                   <a:srgbClr val="C4A7FF"/>
@@ -32977,6 +31532,7 @@
           <a:lstStyle xmlns:a="http://schemas.openxmlformats.org/drawingml/2006/main"/>
           <a:p xmlns:a="http://schemas.openxmlformats.org/drawingml/2006/main">
             <a:pPr algn="l">
+              <a:buNone/>
               <a:defRPr sz="1875" b="0">
                 <a:solidFill>
                   <a:srgbClr val="F4F7FB"/>
@@ -32995,7 +31551,7 @@
                 <a:ea typeface="DejaVu Sans"/>
                 <a:cs typeface="DejaVu Sans"/>
               </a:rPr>
-              <a:t>Посчитайте независимые группы</a:t>
+              <a:t>Цель, единицы и правило агрегации</a:t>
             </a:r>
           </a:p>
         </p:txBody>
@@ -33066,6 +31622,7 @@
           <a:lstStyle xmlns:a="http://schemas.openxmlformats.org/drawingml/2006/main"/>
           <a:p xmlns:a="http://schemas.openxmlformats.org/drawingml/2006/main">
             <a:pPr algn="ctr">
+              <a:buNone/>
               <a:defRPr sz="1500" b="1">
                 <a:solidFill>
                   <a:srgbClr val="48CAE4"/>
@@ -33084,7 +31641,7 @@
                 <a:ea typeface="DejaVu Sans"/>
                 <a:cs typeface="DejaVu Sans"/>
               </a:rPr>
-              <a:t>Если групп слишком мало, проектом станет план их получения</a:t>
+              <a:t>Если групп мало, планируйте их получение</a:t>
             </a:r>
           </a:p>
         </p:txBody>
@@ -33205,6 +31762,7 @@
           <a:lstStyle xmlns:a="http://schemas.openxmlformats.org/drawingml/2006/main"/>
           <a:p xmlns:a="http://schemas.openxmlformats.org/drawingml/2006/main">
             <a:pPr algn="l">
+              <a:buNone/>
               <a:defRPr sz="1050" b="1">
                 <a:solidFill>
                   <a:srgbClr val="48CAE4"/>
@@ -33223,7 +31781,7 @@
                 <a:ea typeface="DejaVu Sans"/>
                 <a:cs typeface="DejaVu Sans"/>
               </a:rPr>
-              <a:t>ПОСТАНОВКА И МЕТОД</a:t>
+              <a:t>ПРАКТИКА</a:t>
             </a:r>
           </a:p>
         </p:txBody>
@@ -33262,6 +31820,7 @@
           <a:lstStyle xmlns:a="http://schemas.openxmlformats.org/drawingml/2006/main"/>
           <a:p xmlns:a="http://schemas.openxmlformats.org/drawingml/2006/main">
             <a:pPr algn="l">
+              <a:buNone/>
               <a:defRPr sz="2925" b="1">
                 <a:solidFill>
                   <a:srgbClr val="F4F7FB"/>
@@ -33280,7 +31839,7 @@
                 <a:ea typeface="DejaVu Sans"/>
                 <a:cs typeface="DejaVu Sans"/>
               </a:rPr>
-              <a:t>Мини-проект: проверка</a:t>
+              <a:t>Мини-проект: независимая проверка</a:t>
             </a:r>
           </a:p>
         </p:txBody>
@@ -33349,6 +31908,7 @@
           <a:lstStyle xmlns:a="http://schemas.openxmlformats.org/drawingml/2006/main"/>
           <a:p xmlns:a="http://schemas.openxmlformats.org/drawingml/2006/main">
             <a:pPr algn="l">
+              <a:buNone/>
               <a:defRPr sz="825" b="1">
                 <a:solidFill>
                   <a:srgbClr val="A6B7C9"/>
@@ -33406,6 +31966,7 @@
           <a:lstStyle xmlns:a="http://schemas.openxmlformats.org/drawingml/2006/main"/>
           <a:p xmlns:a="http://schemas.openxmlformats.org/drawingml/2006/main">
             <a:pPr algn="r">
+              <a:buNone/>
               <a:defRPr sz="900" b="0">
                 <a:solidFill>
                   <a:srgbClr val="A6B7C9"/>
@@ -33463,6 +32024,7 @@
           <a:lstStyle xmlns:a="http://schemas.openxmlformats.org/drawingml/2006/main"/>
           <a:p xmlns:a="http://schemas.openxmlformats.org/drawingml/2006/main">
             <a:pPr algn="l">
+              <a:buNone/>
               <a:defRPr sz="2400" b="1">
                 <a:solidFill>
                   <a:srgbClr val="48CAE4"/>
@@ -33520,6 +32082,7 @@
           <a:lstStyle xmlns:a="http://schemas.openxmlformats.org/drawingml/2006/main"/>
           <a:p xmlns:a="http://schemas.openxmlformats.org/drawingml/2006/main">
             <a:pPr algn="l">
+              <a:buNone/>
               <a:defRPr sz="2025" b="1">
                 <a:solidFill>
                   <a:srgbClr val="F4F7FB"/>
@@ -33538,7 +32101,7 @@
                 <a:ea typeface="DejaVu Sans"/>
                 <a:cs typeface="DejaVu Sans"/>
               </a:rPr>
-              <a:t>Сравните baseline и один Pipeline на общих группах</a:t>
+              <a:t>Baseline и Pipeline на одинаковых партиях</a:t>
             </a:r>
           </a:p>
         </p:txBody>
@@ -33607,6 +32170,7 @@
           <a:lstStyle xmlns:a="http://schemas.openxmlformats.org/drawingml/2006/main"/>
           <a:p xmlns:a="http://schemas.openxmlformats.org/drawingml/2006/main">
             <a:pPr algn="l">
+              <a:buNone/>
               <a:defRPr sz="2400" b="1">
                 <a:solidFill>
                   <a:srgbClr val="80ED99"/>
@@ -33664,6 +32228,7 @@
           <a:lstStyle xmlns:a="http://schemas.openxmlformats.org/drawingml/2006/main"/>
           <a:p xmlns:a="http://schemas.openxmlformats.org/drawingml/2006/main">
             <a:pPr algn="l">
+              <a:buNone/>
               <a:defRPr sz="2025" b="0">
                 <a:solidFill>
                   <a:srgbClr val="F4F7FB"/>
@@ -33682,7 +32247,7 @@
                 <a:ea typeface="DejaVu Sans"/>
                 <a:cs typeface="DejaVu Sans"/>
               </a:rPr>
-              <a:t>Отчёт: MAE либо матрица ошибок и число партий</a:t>
+              <a:t>MAE, RMSE и ошибки каждой кампании</a:t>
             </a:r>
           </a:p>
         </p:txBody>
@@ -33751,6 +32316,7 @@
           <a:lstStyle xmlns:a="http://schemas.openxmlformats.org/drawingml/2006/main"/>
           <a:p xmlns:a="http://schemas.openxmlformats.org/drawingml/2006/main">
             <a:pPr algn="l">
+              <a:buNone/>
               <a:defRPr sz="2400" b="1">
                 <a:solidFill>
                   <a:srgbClr val="C4A7FF"/>
@@ -33808,6 +32374,7 @@
           <a:lstStyle xmlns:a="http://schemas.openxmlformats.org/drawingml/2006/main"/>
           <a:p xmlns:a="http://schemas.openxmlformats.org/drawingml/2006/main">
             <a:pPr algn="l">
+              <a:buNone/>
               <a:defRPr sz="2025" b="0">
                 <a:solidFill>
                   <a:srgbClr val="F4F7FB"/>
@@ -33826,7 +32393,7 @@
                 <a:ea typeface="DejaVu Sans"/>
                 <a:cs typeface="DejaVu Sans"/>
               </a:rPr>
-              <a:t>Покажите один график ошибки по подгруппам</a:t>
+              <a:t>График остатков и заранее записанный допуск</a:t>
             </a:r>
           </a:p>
         </p:txBody>
@@ -33927,6 +32494,7 @@
           <a:lstStyle xmlns:a="http://schemas.openxmlformats.org/drawingml/2006/main"/>
           <a:p xmlns:a="http://schemas.openxmlformats.org/drawingml/2006/main">
             <a:pPr algn="ctr">
+              <a:buNone/>
               <a:defRPr sz="1500" b="1">
                 <a:solidFill>
                   <a:srgbClr val="48CAE4"/>
@@ -33945,7 +32513,7 @@
                 <a:ea typeface="DejaVu Sans"/>
                 <a:cs typeface="DejaVu Sans"/>
               </a:rPr>
-              <a:t>Запишите предел полезности до просмотра результата</a:t>
+              <a:t>Отдельный опыт проверит поставку или прибор</a:t>
             </a:r>
           </a:p>
         </p:txBody>
@@ -34066,6 +32634,7 @@
           <a:lstStyle xmlns:a="http://schemas.openxmlformats.org/drawingml/2006/main"/>
           <a:p xmlns:a="http://schemas.openxmlformats.org/drawingml/2006/main">
             <a:pPr algn="l">
+              <a:buNone/>
               <a:defRPr sz="1050" b="1">
                 <a:solidFill>
                   <a:srgbClr val="48CAE4"/>
@@ -34084,7 +32653,7 @@
                 <a:ea typeface="DejaVu Sans"/>
                 <a:cs typeface="DejaVu Sans"/>
               </a:rPr>
-              <a:t>ТРИ ОПОРНЫХ ПУНКТА</a:t>
+              <a:t>ПРАКТИКА</a:t>
             </a:r>
           </a:p>
         </p:txBody>
@@ -34123,6 +32692,7 @@
           <a:lstStyle xmlns:a="http://schemas.openxmlformats.org/drawingml/2006/main"/>
           <a:p xmlns:a="http://schemas.openxmlformats.org/drawingml/2006/main">
             <a:pPr algn="l">
+              <a:buNone/>
               <a:defRPr sz="2925" b="1">
                 <a:solidFill>
                   <a:srgbClr val="F4F7FB"/>
@@ -34141,7 +32711,7 @@
                 <a:ea typeface="DejaVu Sans"/>
                 <a:cs typeface="DejaVu Sans"/>
               </a:rPr>
-              <a:t>Контрольные вопросы</a:t>
+              <a:t>Вопросы для обсуждения</a:t>
             </a:r>
           </a:p>
         </p:txBody>
@@ -34210,6 +32780,7 @@
           <a:lstStyle xmlns:a="http://schemas.openxmlformats.org/drawingml/2006/main"/>
           <a:p xmlns:a="http://schemas.openxmlformats.org/drawingml/2006/main">
             <a:pPr algn="l">
+              <a:buNone/>
               <a:defRPr sz="825" b="1">
                 <a:solidFill>
                   <a:srgbClr val="A6B7C9"/>
@@ -34267,6 +32838,7 @@
           <a:lstStyle xmlns:a="http://schemas.openxmlformats.org/drawingml/2006/main"/>
           <a:p xmlns:a="http://schemas.openxmlformats.org/drawingml/2006/main">
             <a:pPr algn="r">
+              <a:buNone/>
               <a:defRPr sz="900" b="0">
                 <a:solidFill>
                   <a:srgbClr val="A6B7C9"/>
@@ -34386,6 +32958,7 @@
           <a:lstStyle xmlns:a="http://schemas.openxmlformats.org/drawingml/2006/main"/>
           <a:p xmlns:a="http://schemas.openxmlformats.org/drawingml/2006/main">
             <a:pPr algn="l">
+              <a:buNone/>
               <a:defRPr sz="2850" b="1">
                 <a:solidFill>
                   <a:srgbClr val="48CAE4"/>
@@ -34443,6 +33016,7 @@
           <a:lstStyle xmlns:a="http://schemas.openxmlformats.org/drawingml/2006/main"/>
           <a:p xmlns:a="http://schemas.openxmlformats.org/drawingml/2006/main">
             <a:pPr algn="l">
+              <a:buNone/>
               <a:defRPr sz="2025" b="1">
                 <a:solidFill>
                   <a:srgbClr val="F4F7FB"/>
@@ -34461,7 +33035,7 @@
                 <a:ea typeface="DejaVu Sans"/>
                 <a:cs typeface="DejaVu Sans"/>
               </a:rPr>
-              <a:t>Что изменится при новой поставке сырья?</a:t>
+              <a:t>Почему 144 отсчёта не равны 144 синтезам?</a:t>
             </a:r>
           </a:p>
         </p:txBody>
@@ -34562,6 +33136,7 @@
           <a:lstStyle xmlns:a="http://schemas.openxmlformats.org/drawingml/2006/main"/>
           <a:p xmlns:a="http://schemas.openxmlformats.org/drawingml/2006/main">
             <a:pPr algn="l">
+              <a:buNone/>
               <a:defRPr sz="2850" b="1">
                 <a:solidFill>
                   <a:srgbClr val="80ED99"/>
@@ -34619,6 +33194,7 @@
           <a:lstStyle xmlns:a="http://schemas.openxmlformats.org/drawingml/2006/main"/>
           <a:p xmlns:a="http://schemas.openxmlformats.org/drawingml/2006/main">
             <a:pPr algn="l">
+              <a:buNone/>
               <a:defRPr sz="2025" b="0">
                 <a:solidFill>
                   <a:srgbClr val="F4F7FB"/>
@@ -34637,7 +33213,7 @@
                 <a:ea typeface="DejaVu Sans"/>
                 <a:cs typeface="DejaVu Sans"/>
               </a:rPr>
-              <a:t>Почему scaler.fit на всех данных нарушает тест?</a:t>
+              <a:t>Что оценивает разбиение по campaign_id?</a:t>
             </a:r>
           </a:p>
         </p:txBody>
@@ -34738,6 +33314,7 @@
           <a:lstStyle xmlns:a="http://schemas.openxmlformats.org/drawingml/2006/main"/>
           <a:p xmlns:a="http://schemas.openxmlformats.org/drawingml/2006/main">
             <a:pPr algn="l">
+              <a:buNone/>
               <a:defRPr sz="2850" b="1">
                 <a:solidFill>
                   <a:srgbClr val="C4A7FF"/>
@@ -34795,6 +33372,7 @@
           <a:lstStyle xmlns:a="http://schemas.openxmlformats.org/drawingml/2006/main"/>
           <a:p xmlns:a="http://schemas.openxmlformats.org/drawingml/2006/main">
             <a:pPr algn="l">
+              <a:buNone/>
               <a:defRPr sz="2025" b="0">
                 <a:solidFill>
                   <a:srgbClr val="F4F7FB"/>
@@ -34813,7 +33391,7 @@
                 <a:ea typeface="DejaVu Sans"/>
                 <a:cs typeface="DejaVu Sans"/>
               </a:rPr>
-              <a:t>Когда изображение можно включить в прогноз?</a:t>
+              <a:t>Можно ли решить по прогнозу 134 нм при пороге 135?</a:t>
             </a:r>
           </a:p>
         </p:txBody>
@@ -34884,6 +33462,7 @@
           <a:lstStyle xmlns:a="http://schemas.openxmlformats.org/drawingml/2006/main"/>
           <a:p xmlns:a="http://schemas.openxmlformats.org/drawingml/2006/main">
             <a:pPr algn="ctr">
+              <a:buNone/>
               <a:defRPr sz="1500" b="1">
                 <a:solidFill>
                   <a:srgbClr val="48CAE4"/>
@@ -34902,7 +33481,7 @@
                 <a:ea typeface="DejaVu Sans"/>
                 <a:cs typeface="DejaVu Sans"/>
               </a:rPr>
-              <a:t>Ответ должен упоминать будущее применение и единицу наблюдения</a:t>
+              <a:t>Укажите повторяемость, цену ошибок и новый опыт</a:t>
             </a:r>
           </a:p>
         </p:txBody>
@@ -35023,6 +33602,7 @@
           <a:lstStyle xmlns:a="http://schemas.openxmlformats.org/drawingml/2006/main"/>
           <a:p xmlns:a="http://schemas.openxmlformats.org/drawingml/2006/main">
             <a:pPr algn="l">
+              <a:buNone/>
               <a:defRPr sz="1050" b="1">
                 <a:solidFill>
                   <a:srgbClr val="48CAE4"/>
@@ -35041,7 +33621,7 @@
                 <a:ea typeface="DejaVu Sans"/>
                 <a:cs typeface="DejaVu Sans"/>
               </a:rPr>
-              <a:t>ПРОВЕРКА И ИНТЕРПРЕТАЦИЯ</a:t>
+              <a:t>ПРАКТИКА</a:t>
             </a:r>
           </a:p>
         </p:txBody>
@@ -35080,6 +33660,7 @@
           <a:lstStyle xmlns:a="http://schemas.openxmlformats.org/drawingml/2006/main"/>
           <a:p xmlns:a="http://schemas.openxmlformats.org/drawingml/2006/main">
             <a:pPr algn="l">
+              <a:buNone/>
               <a:defRPr sz="2925" b="1">
                 <a:solidFill>
                   <a:srgbClr val="F4F7FB"/>
@@ -35098,7 +33679,7 @@
                 <a:ea typeface="DejaVu Sans"/>
                 <a:cs typeface="DejaVu Sans"/>
               </a:rPr>
-              <a:t>Главный вывод</a:t>
+              <a:t>Что делает прогноз проверяемым</a:t>
             </a:r>
           </a:p>
         </p:txBody>
@@ -35167,6 +33748,7 @@
           <a:lstStyle xmlns:a="http://schemas.openxmlformats.org/drawingml/2006/main"/>
           <a:p xmlns:a="http://schemas.openxmlformats.org/drawingml/2006/main">
             <a:pPr algn="l">
+              <a:buNone/>
               <a:defRPr sz="825" b="1">
                 <a:solidFill>
                   <a:srgbClr val="A6B7C9"/>
@@ -35224,6 +33806,7 @@
           <a:lstStyle xmlns:a="http://schemas.openxmlformats.org/drawingml/2006/main"/>
           <a:p xmlns:a="http://schemas.openxmlformats.org/drawingml/2006/main">
             <a:pPr algn="r">
+              <a:buNone/>
               <a:defRPr sz="900" b="0">
                 <a:solidFill>
                   <a:srgbClr val="A6B7C9"/>
@@ -35343,6 +33926,7 @@
           <a:lstStyle xmlns:a="http://schemas.openxmlformats.org/drawingml/2006/main"/>
           <a:p xmlns:a="http://schemas.openxmlformats.org/drawingml/2006/main">
             <a:pPr algn="l">
+              <a:buNone/>
               <a:defRPr sz="1875" b="0">
                 <a:solidFill>
                   <a:srgbClr val="F4F7FB"/>
@@ -35361,7 +33945,7 @@
                 <a:ea typeface="DejaVu Sans"/>
                 <a:cs typeface="DejaVu Sans"/>
               </a:rPr>
-              <a:t>Формулируйте момент и объект прогноза</a:t>
+              <a:t>Контракт: решение, цель, момент, будущая группа</a:t>
             </a:r>
           </a:p>
         </p:txBody>
@@ -35430,6 +34014,7 @@
           <a:lstStyle xmlns:a="http://schemas.openxmlformats.org/drawingml/2006/main"/>
           <a:p xmlns:a="http://schemas.openxmlformats.org/drawingml/2006/main">
             <a:pPr algn="l">
+              <a:buNone/>
               <a:defRPr sz="1875" b="0">
                 <a:solidFill>
                   <a:srgbClr val="F4F7FB"/>
@@ -35448,7 +34033,7 @@
                 <a:ea typeface="DejaVu Sans"/>
                 <a:cs typeface="DejaVu Sans"/>
               </a:rPr>
-              <a:t>Сохраняйте независимость партий в каждой проверке</a:t>
+              <a:t>Непересечение дней и полный Pipeline в CV</a:t>
             </a:r>
           </a:p>
         </p:txBody>
@@ -35517,6 +34102,7 @@
           <a:lstStyle xmlns:a="http://schemas.openxmlformats.org/drawingml/2006/main"/>
           <a:p xmlns:a="http://schemas.openxmlformats.org/drawingml/2006/main">
             <a:pPr algn="l">
+              <a:buNone/>
               <a:defRPr sz="1875" b="0">
                 <a:solidFill>
                   <a:srgbClr val="F4F7FB"/>
@@ -35535,7 +34121,7 @@
                 <a:ea typeface="DejaVu Sans"/>
                 <a:cs typeface="DejaVu Sans"/>
               </a:rPr>
-              <a:t>Сравнивайте ошибку с baseline и стоимостью решения</a:t>
+              <a:t>Ошибка в нм, baseline и границы переноса</a:t>
             </a:r>
           </a:p>
         </p:txBody>
@@ -35574,6 +34160,7 @@
           <a:lstStyle xmlns:a="http://schemas.openxmlformats.org/drawingml/2006/main"/>
           <a:p xmlns:a="http://schemas.openxmlformats.org/drawingml/2006/main">
             <a:pPr algn="l">
+              <a:buNone/>
               <a:defRPr sz="1275" b="1">
                 <a:solidFill>
                   <a:srgbClr val="48CAE4"/>
@@ -35631,6 +34218,7 @@
           <a:lstStyle xmlns:a="http://schemas.openxmlformats.org/drawingml/2006/main"/>
           <a:p xmlns:a="http://schemas.openxmlformats.org/drawingml/2006/main">
             <a:pPr algn="l">
+              <a:buNone/>
               <a:defRPr sz="2025" b="1">
                 <a:solidFill>
                   <a:srgbClr val="F4F7FB"/>
@@ -35649,7 +34237,7 @@
                 <a:ea typeface="DejaVu Sans"/>
                 <a:cs typeface="DejaVu Sans"/>
               </a:rPr>
-              <a:t>Следующая лекция: методы, многомерная структура и новый опыт</a:t>
+              <a:t>Методы и выбор нового опыта — лекция 12</a:t>
             </a:r>
           </a:p>
         </p:txBody>
@@ -35770,6 +34358,7 @@
           <a:lstStyle xmlns:a="http://schemas.openxmlformats.org/drawingml/2006/main"/>
           <a:p xmlns:a="http://schemas.openxmlformats.org/drawingml/2006/main">
             <a:pPr algn="l">
+              <a:buNone/>
               <a:defRPr sz="1050" b="1">
                 <a:solidFill>
                   <a:srgbClr val="48CAE4"/>
@@ -35788,7 +34377,7 @@
                 <a:ea typeface="DejaVu Sans"/>
                 <a:cs typeface="DejaVu Sans"/>
               </a:rPr>
-              <a:t>ПРОВЕРКА И ИНТЕРПРЕТАЦИЯ</a:t>
+              <a:t>ПОСТАНОВКА</a:t>
             </a:r>
           </a:p>
         </p:txBody>
@@ -35827,6 +34416,7 @@
           <a:lstStyle xmlns:a="http://schemas.openxmlformats.org/drawingml/2006/main"/>
           <a:p xmlns:a="http://schemas.openxmlformats.org/drawingml/2006/main">
             <a:pPr algn="l">
+              <a:buNone/>
               <a:defRPr sz="2925" b="1">
                 <a:solidFill>
                   <a:srgbClr val="F4F7FB"/>
@@ -35845,7 +34435,7 @@
                 <a:ea typeface="DejaVu Sans"/>
                 <a:cs typeface="DejaVu Sans"/>
               </a:rPr>
-              <a:t>Регрессия или классификация</a:t>
+              <a:t>Число или категория</a:t>
             </a:r>
           </a:p>
         </p:txBody>
@@ -35914,6 +34504,7 @@
           <a:lstStyle xmlns:a="http://schemas.openxmlformats.org/drawingml/2006/main"/>
           <a:p xmlns:a="http://schemas.openxmlformats.org/drawingml/2006/main">
             <a:pPr algn="l">
+              <a:buNone/>
               <a:defRPr sz="825" b="1">
                 <a:solidFill>
                   <a:srgbClr val="A6B7C9"/>
@@ -35971,6 +34562,7 @@
           <a:lstStyle xmlns:a="http://schemas.openxmlformats.org/drawingml/2006/main"/>
           <a:p xmlns:a="http://schemas.openxmlformats.org/drawingml/2006/main">
             <a:pPr algn="r">
+              <a:buNone/>
               <a:defRPr sz="900" b="0">
                 <a:solidFill>
                   <a:srgbClr val="A6B7C9"/>
@@ -36090,6 +34682,7 @@
           <a:lstStyle xmlns:a="http://schemas.openxmlformats.org/drawingml/2006/main"/>
           <a:p xmlns:a="http://schemas.openxmlformats.org/drawingml/2006/main">
             <a:pPr algn="l">
+              <a:buNone/>
               <a:defRPr sz="1875" b="0">
                 <a:solidFill>
                   <a:srgbClr val="F4F7FB"/>
@@ -36108,7 +34701,7 @@
                 <a:ea typeface="DejaVu Sans"/>
                 <a:cs typeface="DejaVu Sans"/>
               </a:rPr>
-              <a:t>Регрессия: диаметр, сорбция, толщина покрытия</a:t>
+              <a:t>Регрессия сохраняет измеренный диаметр в нм</a:t>
             </a:r>
           </a:p>
         </p:txBody>
@@ -36177,6 +34770,7 @@
           <a:lstStyle xmlns:a="http://schemas.openxmlformats.org/drawingml/2006/main"/>
           <a:p xmlns:a="http://schemas.openxmlformats.org/drawingml/2006/main">
             <a:pPr algn="l">
+              <a:buNone/>
               <a:defRPr sz="1875" b="0">
                 <a:solidFill>
                   <a:srgbClr val="F4F7FB"/>
@@ -36195,7 +34789,7 @@
                 <a:ea typeface="DejaVu Sans"/>
                 <a:cs typeface="DejaVu Sans"/>
               </a:rPr>
-              <a:t>Классификация: прохождение заранее заданного порога</a:t>
+              <a:t>Классификация: «брак» по заранее заданному тесту</a:t>
             </a:r>
           </a:p>
         </p:txBody>
@@ -36264,6 +34858,7 @@
           <a:lstStyle xmlns:a="http://schemas.openxmlformats.org/drawingml/2006/main"/>
           <a:p xmlns:a="http://schemas.openxmlformats.org/drawingml/2006/main">
             <a:pPr algn="l">
+              <a:buNone/>
               <a:defRPr sz="1875" b="0">
                 <a:solidFill>
                   <a:srgbClr val="F4F7FB"/>
@@ -36282,7 +34877,7 @@
                 <a:ea typeface="DejaVu Sans"/>
                 <a:cs typeface="DejaVu Sans"/>
               </a:rPr>
-              <a:t>Произвольная бинаризация теряет часть информации</a:t>
+              <a:t>Порог 135 нм здесь учебный, не норматив</a:t>
             </a:r>
           </a:p>
         </p:txBody>
@@ -36321,6 +34916,7 @@
           <a:lstStyle xmlns:a="http://schemas.openxmlformats.org/drawingml/2006/main"/>
           <a:p xmlns:a="http://schemas.openxmlformats.org/drawingml/2006/main">
             <a:pPr algn="l">
+              <a:buNone/>
               <a:defRPr sz="1275" b="1">
                 <a:solidFill>
                   <a:srgbClr val="48CAE4"/>
@@ -36378,6 +34974,7 @@
           <a:lstStyle xmlns:a="http://schemas.openxmlformats.org/drawingml/2006/main"/>
           <a:p xmlns:a="http://schemas.openxmlformats.org/drawingml/2006/main">
             <a:pPr algn="l">
+              <a:buNone/>
               <a:defRPr sz="2025" b="1">
                 <a:solidFill>
                   <a:srgbClr val="F4F7FB"/>
@@ -36396,7 +34993,7 @@
                 <a:ea typeface="DejaVu Sans"/>
                 <a:cs typeface="DejaVu Sans"/>
               </a:rPr>
-              <a:t>Сохраняйте исходное измеренное свойство</a:t>
+              <a:t>При пороге учитывайте повторяемость измерения</a:t>
             </a:r>
           </a:p>
         </p:txBody>
@@ -36517,6 +35114,7 @@
           <a:lstStyle xmlns:a="http://schemas.openxmlformats.org/drawingml/2006/main"/>
           <a:p xmlns:a="http://schemas.openxmlformats.org/drawingml/2006/main">
             <a:pPr algn="l">
+              <a:buNone/>
               <a:defRPr sz="1050" b="1">
                 <a:solidFill>
                   <a:srgbClr val="48CAE4"/>
@@ -36535,7 +35133,7 @@
                 <a:ea typeface="DejaVu Sans"/>
                 <a:cs typeface="DejaVu Sans"/>
               </a:rPr>
-              <a:t>ПРИМЕР И ПРИМЕНЕНИЕ</a:t>
+              <a:t>ИСТОЧНИКИ</a:t>
             </a:r>
           </a:p>
         </p:txBody>
@@ -36574,6 +35172,7 @@
           <a:lstStyle xmlns:a="http://schemas.openxmlformats.org/drawingml/2006/main"/>
           <a:p xmlns:a="http://schemas.openxmlformats.org/drawingml/2006/main">
             <a:pPr algn="l">
+              <a:buNone/>
               <a:defRPr sz="2925" b="1">
                 <a:solidFill>
                   <a:srgbClr val="F4F7FB"/>
@@ -36592,7 +35191,7 @@
                 <a:ea typeface="DejaVu Sans"/>
                 <a:cs typeface="DejaVu Sans"/>
               </a:rPr>
-              <a:t>Источники и дальнейшее чтение</a:t>
+              <a:t>Источники и продолжение</a:t>
             </a:r>
           </a:p>
         </p:txBody>
@@ -36661,6 +35260,7 @@
           <a:lstStyle xmlns:a="http://schemas.openxmlformats.org/drawingml/2006/main"/>
           <a:p xmlns:a="http://schemas.openxmlformats.org/drawingml/2006/main">
             <a:pPr algn="l">
+              <a:buNone/>
               <a:defRPr sz="825" b="1">
                 <a:solidFill>
                   <a:srgbClr val="A6B7C9"/>
@@ -36718,6 +35318,7 @@
           <a:lstStyle xmlns:a="http://schemas.openxmlformats.org/drawingml/2006/main"/>
           <a:p xmlns:a="http://schemas.openxmlformats.org/drawingml/2006/main">
             <a:pPr algn="r">
+              <a:buNone/>
               <a:defRPr sz="900" b="0">
                 <a:solidFill>
                   <a:srgbClr val="A6B7C9"/>
@@ -36837,6 +35438,7 @@
           <a:lstStyle xmlns:a="http://schemas.openxmlformats.org/drawingml/2006/main"/>
           <a:p xmlns:a="http://schemas.openxmlformats.org/drawingml/2006/main">
             <a:pPr algn="l">
+              <a:buNone/>
               <a:defRPr sz="2025" b="1">
                 <a:solidFill>
                   <a:srgbClr val="F4F7FB"/>
@@ -36855,7 +35457,7 @@
                 <a:ea typeface="DejaVu Sans"/>
                 <a:cs typeface="DejaVu Sans"/>
               </a:rPr>
-              <a:t>scikit-learn: common pitfalls и Pipeline</a:t>
+              <a:t>scikit-learn: cross-validation и GroupKFold</a:t>
             </a:r>
           </a:p>
         </p:txBody>
@@ -36956,6 +35558,7 @@
           <a:lstStyle xmlns:a="http://schemas.openxmlformats.org/drawingml/2006/main"/>
           <a:p xmlns:a="http://schemas.openxmlformats.org/drawingml/2006/main">
             <a:pPr algn="l">
+              <a:buNone/>
               <a:defRPr sz="2025" b="0">
                 <a:solidFill>
                   <a:srgbClr val="F4F7FB"/>
@@ -36974,7 +35577,7 @@
                 <a:ea typeface="DejaVu Sans"/>
                 <a:cs typeface="DejaVu Sans"/>
               </a:rPr>
-              <a:t>scikit-learn: cross-validation и model evaluation</a:t>
+              <a:t>scikit-learn: common pitfalls, Pipeline, metrics</a:t>
             </a:r>
           </a:p>
         </p:txBody>
@@ -37075,6 +35678,7 @@
           <a:lstStyle xmlns:a="http://schemas.openxmlformats.org/drawingml/2006/main"/>
           <a:p xmlns:a="http://schemas.openxmlformats.org/drawingml/2006/main">
             <a:pPr algn="l">
+              <a:buNone/>
               <a:defRPr sz="2025" b="0">
                 <a:solidFill>
                   <a:srgbClr val="F4F7FB"/>
@@ -37093,7 +35697,7 @@
                 <a:ea typeface="DejaVu Sans"/>
                 <a:cs typeface="DejaVu Sans"/>
               </a:rPr>
-              <a:t>Конспект 11: определения, код и предметные ограничения</a:t>
+              <a:t>Конспект 11: код, расчёт и научные ограничения</a:t>
             </a:r>
           </a:p>
         </p:txBody>
@@ -37164,6 +35768,7 @@
           <a:lstStyle xmlns:a="http://schemas.openxmlformats.org/drawingml/2006/main"/>
           <a:p xmlns:a="http://schemas.openxmlformats.org/drawingml/2006/main">
             <a:pPr algn="ctr">
+              <a:buNone/>
               <a:defRPr sz="1500" b="1">
                 <a:solidFill>
                   <a:srgbClr val="48CAE4"/>
@@ -37182,7 +35787,7 @@
                 <a:ea typeface="DejaVu Sans"/>
                 <a:cs typeface="DejaVu Sans"/>
               </a:rPr>
-              <a:t>Ссылки и воспроизводимый пример — в Markdown-конспекте</a:t>
+              <a:t>Лекция 12: методы и следующий эксперимент</a:t>
             </a:r>
           </a:p>
         </p:txBody>
@@ -37303,6 +35908,7 @@
           <a:lstStyle xmlns:a="http://schemas.openxmlformats.org/drawingml/2006/main"/>
           <a:p xmlns:a="http://schemas.openxmlformats.org/drawingml/2006/main">
             <a:pPr algn="l">
+              <a:buNone/>
               <a:defRPr sz="1050" b="1">
                 <a:solidFill>
                   <a:srgbClr val="48CAE4"/>
@@ -37321,7 +35927,7 @@
                 <a:ea typeface="DejaVu Sans"/>
                 <a:cs typeface="DejaVu Sans"/>
               </a:rPr>
-              <a:t>ПРИМЕР И ПРИМЕНЕНИЕ</a:t>
+              <a:t>ПОСТАНОВКА</a:t>
             </a:r>
           </a:p>
         </p:txBody>
@@ -37360,6 +35966,7 @@
           <a:lstStyle xmlns:a="http://schemas.openxmlformats.org/drawingml/2006/main"/>
           <a:p xmlns:a="http://schemas.openxmlformats.org/drawingml/2006/main">
             <a:pPr algn="l">
+              <a:buNone/>
               <a:defRPr sz="2925" b="1">
                 <a:solidFill>
                   <a:srgbClr val="F4F7FB"/>
@@ -37378,7 +35985,7 @@
                 <a:ea typeface="DejaVu Sans"/>
                 <a:cs typeface="DejaVu Sans"/>
               </a:rPr>
-              <a:t>Состав, структура, режим</a:t>
+              <a:t>Какие признаки доступны до синтеза</a:t>
             </a:r>
           </a:p>
         </p:txBody>
@@ -37447,6 +36054,7 @@
           <a:lstStyle xmlns:a="http://schemas.openxmlformats.org/drawingml/2006/main"/>
           <a:p xmlns:a="http://schemas.openxmlformats.org/drawingml/2006/main">
             <a:pPr algn="l">
+              <a:buNone/>
               <a:defRPr sz="825" b="1">
                 <a:solidFill>
                   <a:srgbClr val="A6B7C9"/>
@@ -37504,6 +36112,7 @@
           <a:lstStyle xmlns:a="http://schemas.openxmlformats.org/drawingml/2006/main"/>
           <a:p xmlns:a="http://schemas.openxmlformats.org/drawingml/2006/main">
             <a:pPr algn="r">
+              <a:buNone/>
               <a:defRPr sz="900" b="0">
                 <a:solidFill>
                   <a:srgbClr val="A6B7C9"/>
@@ -37623,6 +36232,7 @@
           <a:lstStyle xmlns:a="http://schemas.openxmlformats.org/drawingml/2006/main"/>
           <a:p xmlns:a="http://schemas.openxmlformats.org/drawingml/2006/main">
             <a:pPr algn="l">
+              <a:buNone/>
               <a:defRPr sz="2025" b="1">
                 <a:solidFill>
                   <a:srgbClr val="F4F7FB"/>
@@ -37641,7 +36251,7 @@
                 <a:ea typeface="DejaVu Sans"/>
                 <a:cs typeface="DejaVu Sans"/>
               </a:rPr>
-              <a:t>Состав: доли компонентов и свойства сырья</a:t>
+              <a:t>Состав: сорт масла и доля компонента, мас. %</a:t>
             </a:r>
           </a:p>
         </p:txBody>
@@ -37742,6 +36352,7 @@
           <a:lstStyle xmlns:a="http://schemas.openxmlformats.org/drawingml/2006/main"/>
           <a:p xmlns:a="http://schemas.openxmlformats.org/drawingml/2006/main">
             <a:pPr algn="l">
+              <a:buNone/>
               <a:defRPr sz="2025" b="0">
                 <a:solidFill>
                   <a:srgbClr val="F4F7FB"/>
@@ -37760,7 +36371,7 @@
                 <a:ea typeface="DejaVu Sans"/>
                 <a:cs typeface="DejaVu Sans"/>
               </a:rPr>
-              <a:t>Структура: спектральные и морфологические признаки</a:t>
+              <a:t>Режим: время обработки, мин</a:t>
             </a:r>
           </a:p>
         </p:txBody>
@@ -37861,6 +36472,7 @@
           <a:lstStyle xmlns:a="http://schemas.openxmlformats.org/drawingml/2006/main"/>
           <a:p xmlns:a="http://schemas.openxmlformats.org/drawingml/2006/main">
             <a:pPr algn="l">
+              <a:buNone/>
               <a:defRPr sz="2025" b="0">
                 <a:solidFill>
                   <a:srgbClr val="F4F7FB"/>
@@ -37879,7 +36491,7 @@
                 <a:ea typeface="DejaVu Sans"/>
                 <a:cs typeface="DejaVu Sans"/>
               </a:rPr>
-              <a:t>Режим: температура, время, расход, перемешивание</a:t>
+              <a:t>Изображение готовой партии появится позже</a:t>
             </a:r>
           </a:p>
         </p:txBody>
@@ -37950,6 +36562,7 @@
           <a:lstStyle xmlns:a="http://schemas.openxmlformats.org/drawingml/2006/main"/>
           <a:p xmlns:a="http://schemas.openxmlformats.org/drawingml/2006/main">
             <a:pPr algn="ctr">
+              <a:buNone/>
               <a:defRPr sz="1500" b="1">
                 <a:solidFill>
                   <a:srgbClr val="48CAE4"/>
@@ -37968,7 +36581,7 @@
                 <a:ea typeface="DejaVu Sans"/>
                 <a:cs typeface="DejaVu Sans"/>
               </a:rPr>
-              <a:t>Признак должен иметь физический смысл и единицу</a:t>
+              <a:t>Для позднего прогноза допустимые входы меняются</a:t>
             </a:r>
           </a:p>
         </p:txBody>
@@ -38089,6 +36702,7 @@
           <a:lstStyle xmlns:a="http://schemas.openxmlformats.org/drawingml/2006/main"/>
           <a:p xmlns:a="http://schemas.openxmlformats.org/drawingml/2006/main">
             <a:pPr algn="l">
+              <a:buNone/>
               <a:defRPr sz="1050" b="1">
                 <a:solidFill>
                   <a:srgbClr val="48CAE4"/>
@@ -38107,7 +36721,7 @@
                 <a:ea typeface="DejaVu Sans"/>
                 <a:cs typeface="DejaVu Sans"/>
               </a:rPr>
-              <a:t>ПРАКТИЧЕСКИЙ ВЫВОД</a:t>
+              <a:t>ПОСТАНОВКА</a:t>
             </a:r>
           </a:p>
         </p:txBody>
@@ -38146,6 +36760,7 @@
           <a:lstStyle xmlns:a="http://schemas.openxmlformats.org/drawingml/2006/main"/>
           <a:p xmlns:a="http://schemas.openxmlformats.org/drawingml/2006/main">
             <a:pPr algn="l">
+              <a:buNone/>
               <a:defRPr sz="2925" b="1">
                 <a:solidFill>
                   <a:srgbClr val="F4F7FB"/>
@@ -38164,7 +36779,7 @@
                 <a:ea typeface="DejaVu Sans"/>
                 <a:cs typeface="DejaVu Sans"/>
               </a:rPr>
-              <a:t>Время доступности признака</a:t>
+              <a:t>Временная ось признака</a:t>
             </a:r>
           </a:p>
         </p:txBody>
@@ -38233,6 +36848,7 @@
           <a:lstStyle xmlns:a="http://schemas.openxmlformats.org/drawingml/2006/main"/>
           <a:p xmlns:a="http://schemas.openxmlformats.org/drawingml/2006/main">
             <a:pPr algn="l">
+              <a:buNone/>
               <a:defRPr sz="825" b="1">
                 <a:solidFill>
                   <a:srgbClr val="A6B7C9"/>
@@ -38290,6 +36906,7 @@
           <a:lstStyle xmlns:a="http://schemas.openxmlformats.org/drawingml/2006/main"/>
           <a:p xmlns:a="http://schemas.openxmlformats.org/drawingml/2006/main">
             <a:pPr algn="r">
+              <a:buNone/>
               <a:defRPr sz="900" b="0">
                 <a:solidFill>
                   <a:srgbClr val="A6B7C9"/>
@@ -38347,6 +36964,7 @@
           <a:lstStyle xmlns:a="http://schemas.openxmlformats.org/drawingml/2006/main"/>
           <a:p xmlns:a="http://schemas.openxmlformats.org/drawingml/2006/main">
             <a:pPr algn="l">
+              <a:buNone/>
               <a:defRPr sz="3825" b="1">
                 <a:solidFill>
                   <a:srgbClr val="48CAE4"/>
@@ -38434,6 +37052,7 @@
           <a:lstStyle xmlns:a="http://schemas.openxmlformats.org/drawingml/2006/main"/>
           <a:p xmlns:a="http://schemas.openxmlformats.org/drawingml/2006/main">
             <a:pPr algn="l">
+              <a:buNone/>
               <a:defRPr sz="1875" b="1">
                 <a:solidFill>
                   <a:srgbClr val="F4F7FB"/>
@@ -38452,7 +37071,7 @@
                 <a:ea typeface="DejaVu Sans"/>
                 <a:cs typeface="DejaVu Sans"/>
               </a:rPr>
-              <a:t>Рецептура доступна перед синтезом</a:t>
+              <a:t>Рецептура записана до запуска</a:t>
             </a:r>
           </a:p>
         </p:txBody>
@@ -38491,6 +37110,7 @@
           <a:lstStyle xmlns:a="http://schemas.openxmlformats.org/drawingml/2006/main"/>
           <a:p xmlns:a="http://schemas.openxmlformats.org/drawingml/2006/main">
             <a:pPr algn="l">
+              <a:buNone/>
               <a:defRPr sz="3825" b="1">
                 <a:solidFill>
                   <a:srgbClr val="80ED99"/>
@@ -38578,6 +37198,7 @@
           <a:lstStyle xmlns:a="http://schemas.openxmlformats.org/drawingml/2006/main"/>
           <a:p xmlns:a="http://schemas.openxmlformats.org/drawingml/2006/main">
             <a:pPr algn="l">
+              <a:buNone/>
               <a:defRPr sz="1875" b="0">
                 <a:solidFill>
                   <a:srgbClr val="F4F7FB"/>
@@ -38596,7 +37217,7 @@
                 <a:ea typeface="DejaVu Sans"/>
                 <a:cs typeface="DejaVu Sans"/>
               </a:rPr>
-              <a:t>Морфология доступна после изготовления образца</a:t>
+              <a:t>Морфологию получают после приготовления</a:t>
             </a:r>
           </a:p>
         </p:txBody>
@@ -38635,6 +37256,7 @@
           <a:lstStyle xmlns:a="http://schemas.openxmlformats.org/drawingml/2006/main"/>
           <a:p xmlns:a="http://schemas.openxmlformats.org/drawingml/2006/main">
             <a:pPr algn="l">
+              <a:buNone/>
               <a:defRPr sz="3825" b="1">
                 <a:solidFill>
                   <a:srgbClr val="C4A7FF"/>
@@ -38722,6 +37344,7 @@
           <a:lstStyle xmlns:a="http://schemas.openxmlformats.org/drawingml/2006/main"/>
           <a:p xmlns:a="http://schemas.openxmlformats.org/drawingml/2006/main">
             <a:pPr algn="l">
+              <a:buNone/>
               <a:defRPr sz="1875" b="0">
                 <a:solidFill>
                   <a:srgbClr val="F4F7FB"/>
@@ -38740,7 +37363,7 @@
                 <a:ea typeface="DejaVu Sans"/>
                 <a:cs typeface="DejaVu Sans"/>
               </a:rPr>
-              <a:t>Результат финального теста нельзя включать в ранний прогноз</a:t>
+              <a:t>QC и диаметр известны после измерения</a:t>
             </a:r>
           </a:p>
         </p:txBody>
@@ -38811,6 +37434,7 @@
           <a:lstStyle xmlns:a="http://schemas.openxmlformats.org/drawingml/2006/main"/>
           <a:p xmlns:a="http://schemas.openxmlformats.org/drawingml/2006/main">
             <a:pPr algn="ctr">
+              <a:buNone/>
               <a:defRPr sz="1500" b="1">
                 <a:solidFill>
                   <a:srgbClr val="48CAE4"/>
@@ -38829,7 +37453,7 @@
                 <a:ea typeface="DejaVu Sans"/>
                 <a:cs typeface="DejaVu Sans"/>
               </a:rPr>
-              <a:t>Одна колонка может быть допустимой для позднего решения и утечкой для раннего</a:t>
+              <a:t>Поздний признак в ранней модели сообщает будущее</a:t>
             </a:r>
           </a:p>
         </p:txBody>
@@ -38950,6 +37574,7 @@
           <a:lstStyle xmlns:a="http://schemas.openxmlformats.org/drawingml/2006/main"/>
           <a:p xmlns:a="http://schemas.openxmlformats.org/drawingml/2006/main">
             <a:pPr algn="l">
+              <a:buNone/>
               <a:defRPr sz="1050" b="1">
                 <a:solidFill>
                   <a:srgbClr val="48CAE4"/>
@@ -38968,7 +37593,7 @@
                 <a:ea typeface="DejaVu Sans"/>
                 <a:cs typeface="DejaVu Sans"/>
               </a:rPr>
-              <a:t>ПОСТАНОВКА И МЕТОД</a:t>
+              <a:t>ДАННЫЕ И НЕЗАВИСИМОСТЬ</a:t>
             </a:r>
           </a:p>
         </p:txBody>
@@ -39007,6 +37632,7 @@
           <a:lstStyle xmlns:a="http://schemas.openxmlformats.org/drawingml/2006/main"/>
           <a:p xmlns:a="http://schemas.openxmlformats.org/drawingml/2006/main">
             <a:pPr algn="l">
+              <a:buNone/>
               <a:defRPr sz="2925" b="1">
                 <a:solidFill>
                   <a:srgbClr val="F4F7FB"/>
@@ -39025,7 +37651,7 @@
                 <a:ea typeface="DejaVu Sans"/>
                 <a:cs typeface="DejaVu Sans"/>
               </a:rPr>
-              <a:t>Объект измерения не равен строке данных</a:t>
+              <a:t>Уровни вложенности данных</a:t>
             </a:r>
           </a:p>
         </p:txBody>
@@ -39094,6 +37720,7 @@
           <a:lstStyle xmlns:a="http://schemas.openxmlformats.org/drawingml/2006/main"/>
           <a:p xmlns:a="http://schemas.openxmlformats.org/drawingml/2006/main">
             <a:pPr algn="l">
+              <a:buNone/>
               <a:defRPr sz="825" b="1">
                 <a:solidFill>
                   <a:srgbClr val="A6B7C9"/>
@@ -39151,6 +37778,7 @@
           <a:lstStyle xmlns:a="http://schemas.openxmlformats.org/drawingml/2006/main"/>
           <a:p xmlns:a="http://schemas.openxmlformats.org/drawingml/2006/main">
             <a:pPr algn="r">
+              <a:buNone/>
               <a:defRPr sz="900" b="0">
                 <a:solidFill>
                   <a:srgbClr val="A6B7C9"/>
@@ -39238,6 +37866,7 @@
           <a:lstStyle xmlns:a="http://schemas.openxmlformats.org/drawingml/2006/main"/>
           <a:p xmlns:a="http://schemas.openxmlformats.org/drawingml/2006/main">
             <a:pPr algn="l">
+              <a:buNone/>
               <a:defRPr sz="1800" b="1">
                 <a:solidFill>
                   <a:srgbClr val="F4F7FB"/>
@@ -39256,7 +37885,7 @@
                 <a:ea typeface="DejaVu Sans"/>
                 <a:cs typeface="DejaVu Sans"/>
               </a:rPr>
-              <a:t>Партия → образец → поле зрения → объект</a:t>
+              <a:t>День → партия → проба → измерение</a:t>
             </a:r>
           </a:p>
         </p:txBody>
@@ -39325,6 +37954,7 @@
           <a:lstStyle xmlns:a="http://schemas.openxmlformats.org/drawingml/2006/main"/>
           <a:p xmlns:a="http://schemas.openxmlformats.org/drawingml/2006/main">
             <a:pPr algn="l">
+              <a:buNone/>
               <a:defRPr sz="1800" b="0">
                 <a:solidFill>
                   <a:srgbClr val="F4F7FB"/>
@@ -39343,7 +37973,7 @@
                 <a:ea typeface="DejaVu Sans"/>
                 <a:cs typeface="DejaVu Sans"/>
               </a:rPr>
-              <a:t>Много измерений одной партии сохраняют общие условия</a:t>
+              <a:t>Повторы партии разделяют её условия получения</a:t>
             </a:r>
           </a:p>
         </p:txBody>
@@ -39412,6 +38042,7 @@
           <a:lstStyle xmlns:a="http://schemas.openxmlformats.org/drawingml/2006/main"/>
           <a:p xmlns:a="http://schemas.openxmlformats.org/drawingml/2006/main">
             <a:pPr algn="l">
+              <a:buNone/>
               <a:defRPr sz="1800" b="0">
                 <a:solidFill>
                   <a:srgbClr val="F4F7FB"/>
@@ -39430,7 +38061,7 @@
                 <a:ea typeface="DejaVu Sans"/>
                 <a:cs typeface="DejaVu Sans"/>
               </a:rPr>
-              <a:t>Независимых синтезов столько, сколько независимых партий</a:t>
+              <a:t>Новый день требует удержать все его партии вместе</a:t>
             </a:r>
           </a:p>
         </p:txBody>
@@ -39533,6 +38164,7 @@
           <a:lstStyle xmlns:a="http://schemas.openxmlformats.org/drawingml/2006/main"/>
           <a:p xmlns:a="http://schemas.openxmlformats.org/drawingml/2006/main">
             <a:pPr algn="ctr">
+              <a:buNone/>
               <a:defRPr sz="1350" b="1">
                 <a:solidFill>
                   <a:srgbClr val="48CAE4"/>
@@ -39551,7 +38183,7 @@
                 <a:ea typeface="DejaVu Sans"/>
                 <a:cs typeface="DejaVu Sans"/>
               </a:rPr>
-              <a:t>Поставка сырья</a:t>
+              <a:t>Поставка масла</a:t>
             </a:r>
           </a:p>
         </p:txBody>
@@ -39590,6 +38222,7 @@
           <a:lstStyle xmlns:a="http://schemas.openxmlformats.org/drawingml/2006/main"/>
           <a:p xmlns:a="http://schemas.openxmlformats.org/drawingml/2006/main">
             <a:pPr algn="ctr">
+              <a:buNone/>
               <a:defRPr sz="1950" b="1">
                 <a:solidFill>
                   <a:srgbClr val="A6B7C9"/>
@@ -39679,6 +38312,7 @@
           <a:lstStyle xmlns:a="http://schemas.openxmlformats.org/drawingml/2006/main"/>
           <a:p xmlns:a="http://schemas.openxmlformats.org/drawingml/2006/main">
             <a:pPr algn="ctr">
+              <a:buNone/>
               <a:defRPr sz="1350" b="1">
                 <a:solidFill>
                   <a:srgbClr val="80ED99"/>
@@ -39697,7 +38331,7 @@
                 <a:ea typeface="DejaVu Sans"/>
                 <a:cs typeface="DejaVu Sans"/>
               </a:rPr>
-              <a:t>Партия синтеза</a:t>
+              <a:t>День синтеза</a:t>
             </a:r>
           </a:p>
         </p:txBody>
@@ -39736,6 +38370,7 @@
           <a:lstStyle xmlns:a="http://schemas.openxmlformats.org/drawingml/2006/main"/>
           <a:p xmlns:a="http://schemas.openxmlformats.org/drawingml/2006/main">
             <a:pPr algn="ctr">
+              <a:buNone/>
               <a:defRPr sz="1950" b="1">
                 <a:solidFill>
                   <a:srgbClr val="A6B7C9"/>
@@ -39825,6 +38460,7 @@
           <a:lstStyle xmlns:a="http://schemas.openxmlformats.org/drawingml/2006/main"/>
           <a:p xmlns:a="http://schemas.openxmlformats.org/drawingml/2006/main">
             <a:pPr algn="ctr">
+              <a:buNone/>
               <a:defRPr sz="1350" b="1">
                 <a:solidFill>
                   <a:srgbClr val="C4A7FF"/>
@@ -39843,7 +38479,7 @@
                 <a:ea typeface="DejaVu Sans"/>
                 <a:cs typeface="DejaVu Sans"/>
               </a:rPr>
-              <a:t>Образец</a:t>
+              <a:t>Партия</a:t>
             </a:r>
           </a:p>
         </p:txBody>
@@ -39882,6 +38518,7 @@
           <a:lstStyle xmlns:a="http://schemas.openxmlformats.org/drawingml/2006/main"/>
           <a:p xmlns:a="http://schemas.openxmlformats.org/drawingml/2006/main">
             <a:pPr algn="ctr">
+              <a:buNone/>
               <a:defRPr sz="1950" b="1">
                 <a:solidFill>
                   <a:srgbClr val="A6B7C9"/>
@@ -39971,6 +38608,7 @@
           <a:lstStyle xmlns:a="http://schemas.openxmlformats.org/drawingml/2006/main"/>
           <a:p xmlns:a="http://schemas.openxmlformats.org/drawingml/2006/main">
             <a:pPr algn="ctr">
+              <a:buNone/>
               <a:defRPr sz="1350" b="1">
                 <a:solidFill>
                   <a:srgbClr val="F9C74F"/>
@@ -39989,7 +38627,7 @@
                 <a:ea typeface="DejaVu Sans"/>
                 <a:cs typeface="DejaVu Sans"/>
               </a:rPr>
-              <a:t>Поле зрения</a:t>
+              <a:t>Отсчёт</a:t>
             </a:r>
           </a:p>
         </p:txBody>
@@ -40110,6 +38748,7 @@
           <a:lstStyle xmlns:a="http://schemas.openxmlformats.org/drawingml/2006/main"/>
           <a:p xmlns:a="http://schemas.openxmlformats.org/drawingml/2006/main">
             <a:pPr algn="l">
+              <a:buNone/>
               <a:defRPr sz="1050" b="1">
                 <a:solidFill>
                   <a:srgbClr val="48CAE4"/>
@@ -40128,7 +38767,7 @@
                 <a:ea typeface="DejaVu Sans"/>
                 <a:cs typeface="DejaVu Sans"/>
               </a:rPr>
-              <a:t>ТРИ ОПОРНЫХ ПУНКТА</a:t>
+              <a:t>ДАННЫЕ И НЕЗАВИСИМОСТЬ</a:t>
             </a:r>
           </a:p>
         </p:txBody>
@@ -40167,6 +38806,7 @@
           <a:lstStyle xmlns:a="http://schemas.openxmlformats.org/drawingml/2006/main"/>
           <a:p xmlns:a="http://schemas.openxmlformats.org/drawingml/2006/main">
             <a:pPr algn="l">
+              <a:buNone/>
               <a:defRPr sz="2925" b="1">
                 <a:solidFill>
                   <a:srgbClr val="F4F7FB"/>
@@ -40185,7 +38825,7 @@
                 <a:ea typeface="DejaVu Sans"/>
                 <a:cs typeface="DejaVu Sans"/>
               </a:rPr>
-              <a:t>Как подготовить таблицу</a:t>
+              <a:t>Почему повторы не заменяют синтезы</a:t>
             </a:r>
           </a:p>
         </p:txBody>
@@ -40254,6 +38894,7 @@
           <a:lstStyle xmlns:a="http://schemas.openxmlformats.org/drawingml/2006/main"/>
           <a:p xmlns:a="http://schemas.openxmlformats.org/drawingml/2006/main">
             <a:pPr algn="l">
+              <a:buNone/>
               <a:defRPr sz="825" b="1">
                 <a:solidFill>
                   <a:srgbClr val="A6B7C9"/>
@@ -40311,6 +38952,7 @@
           <a:lstStyle xmlns:a="http://schemas.openxmlformats.org/drawingml/2006/main"/>
           <a:p xmlns:a="http://schemas.openxmlformats.org/drawingml/2006/main">
             <a:pPr algn="r">
+              <a:buNone/>
               <a:defRPr sz="900" b="0">
                 <a:solidFill>
                   <a:srgbClr val="A6B7C9"/>
@@ -40430,6 +39072,7 @@
           <a:lstStyle xmlns:a="http://schemas.openxmlformats.org/drawingml/2006/main"/>
           <a:p xmlns:a="http://schemas.openxmlformats.org/drawingml/2006/main">
             <a:pPr algn="l">
+              <a:buNone/>
               <a:defRPr sz="2850" b="1">
                 <a:solidFill>
                   <a:srgbClr val="48CAE4"/>
@@ -40487,6 +39130,7 @@
           <a:lstStyle xmlns:a="http://schemas.openxmlformats.org/drawingml/2006/main"/>
           <a:p xmlns:a="http://schemas.openxmlformats.org/drawingml/2006/main">
             <a:pPr algn="l">
+              <a:buNone/>
               <a:defRPr sz="2025" b="1">
                 <a:solidFill>
                   <a:srgbClr val="F4F7FB"/>
@@ -40505,7 +39149,7 @@
                 <a:ea typeface="DejaVu Sans"/>
                 <a:cs typeface="DejaVu Sans"/>
               </a:rPr>
-              <a:t>Один ID партии связывает рецепт, измерение и метаданные</a:t>
+              <a:t>y = рецепт + день + партия + шум</a:t>
             </a:r>
           </a:p>
         </p:txBody>
@@ -40606,6 +39250,7 @@
           <a:lstStyle xmlns:a="http://schemas.openxmlformats.org/drawingml/2006/main"/>
           <a:p xmlns:a="http://schemas.openxmlformats.org/drawingml/2006/main">
             <a:pPr algn="l">
+              <a:buNone/>
               <a:defRPr sz="2850" b="1">
                 <a:solidFill>
                   <a:srgbClr val="80ED99"/>
@@ -40663,6 +39308,7 @@
           <a:lstStyle xmlns:a="http://schemas.openxmlformats.org/drawingml/2006/main"/>
           <a:p xmlns:a="http://schemas.openxmlformats.org/drawingml/2006/main">
             <a:pPr algn="l">
+              <a:buNone/>
               <a:defRPr sz="2025" b="0">
                 <a:solidFill>
                   <a:srgbClr val="F4F7FB"/>
@@ -40681,7 +39327,7 @@
                 <a:ea typeface="DejaVu Sans"/>
                 <a:cs typeface="DejaVu Sans"/>
               </a:rPr>
-              <a:t>Единицы, пропуски и пределы измерения записаны явно</a:t>
+              <a:t>Var(среднего) = 36 + 16 + 9/m</a:t>
             </a:r>
           </a:p>
         </p:txBody>
@@ -40782,6 +39428,7 @@
           <a:lstStyle xmlns:a="http://schemas.openxmlformats.org/drawingml/2006/main"/>
           <a:p xmlns:a="http://schemas.openxmlformats.org/drawingml/2006/main">
             <a:pPr algn="l">
+              <a:buNone/>
               <a:defRPr sz="2850" b="1">
                 <a:solidFill>
                   <a:srgbClr val="C4A7FF"/>
@@ -40839,6 +39486,7 @@
           <a:lstStyle xmlns:a="http://schemas.openxmlformats.org/drawingml/2006/main"/>
           <a:p xmlns:a="http://schemas.openxmlformats.org/drawingml/2006/main">
             <a:pPr algn="l">
+              <a:buNone/>
               <a:defRPr sz="2025" b="0">
                 <a:solidFill>
                   <a:srgbClr val="F4F7FB"/>
@@ -40857,7 +39505,7 @@
                 <a:ea typeface="DejaVu Sans"/>
                 <a:cs typeface="DejaVu Sans"/>
               </a:rPr>
-              <a:t>Правило агрегации повторов фиксируется до анализа</a:t>
+              <a:t>m = 1, 3, 9: 61, 55, 53 нм²</a:t>
             </a:r>
           </a:p>
         </p:txBody>
@@ -40928,6 +39576,7 @@
           <a:lstStyle xmlns:a="http://schemas.openxmlformats.org/drawingml/2006/main"/>
           <a:p xmlns:a="http://schemas.openxmlformats.org/drawingml/2006/main">
             <a:pPr algn="ctr">
+              <a:buNone/>
               <a:defRPr sz="1500" b="1">
                 <a:solidFill>
                   <a:srgbClr val="48CAE4"/>
@@ -40946,7 +39595,7 @@
                 <a:ea typeface="DejaVu Sans"/>
                 <a:cs typeface="DejaVu Sans"/>
               </a:rPr>
-              <a:t>Сохраняйте исходные измерения отдельно от признаков модели</a:t>
+              <a:t>Новые измерения снижают только последний член</a:t>
             </a:r>
           </a:p>
         </p:txBody>
@@ -41067,6 +39716,7 @@
           <a:lstStyle xmlns:a="http://schemas.openxmlformats.org/drawingml/2006/main"/>
           <a:p xmlns:a="http://schemas.openxmlformats.org/drawingml/2006/main">
             <a:pPr algn="l">
+              <a:buNone/>
               <a:defRPr sz="1050" b="1">
                 <a:solidFill>
                   <a:srgbClr val="48CAE4"/>
@@ -41085,7 +39735,7 @@
                 <a:ea typeface="DejaVu Sans"/>
                 <a:cs typeface="DejaVu Sans"/>
               </a:rPr>
-              <a:t>ПРОВЕРКА И ИНТЕРПРЕТАЦИЯ</a:t>
+              <a:t>ДАННЫЕ И НЕЗАВИСИМОСТЬ</a:t>
             </a:r>
           </a:p>
         </p:txBody>
@@ -41124,6 +39774,7 @@
           <a:lstStyle xmlns:a="http://schemas.openxmlformats.org/drawingml/2006/main"/>
           <a:p xmlns:a="http://schemas.openxmlformats.org/drawingml/2006/main">
             <a:pPr algn="l">
+              <a:buNone/>
               <a:defRPr sz="2925" b="1">
                 <a:solidFill>
                   <a:srgbClr val="F4F7FB"/>
@@ -41142,7 +39793,7 @@
                 <a:ea typeface="DejaVu Sans"/>
                 <a:cs typeface="DejaVu Sans"/>
               </a:rPr>
-              <a:t>Минимальный словарь данных</a:t>
+              <a:t>Таблица на уровне партии</a:t>
             </a:r>
           </a:p>
         </p:txBody>
@@ -41211,6 +39862,7 @@
           <a:lstStyle xmlns:a="http://schemas.openxmlformats.org/drawingml/2006/main"/>
           <a:p xmlns:a="http://schemas.openxmlformats.org/drawingml/2006/main">
             <a:pPr algn="l">
+              <a:buNone/>
               <a:defRPr sz="825" b="1">
                 <a:solidFill>
                   <a:srgbClr val="A6B7C9"/>
@@ -41268,6 +39920,7 @@
           <a:lstStyle xmlns:a="http://schemas.openxmlformats.org/drawingml/2006/main"/>
           <a:p xmlns:a="http://schemas.openxmlformats.org/drawingml/2006/main">
             <a:pPr algn="r">
+              <a:buNone/>
               <a:defRPr sz="900" b="0">
                 <a:solidFill>
                   <a:srgbClr val="A6B7C9"/>
@@ -41387,6 +40040,7 @@
           <a:lstStyle xmlns:a="http://schemas.openxmlformats.org/drawingml/2006/main"/>
           <a:p xmlns:a="http://schemas.openxmlformats.org/drawingml/2006/main">
             <a:pPr algn="l">
+              <a:buNone/>
               <a:defRPr sz="1875" b="0">
                 <a:solidFill>
                   <a:srgbClr val="F4F7FB"/>
@@ -41405,7 +40059,7 @@
                 <a:ea typeface="DejaVu Sans"/>
                 <a:cs typeface="DejaVu Sans"/>
               </a:rPr>
-              <a:t>oil_fraction: %, вход до синтеза</a:t>
+              <a:t>Одна строка: рецепт, ID дня и партии</a:t>
             </a:r>
           </a:p>
         </p:txBody>
@@ -41474,6 +40128,7 @@
           <a:lstStyle xmlns:a="http://schemas.openxmlformats.org/drawingml/2006/main"/>
           <a:p xmlns:a="http://schemas.openxmlformats.org/drawingml/2006/main">
             <a:pPr algn="l">
+              <a:buNone/>
               <a:defRPr sz="1875" b="0">
                 <a:solidFill>
                   <a:srgbClr val="F4F7FB"/>
@@ -41492,7 +40147,7 @@
                 <a:ea typeface="DejaVu Sans"/>
                 <a:cs typeface="DejaVu Sans"/>
               </a:rPr>
-              <a:t>diameter_nm: нм, измеренная цель</a:t>
+              <a:t>Цель: среднее трёх отсчётов, нм</a:t>
             </a:r>
           </a:p>
         </p:txBody>
@@ -41561,6 +40216,7 @@
           <a:lstStyle xmlns:a="http://schemas.openxmlformats.org/drawingml/2006/main"/>
           <a:p xmlns:a="http://schemas.openxmlformats.org/drawingml/2006/main">
             <a:pPr algn="l">
+              <a:buNone/>
               <a:defRPr sz="1875" b="0">
                 <a:solidFill>
                   <a:srgbClr val="F4F7FB"/>
@@ -41579,7 +40235,7 @@
                 <a:ea typeface="DejaVu Sans"/>
                 <a:cs typeface="DejaVu Sans"/>
               </a:rPr>
-              <a:t>batch_id: ID независимой партии, группа проверки</a:t>
+              <a:t>Храните SD и число измерений для контроля</a:t>
             </a:r>
           </a:p>
         </p:txBody>
@@ -41618,6 +40274,7 @@
           <a:lstStyle xmlns:a="http://schemas.openxmlformats.org/drawingml/2006/main"/>
           <a:p xmlns:a="http://schemas.openxmlformats.org/drawingml/2006/main">
             <a:pPr algn="l">
+              <a:buNone/>
               <a:defRPr sz="1275" b="1">
                 <a:solidFill>
                   <a:srgbClr val="48CAE4"/>
@@ -41675,6 +40332,7 @@
           <a:lstStyle xmlns:a="http://schemas.openxmlformats.org/drawingml/2006/main"/>
           <a:p xmlns:a="http://schemas.openxmlformats.org/drawingml/2006/main">
             <a:pPr algn="l">
+              <a:buNone/>
               <a:defRPr sz="2025" b="1">
                 <a:solidFill>
                   <a:srgbClr val="F4F7FB"/>
@@ -41693,7 +40351,7 @@
                 <a:ea typeface="DejaVu Sans"/>
                 <a:cs typeface="DejaVu Sans"/>
               </a:rPr>
-              <a:t>ID не должен случайно стать числовым предиктором</a:t>
+              <a:t>ID и технический номер не передавайте как X</a:t>
             </a:r>
           </a:p>
         </p:txBody>
